--- a/docs/TRANSFORMER_PIPELINE.pptx
+++ b/docs/TRANSFORMER_PIPELINE.pptx
@@ -1,6 +1,6 @@
 
 <file path=ppt/presentation.xml><?xml version="1.0" encoding="utf-8"?>
-<p:presentation xmlns:a="http://schemas.openxmlformats.org/drawingml/2006/main" xmlns:p="http://schemas.openxmlformats.org/presentationml/2006/main" xmlns:r="http://schemas.openxmlformats.org/officeDocument/2006/relationships" autoCompressPictures="0" saveSubsetFonts="1">
+<p:presentation xmlns:a="http://schemas.openxmlformats.org/drawingml/2006/main" xmlns:r="http://schemas.openxmlformats.org/officeDocument/2006/relationships" xmlns:p="http://schemas.openxmlformats.org/presentationml/2006/main" saveSubsetFonts="1" autoCompressPictures="0">
   <p:sldMasterIdLst>
     <p:sldMasterId id="2147483648" r:id="rId1"/>
   </p:sldMasterIdLst>
@@ -16,17 +16,16 @@
     <p:sldId id="264" r:id="rId10"/>
     <p:sldId id="265" r:id="rId11"/>
     <p:sldId id="266" r:id="rId12"/>
-    <p:sldId id="267" r:id="rId13"/>
-    <p:sldId id="268" r:id="rId14"/>
-    <p:sldId id="269" r:id="rId15"/>
-    <p:sldId id="270" r:id="rId16"/>
-    <p:sldId id="271" r:id="rId17"/>
-    <p:sldId id="272" r:id="rId18"/>
-    <p:sldId id="273" r:id="rId19"/>
-    <p:sldId id="274" r:id="rId20"/>
-    <p:sldId id="275" r:id="rId21"/>
-    <p:sldId id="276" r:id="rId22"/>
-    <p:sldId id="277" r:id="rId23"/>
+    <p:sldId id="268" r:id="rId13"/>
+    <p:sldId id="269" r:id="rId14"/>
+    <p:sldId id="270" r:id="rId15"/>
+    <p:sldId id="271" r:id="rId16"/>
+    <p:sldId id="272" r:id="rId17"/>
+    <p:sldId id="273" r:id="rId18"/>
+    <p:sldId id="274" r:id="rId19"/>
+    <p:sldId id="275" r:id="rId20"/>
+    <p:sldId id="276" r:id="rId21"/>
+    <p:sldId id="277" r:id="rId22"/>
   </p:sldIdLst>
   <p:sldSz cx="9144000" cy="6858000" type="screen4x3"/>
   <p:notesSz cx="6858000" cy="9144000"/>
@@ -34,8 +33,8 @@
     <a:defPPr>
       <a:defRPr lang="en-US"/>
     </a:defPPr>
-    <a:lvl1pPr algn="l" defTabSz="457200" eaLnBrk="1" hangingPunct="1" latinLnBrk="0" marL="0" rtl="0">
-      <a:defRPr kern="1200" sz="1800">
+    <a:lvl1pPr marL="0" algn="l" defTabSz="457200" rtl="0" eaLnBrk="1" latinLnBrk="0" hangingPunct="1">
+      <a:defRPr sz="1800" kern="1200">
         <a:solidFill>
           <a:schemeClr val="tx1"/>
         </a:solidFill>
@@ -44,8 +43,8 @@
         <a:cs typeface="+mn-cs"/>
       </a:defRPr>
     </a:lvl1pPr>
-    <a:lvl2pPr algn="l" defTabSz="457200" eaLnBrk="1" hangingPunct="1" latinLnBrk="0" marL="457200" rtl="0">
-      <a:defRPr kern="1200" sz="1800">
+    <a:lvl2pPr marL="457200" algn="l" defTabSz="457200" rtl="0" eaLnBrk="1" latinLnBrk="0" hangingPunct="1">
+      <a:defRPr sz="1800" kern="1200">
         <a:solidFill>
           <a:schemeClr val="tx1"/>
         </a:solidFill>
@@ -54,8 +53,8 @@
         <a:cs typeface="+mn-cs"/>
       </a:defRPr>
     </a:lvl2pPr>
-    <a:lvl3pPr algn="l" defTabSz="457200" eaLnBrk="1" hangingPunct="1" latinLnBrk="0" marL="914400" rtl="0">
-      <a:defRPr kern="1200" sz="1800">
+    <a:lvl3pPr marL="914400" algn="l" defTabSz="457200" rtl="0" eaLnBrk="1" latinLnBrk="0" hangingPunct="1">
+      <a:defRPr sz="1800" kern="1200">
         <a:solidFill>
           <a:schemeClr val="tx1"/>
         </a:solidFill>
@@ -64,8 +63,8 @@
         <a:cs typeface="+mn-cs"/>
       </a:defRPr>
     </a:lvl3pPr>
-    <a:lvl4pPr algn="l" defTabSz="457200" eaLnBrk="1" hangingPunct="1" latinLnBrk="0" marL="1371600" rtl="0">
-      <a:defRPr kern="1200" sz="1800">
+    <a:lvl4pPr marL="1371600" algn="l" defTabSz="457200" rtl="0" eaLnBrk="1" latinLnBrk="0" hangingPunct="1">
+      <a:defRPr sz="1800" kern="1200">
         <a:solidFill>
           <a:schemeClr val="tx1"/>
         </a:solidFill>
@@ -74,8 +73,8 @@
         <a:cs typeface="+mn-cs"/>
       </a:defRPr>
     </a:lvl4pPr>
-    <a:lvl5pPr algn="l" defTabSz="457200" eaLnBrk="1" hangingPunct="1" latinLnBrk="0" marL="1828800" rtl="0">
-      <a:defRPr kern="1200" sz="1800">
+    <a:lvl5pPr marL="1828800" algn="l" defTabSz="457200" rtl="0" eaLnBrk="1" latinLnBrk="0" hangingPunct="1">
+      <a:defRPr sz="1800" kern="1200">
         <a:solidFill>
           <a:schemeClr val="tx1"/>
         </a:solidFill>
@@ -84,8 +83,8 @@
         <a:cs typeface="+mn-cs"/>
       </a:defRPr>
     </a:lvl5pPr>
-    <a:lvl6pPr algn="l" defTabSz="457200" eaLnBrk="1" hangingPunct="1" latinLnBrk="0" marL="2286000" rtl="0">
-      <a:defRPr kern="1200" sz="1800">
+    <a:lvl6pPr marL="2286000" algn="l" defTabSz="457200" rtl="0" eaLnBrk="1" latinLnBrk="0" hangingPunct="1">
+      <a:defRPr sz="1800" kern="1200">
         <a:solidFill>
           <a:schemeClr val="tx1"/>
         </a:solidFill>
@@ -94,8 +93,8 @@
         <a:cs typeface="+mn-cs"/>
       </a:defRPr>
     </a:lvl6pPr>
-    <a:lvl7pPr algn="l" defTabSz="457200" eaLnBrk="1" hangingPunct="1" latinLnBrk="0" marL="2743200" rtl="0">
-      <a:defRPr kern="1200" sz="1800">
+    <a:lvl7pPr marL="2743200" algn="l" defTabSz="457200" rtl="0" eaLnBrk="1" latinLnBrk="0" hangingPunct="1">
+      <a:defRPr sz="1800" kern="1200">
         <a:solidFill>
           <a:schemeClr val="tx1"/>
         </a:solidFill>
@@ -104,8 +103,8 @@
         <a:cs typeface="+mn-cs"/>
       </a:defRPr>
     </a:lvl7pPr>
-    <a:lvl8pPr algn="l" defTabSz="457200" eaLnBrk="1" hangingPunct="1" latinLnBrk="0" marL="3200400" rtl="0">
-      <a:defRPr kern="1200" sz="1800">
+    <a:lvl8pPr marL="3200400" algn="l" defTabSz="457200" rtl="0" eaLnBrk="1" latinLnBrk="0" hangingPunct="1">
+      <a:defRPr sz="1800" kern="1200">
         <a:solidFill>
           <a:schemeClr val="tx1"/>
         </a:solidFill>
@@ -114,8 +113,8 @@
         <a:cs typeface="+mn-cs"/>
       </a:defRPr>
     </a:lvl8pPr>
-    <a:lvl9pPr algn="l" defTabSz="457200" eaLnBrk="1" hangingPunct="1" latinLnBrk="0" marL="3657600" rtl="0">
-      <a:defRPr kern="1200" sz="1800">
+    <a:lvl9pPr marL="3657600" algn="l" defTabSz="457200" rtl="0" eaLnBrk="1" latinLnBrk="0" hangingPunct="1">
+      <a:defRPr sz="1800" kern="1200">
         <a:solidFill>
           <a:schemeClr val="tx1"/>
         </a:solidFill>
@@ -182,10 +181,9 @@
           <a:lstStyle/>
           <a:p>
             <a:r>
-              <a:rPr lang="en-US" smtClean="0"/>
+              <a:rPr lang="en-US"/>
               <a:t>Click to edit Master title style</a:t>
             </a:r>
-            <a:endParaRPr lang="en-US"/>
           </a:p>
         </p:txBody>
       </p:sp>
@@ -301,10 +299,9 @@
           </a:lstStyle>
           <a:p>
             <a:r>
-              <a:rPr lang="en-US" smtClean="0"/>
+              <a:rPr lang="en-US"/>
               <a:t>Click to edit Master subtitle style</a:t>
             </a:r>
-            <a:endParaRPr lang="en-US"/>
           </a:p>
         </p:txBody>
       </p:sp>
@@ -325,7 +322,7 @@
           <a:p>
             <a:fld id="{241EB5C9-1307-BA42-ABA2-0BC069CD8E7F}" type="datetimeFigureOut">
               <a:rPr lang="en-US" smtClean="0"/>
-              <a:t>4/5/2019</a:t>
+              <a:t>4/6/26</a:t>
             </a:fld>
             <a:endParaRPr lang="en-US"/>
           </a:p>
@@ -419,10 +416,9 @@
           <a:lstStyle/>
           <a:p>
             <a:r>
-              <a:rPr lang="en-US" smtClean="0"/>
+              <a:rPr lang="en-US"/>
               <a:t>Click to edit Master title style</a:t>
             </a:r>
-            <a:endParaRPr lang="en-US"/>
           </a:p>
         </p:txBody>
       </p:sp>
@@ -443,38 +439,37 @@
           <a:p>
             <a:pPr lvl="0"/>
             <a:r>
-              <a:rPr lang="en-US" smtClean="0"/>
+              <a:rPr lang="en-US"/>
               <a:t>Click to edit Master text styles</a:t>
             </a:r>
           </a:p>
           <a:p>
             <a:pPr lvl="1"/>
             <a:r>
-              <a:rPr lang="en-US" smtClean="0"/>
+              <a:rPr lang="en-US"/>
               <a:t>Second level</a:t>
             </a:r>
           </a:p>
           <a:p>
             <a:pPr lvl="2"/>
             <a:r>
-              <a:rPr lang="en-US" smtClean="0"/>
+              <a:rPr lang="en-US"/>
               <a:t>Third level</a:t>
             </a:r>
           </a:p>
           <a:p>
             <a:pPr lvl="3"/>
             <a:r>
-              <a:rPr lang="en-US" smtClean="0"/>
+              <a:rPr lang="en-US"/>
               <a:t>Fourth level</a:t>
             </a:r>
           </a:p>
           <a:p>
             <a:pPr lvl="4"/>
             <a:r>
-              <a:rPr lang="en-US" smtClean="0"/>
+              <a:rPr lang="en-US"/>
               <a:t>Fifth level</a:t>
             </a:r>
-            <a:endParaRPr lang="en-US"/>
           </a:p>
         </p:txBody>
       </p:sp>
@@ -495,7 +490,7 @@
           <a:p>
             <a:fld id="{241EB5C9-1307-BA42-ABA2-0BC069CD8E7F}" type="datetimeFigureOut">
               <a:rPr lang="en-US" smtClean="0"/>
-              <a:t>4/5/2019</a:t>
+              <a:t>4/6/26</a:t>
             </a:fld>
             <a:endParaRPr lang="en-US"/>
           </a:p>
@@ -594,10 +589,9 @@
           <a:lstStyle/>
           <a:p>
             <a:r>
-              <a:rPr lang="en-US" smtClean="0"/>
+              <a:rPr lang="en-US"/>
               <a:t>Click to edit Master title style</a:t>
             </a:r>
-            <a:endParaRPr lang="en-US"/>
           </a:p>
         </p:txBody>
       </p:sp>
@@ -623,38 +617,37 @@
           <a:p>
             <a:pPr lvl="0"/>
             <a:r>
-              <a:rPr lang="en-US" smtClean="0"/>
+              <a:rPr lang="en-US"/>
               <a:t>Click to edit Master text styles</a:t>
             </a:r>
           </a:p>
           <a:p>
             <a:pPr lvl="1"/>
             <a:r>
-              <a:rPr lang="en-US" smtClean="0"/>
+              <a:rPr lang="en-US"/>
               <a:t>Second level</a:t>
             </a:r>
           </a:p>
           <a:p>
             <a:pPr lvl="2"/>
             <a:r>
-              <a:rPr lang="en-US" smtClean="0"/>
+              <a:rPr lang="en-US"/>
               <a:t>Third level</a:t>
             </a:r>
           </a:p>
           <a:p>
             <a:pPr lvl="3"/>
             <a:r>
-              <a:rPr lang="en-US" smtClean="0"/>
+              <a:rPr lang="en-US"/>
               <a:t>Fourth level</a:t>
             </a:r>
           </a:p>
           <a:p>
             <a:pPr lvl="4"/>
             <a:r>
-              <a:rPr lang="en-US" smtClean="0"/>
+              <a:rPr lang="en-US"/>
               <a:t>Fifth level</a:t>
             </a:r>
-            <a:endParaRPr lang="en-US"/>
           </a:p>
         </p:txBody>
       </p:sp>
@@ -675,7 +668,7 @@
           <a:p>
             <a:fld id="{241EB5C9-1307-BA42-ABA2-0BC069CD8E7F}" type="datetimeFigureOut">
               <a:rPr lang="en-US" smtClean="0"/>
-              <a:t>4/5/2019</a:t>
+              <a:t>4/6/26</a:t>
             </a:fld>
             <a:endParaRPr lang="en-US"/>
           </a:p>
@@ -769,10 +762,9 @@
           <a:lstStyle/>
           <a:p>
             <a:r>
-              <a:rPr lang="en-US" smtClean="0"/>
+              <a:rPr lang="en-US"/>
               <a:t>Click to edit Master title style</a:t>
             </a:r>
-            <a:endParaRPr lang="en-US"/>
           </a:p>
         </p:txBody>
       </p:sp>
@@ -793,38 +785,37 @@
           <a:p>
             <a:pPr lvl="0"/>
             <a:r>
-              <a:rPr lang="en-US" smtClean="0"/>
+              <a:rPr lang="en-US"/>
               <a:t>Click to edit Master text styles</a:t>
             </a:r>
           </a:p>
           <a:p>
             <a:pPr lvl="1"/>
             <a:r>
-              <a:rPr lang="en-US" smtClean="0"/>
+              <a:rPr lang="en-US"/>
               <a:t>Second level</a:t>
             </a:r>
           </a:p>
           <a:p>
             <a:pPr lvl="2"/>
             <a:r>
-              <a:rPr lang="en-US" smtClean="0"/>
+              <a:rPr lang="en-US"/>
               <a:t>Third level</a:t>
             </a:r>
           </a:p>
           <a:p>
             <a:pPr lvl="3"/>
             <a:r>
-              <a:rPr lang="en-US" smtClean="0"/>
+              <a:rPr lang="en-US"/>
               <a:t>Fourth level</a:t>
             </a:r>
           </a:p>
           <a:p>
             <a:pPr lvl="4"/>
             <a:r>
-              <a:rPr lang="en-US" smtClean="0"/>
+              <a:rPr lang="en-US"/>
               <a:t>Fifth level</a:t>
             </a:r>
-            <a:endParaRPr lang="en-US"/>
           </a:p>
         </p:txBody>
       </p:sp>
@@ -845,7 +836,7 @@
           <a:p>
             <a:fld id="{241EB5C9-1307-BA42-ABA2-0BC069CD8E7F}" type="datetimeFigureOut">
               <a:rPr lang="en-US" smtClean="0"/>
-              <a:t>4/5/2019</a:t>
+              <a:t>4/6/26</a:t>
             </a:fld>
             <a:endParaRPr lang="en-US"/>
           </a:p>
@@ -948,10 +939,9 @@
           </a:lstStyle>
           <a:p>
             <a:r>
-              <a:rPr lang="en-US" smtClean="0"/>
+              <a:rPr lang="en-US"/>
               <a:t>Click to edit Master title style</a:t>
             </a:r>
-            <a:endParaRPr lang="en-US"/>
           </a:p>
         </p:txBody>
       </p:sp>
@@ -1068,7 +1058,7 @@
           <a:p>
             <a:pPr lvl="0"/>
             <a:r>
-              <a:rPr lang="en-US" smtClean="0"/>
+              <a:rPr lang="en-US"/>
               <a:t>Click to edit Master text styles</a:t>
             </a:r>
           </a:p>
@@ -1091,7 +1081,7 @@
           <a:p>
             <a:fld id="{241EB5C9-1307-BA42-ABA2-0BC069CD8E7F}" type="datetimeFigureOut">
               <a:rPr lang="en-US" smtClean="0"/>
-              <a:t>4/5/2019</a:t>
+              <a:t>4/6/26</a:t>
             </a:fld>
             <a:endParaRPr lang="en-US"/>
           </a:p>
@@ -1185,10 +1175,9 @@
           <a:lstStyle/>
           <a:p>
             <a:r>
-              <a:rPr lang="en-US" smtClean="0"/>
+              <a:rPr lang="en-US"/>
               <a:t>Click to edit Master title style</a:t>
             </a:r>
-            <a:endParaRPr lang="en-US"/>
           </a:p>
         </p:txBody>
       </p:sp>
@@ -1242,38 +1231,37 @@
           <a:p>
             <a:pPr lvl="0"/>
             <a:r>
-              <a:rPr lang="en-US" smtClean="0"/>
+              <a:rPr lang="en-US"/>
               <a:t>Click to edit Master text styles</a:t>
             </a:r>
           </a:p>
           <a:p>
             <a:pPr lvl="1"/>
             <a:r>
-              <a:rPr lang="en-US" smtClean="0"/>
+              <a:rPr lang="en-US"/>
               <a:t>Second level</a:t>
             </a:r>
           </a:p>
           <a:p>
             <a:pPr lvl="2"/>
             <a:r>
-              <a:rPr lang="en-US" smtClean="0"/>
+              <a:rPr lang="en-US"/>
               <a:t>Third level</a:t>
             </a:r>
           </a:p>
           <a:p>
             <a:pPr lvl="3"/>
             <a:r>
-              <a:rPr lang="en-US" smtClean="0"/>
+              <a:rPr lang="en-US"/>
               <a:t>Fourth level</a:t>
             </a:r>
           </a:p>
           <a:p>
             <a:pPr lvl="4"/>
             <a:r>
-              <a:rPr lang="en-US" smtClean="0"/>
+              <a:rPr lang="en-US"/>
               <a:t>Fifth level</a:t>
             </a:r>
-            <a:endParaRPr lang="en-US"/>
           </a:p>
         </p:txBody>
       </p:sp>
@@ -1327,38 +1315,37 @@
           <a:p>
             <a:pPr lvl="0"/>
             <a:r>
-              <a:rPr lang="en-US" smtClean="0"/>
+              <a:rPr lang="en-US"/>
               <a:t>Click to edit Master text styles</a:t>
             </a:r>
           </a:p>
           <a:p>
             <a:pPr lvl="1"/>
             <a:r>
-              <a:rPr lang="en-US" smtClean="0"/>
+              <a:rPr lang="en-US"/>
               <a:t>Second level</a:t>
             </a:r>
           </a:p>
           <a:p>
             <a:pPr lvl="2"/>
             <a:r>
-              <a:rPr lang="en-US" smtClean="0"/>
+              <a:rPr lang="en-US"/>
               <a:t>Third level</a:t>
             </a:r>
           </a:p>
           <a:p>
             <a:pPr lvl="3"/>
             <a:r>
-              <a:rPr lang="en-US" smtClean="0"/>
+              <a:rPr lang="en-US"/>
               <a:t>Fourth level</a:t>
             </a:r>
           </a:p>
           <a:p>
             <a:pPr lvl="4"/>
             <a:r>
-              <a:rPr lang="en-US" smtClean="0"/>
+              <a:rPr lang="en-US"/>
               <a:t>Fifth level</a:t>
             </a:r>
-            <a:endParaRPr lang="en-US"/>
           </a:p>
         </p:txBody>
       </p:sp>
@@ -1379,7 +1366,7 @@
           <a:p>
             <a:fld id="{241EB5C9-1307-BA42-ABA2-0BC069CD8E7F}" type="datetimeFigureOut">
               <a:rPr lang="en-US" smtClean="0"/>
-              <a:t>4/5/2019</a:t>
+              <a:t>4/6/26</a:t>
             </a:fld>
             <a:endParaRPr lang="en-US"/>
           </a:p>
@@ -1477,10 +1464,9 @@
           </a:lstStyle>
           <a:p>
             <a:r>
-              <a:rPr lang="en-US" smtClean="0"/>
+              <a:rPr lang="en-US"/>
               <a:t>Click to edit Master title style</a:t>
             </a:r>
-            <a:endParaRPr lang="en-US"/>
           </a:p>
         </p:txBody>
       </p:sp>
@@ -1543,7 +1529,7 @@
           <a:p>
             <a:pPr lvl="0"/>
             <a:r>
-              <a:rPr lang="en-US" smtClean="0"/>
+              <a:rPr lang="en-US"/>
               <a:t>Click to edit Master text styles</a:t>
             </a:r>
           </a:p>
@@ -1599,38 +1585,37 @@
           <a:p>
             <a:pPr lvl="0"/>
             <a:r>
-              <a:rPr lang="en-US" smtClean="0"/>
+              <a:rPr lang="en-US"/>
               <a:t>Click to edit Master text styles</a:t>
             </a:r>
           </a:p>
           <a:p>
             <a:pPr lvl="1"/>
             <a:r>
-              <a:rPr lang="en-US" smtClean="0"/>
+              <a:rPr lang="en-US"/>
               <a:t>Second level</a:t>
             </a:r>
           </a:p>
           <a:p>
             <a:pPr lvl="2"/>
             <a:r>
-              <a:rPr lang="en-US" smtClean="0"/>
+              <a:rPr lang="en-US"/>
               <a:t>Third level</a:t>
             </a:r>
           </a:p>
           <a:p>
             <a:pPr lvl="3"/>
             <a:r>
-              <a:rPr lang="en-US" smtClean="0"/>
+              <a:rPr lang="en-US"/>
               <a:t>Fourth level</a:t>
             </a:r>
           </a:p>
           <a:p>
             <a:pPr lvl="4"/>
             <a:r>
-              <a:rPr lang="en-US" smtClean="0"/>
+              <a:rPr lang="en-US"/>
               <a:t>Fifth level</a:t>
             </a:r>
-            <a:endParaRPr lang="en-US"/>
           </a:p>
         </p:txBody>
       </p:sp>
@@ -1693,7 +1678,7 @@
           <a:p>
             <a:pPr lvl="0"/>
             <a:r>
-              <a:rPr lang="en-US" smtClean="0"/>
+              <a:rPr lang="en-US"/>
               <a:t>Click to edit Master text styles</a:t>
             </a:r>
           </a:p>
@@ -1749,38 +1734,37 @@
           <a:p>
             <a:pPr lvl="0"/>
             <a:r>
-              <a:rPr lang="en-US" smtClean="0"/>
+              <a:rPr lang="en-US"/>
               <a:t>Click to edit Master text styles</a:t>
             </a:r>
           </a:p>
           <a:p>
             <a:pPr lvl="1"/>
             <a:r>
-              <a:rPr lang="en-US" smtClean="0"/>
+              <a:rPr lang="en-US"/>
               <a:t>Second level</a:t>
             </a:r>
           </a:p>
           <a:p>
             <a:pPr lvl="2"/>
             <a:r>
-              <a:rPr lang="en-US" smtClean="0"/>
+              <a:rPr lang="en-US"/>
               <a:t>Third level</a:t>
             </a:r>
           </a:p>
           <a:p>
             <a:pPr lvl="3"/>
             <a:r>
-              <a:rPr lang="en-US" smtClean="0"/>
+              <a:rPr lang="en-US"/>
               <a:t>Fourth level</a:t>
             </a:r>
           </a:p>
           <a:p>
             <a:pPr lvl="4"/>
             <a:r>
-              <a:rPr lang="en-US" smtClean="0"/>
+              <a:rPr lang="en-US"/>
               <a:t>Fifth level</a:t>
             </a:r>
-            <a:endParaRPr lang="en-US"/>
           </a:p>
         </p:txBody>
       </p:sp>
@@ -1801,7 +1785,7 @@
           <a:p>
             <a:fld id="{241EB5C9-1307-BA42-ABA2-0BC069CD8E7F}" type="datetimeFigureOut">
               <a:rPr lang="en-US" smtClean="0"/>
-              <a:t>4/5/2019</a:t>
+              <a:t>4/6/26</a:t>
             </a:fld>
             <a:endParaRPr lang="en-US"/>
           </a:p>
@@ -1895,10 +1879,9 @@
           <a:lstStyle/>
           <a:p>
             <a:r>
-              <a:rPr lang="en-US" smtClean="0"/>
+              <a:rPr lang="en-US"/>
               <a:t>Click to edit Master title style</a:t>
             </a:r>
-            <a:endParaRPr lang="en-US"/>
           </a:p>
         </p:txBody>
       </p:sp>
@@ -1919,7 +1902,7 @@
           <a:p>
             <a:fld id="{241EB5C9-1307-BA42-ABA2-0BC069CD8E7F}" type="datetimeFigureOut">
               <a:rPr lang="en-US" smtClean="0"/>
-              <a:t>4/5/2019</a:t>
+              <a:t>4/6/26</a:t>
             </a:fld>
             <a:endParaRPr lang="en-US"/>
           </a:p>
@@ -2014,7 +1997,7 @@
           <a:p>
             <a:fld id="{241EB5C9-1307-BA42-ABA2-0BC069CD8E7F}" type="datetimeFigureOut">
               <a:rPr lang="en-US" smtClean="0"/>
-              <a:t>4/5/2019</a:t>
+              <a:t>4/6/26</a:t>
             </a:fld>
             <a:endParaRPr lang="en-US"/>
           </a:p>
@@ -2117,10 +2100,9 @@
           </a:lstStyle>
           <a:p>
             <a:r>
-              <a:rPr lang="en-US" smtClean="0"/>
+              <a:rPr lang="en-US"/>
               <a:t>Click to edit Master title style</a:t>
             </a:r>
-            <a:endParaRPr lang="en-US"/>
           </a:p>
         </p:txBody>
       </p:sp>
@@ -2174,38 +2156,37 @@
           <a:p>
             <a:pPr lvl="0"/>
             <a:r>
-              <a:rPr lang="en-US" smtClean="0"/>
+              <a:rPr lang="en-US"/>
               <a:t>Click to edit Master text styles</a:t>
             </a:r>
           </a:p>
           <a:p>
             <a:pPr lvl="1"/>
             <a:r>
-              <a:rPr lang="en-US" smtClean="0"/>
+              <a:rPr lang="en-US"/>
               <a:t>Second level</a:t>
             </a:r>
           </a:p>
           <a:p>
             <a:pPr lvl="2"/>
             <a:r>
-              <a:rPr lang="en-US" smtClean="0"/>
+              <a:rPr lang="en-US"/>
               <a:t>Third level</a:t>
             </a:r>
           </a:p>
           <a:p>
             <a:pPr lvl="3"/>
             <a:r>
-              <a:rPr lang="en-US" smtClean="0"/>
+              <a:rPr lang="en-US"/>
               <a:t>Fourth level</a:t>
             </a:r>
           </a:p>
           <a:p>
             <a:pPr lvl="4"/>
             <a:r>
-              <a:rPr lang="en-US" smtClean="0"/>
+              <a:rPr lang="en-US"/>
               <a:t>Fifth level</a:t>
             </a:r>
-            <a:endParaRPr lang="en-US"/>
           </a:p>
         </p:txBody>
       </p:sp>
@@ -2268,7 +2249,7 @@
           <a:p>
             <a:pPr lvl="0"/>
             <a:r>
-              <a:rPr lang="en-US" smtClean="0"/>
+              <a:rPr lang="en-US"/>
               <a:t>Click to edit Master text styles</a:t>
             </a:r>
           </a:p>
@@ -2291,7 +2272,7 @@
           <a:p>
             <a:fld id="{241EB5C9-1307-BA42-ABA2-0BC069CD8E7F}" type="datetimeFigureOut">
               <a:rPr lang="en-US" smtClean="0"/>
-              <a:t>4/5/2019</a:t>
+              <a:t>4/6/26</a:t>
             </a:fld>
             <a:endParaRPr lang="en-US"/>
           </a:p>
@@ -2394,10 +2375,9 @@
           </a:lstStyle>
           <a:p>
             <a:r>
-              <a:rPr lang="en-US" smtClean="0"/>
+              <a:rPr lang="en-US"/>
               <a:t>Click to edit Master title style</a:t>
             </a:r>
-            <a:endParaRPr lang="en-US"/>
           </a:p>
         </p:txBody>
       </p:sp>
@@ -2521,7 +2501,7 @@
           <a:p>
             <a:pPr lvl="0"/>
             <a:r>
-              <a:rPr lang="en-US" smtClean="0"/>
+              <a:rPr lang="en-US"/>
               <a:t>Click to edit Master text styles</a:t>
             </a:r>
           </a:p>
@@ -2544,7 +2524,7 @@
           <a:p>
             <a:fld id="{241EB5C9-1307-BA42-ABA2-0BC069CD8E7F}" type="datetimeFigureOut">
               <a:rPr lang="en-US" smtClean="0"/>
-              <a:t>4/5/2019</a:t>
+              <a:t>4/6/26</a:t>
             </a:fld>
             <a:endParaRPr lang="en-US"/>
           </a:p>
@@ -2653,10 +2633,9 @@
           <a:lstStyle/>
           <a:p>
             <a:r>
-              <a:rPr lang="en-US" smtClean="0"/>
+              <a:rPr lang="en-US"/>
               <a:t>Click to edit Master title style</a:t>
             </a:r>
-            <a:endParaRPr lang="en-US"/>
           </a:p>
         </p:txBody>
       </p:sp>
@@ -2687,38 +2666,37 @@
           <a:p>
             <a:pPr lvl="0"/>
             <a:r>
-              <a:rPr lang="en-US" smtClean="0"/>
+              <a:rPr lang="en-US"/>
               <a:t>Click to edit Master text styles</a:t>
             </a:r>
           </a:p>
           <a:p>
             <a:pPr lvl="1"/>
             <a:r>
-              <a:rPr lang="en-US" smtClean="0"/>
+              <a:rPr lang="en-US"/>
               <a:t>Second level</a:t>
             </a:r>
           </a:p>
           <a:p>
             <a:pPr lvl="2"/>
             <a:r>
-              <a:rPr lang="en-US" smtClean="0"/>
+              <a:rPr lang="en-US"/>
               <a:t>Third level</a:t>
             </a:r>
           </a:p>
           <a:p>
             <a:pPr lvl="3"/>
             <a:r>
-              <a:rPr lang="en-US" smtClean="0"/>
+              <a:rPr lang="en-US"/>
               <a:t>Fourth level</a:t>
             </a:r>
           </a:p>
           <a:p>
             <a:pPr lvl="4"/>
             <a:r>
-              <a:rPr lang="en-US" smtClean="0"/>
+              <a:rPr lang="en-US"/>
               <a:t>Fifth level</a:t>
             </a:r>
-            <a:endParaRPr lang="en-US"/>
           </a:p>
         </p:txBody>
       </p:sp>
@@ -2757,7 +2735,7 @@
           <a:p>
             <a:fld id="{241EB5C9-1307-BA42-ABA2-0BC069CD8E7F}" type="datetimeFigureOut">
               <a:rPr lang="en-US" smtClean="0"/>
-              <a:t>4/5/2019</a:t>
+              <a:t>4/6/26</a:t>
             </a:fld>
             <a:endParaRPr lang="en-US"/>
           </a:p>
@@ -3152,20 +3130,11 @@
           <a:bodyPr/>
           <a:lstStyle/>
           <a:p>
-            <a:pPr lvl="0" marL="0" indent="0">
+            <a:pPr marL="0" lvl="0" indent="0">
               <a:buNone/>
             </a:pPr>
             <a:r>
-              <a:rPr/>
-              <a:t>Transformer</a:t>
-            </a:r>
-            <a:r>
-              <a:rPr/>
-              <a:t> </a:t>
-            </a:r>
-            <a:r>
-              <a:rPr/>
-              <a:t>Pipeline</a:t>
+              <a:t>Transformer Pipeline</a:t>
             </a:r>
           </a:p>
         </p:txBody>
@@ -3177,7 +3146,7 @@
             <a:spLocks noGrp="1"/>
           </p:cNvSpPr>
           <p:nvPr>
-            <p:ph idx="1" type="subTitle"/>
+            <p:ph type="subTitle" idx="1"/>
           </p:nvPr>
         </p:nvSpPr>
         <p:spPr>
@@ -3190,64 +3159,25 @@
           <a:bodyPr/>
           <a:lstStyle/>
           <a:p>
-            <a:pPr lvl="0" marL="0" indent="0">
+            <a:pPr marL="0" lvl="0" indent="0">
               <a:buNone/>
             </a:pPr>
             <a:r>
-              <a:rPr/>
-              <a:t>Bidirectional</a:t>
-            </a:r>
-            <a:r>
-              <a:rPr/>
-              <a:t> </a:t>
-            </a:r>
-            <a:r>
-              <a:rPr/>
-              <a:t>JSON-to-Relational</a:t>
-            </a:r>
-            <a:r>
-              <a:rPr/>
-              <a:t> </a:t>
-            </a:r>
-            <a:r>
-              <a:rPr/>
-              <a:t>Conversion</a:t>
+              <a:t>Bidirectional JSON-to-Relational Conversion</a:t>
             </a:r>
             <a:br/>
             <a:br/>
             <a:r>
-              <a:rPr/>
-              <a:t>EGS</a:t>
-            </a:r>
-            <a:r>
-              <a:rPr/>
-              <a:t> </a:t>
-            </a:r>
-            <a:r>
-              <a:rPr/>
-              <a:t>Award</a:t>
-            </a:r>
-            <a:r>
-              <a:rPr/>
-              <a:t> </a:t>
-            </a:r>
-            <a:r>
-              <a:rPr/>
-              <a:t>Management</a:t>
-            </a:r>
-            <a:r>
-              <a:rPr/>
-              <a:t> </a:t>
-            </a:r>
-            <a:r>
-              <a:rPr/>
-              <a:t>System</a:t>
+              <a:t>EGS Award Management System</a:t>
             </a:r>
           </a:p>
         </p:txBody>
       </p:sp>
     </p:spTree>
   </p:cSld>
+  <p:clrMapOvr>
+    <a:masterClrMapping/>
+  </p:clrMapOvr>
 </p:sld>
 </file>
 
@@ -3283,35 +3213,18 @@
           <a:bodyPr/>
           <a:lstStyle/>
           <a:p>
-            <a:pPr lvl="0" marL="0" indent="0">
+            <a:pPr marL="0" lvl="0" indent="0">
               <a:buNone/>
             </a:pPr>
             <a:r>
-              <a:rPr/>
-              <a:t>Field</a:t>
-            </a:r>
-            <a:r>
-              <a:rPr/>
-              <a:t> </a:t>
-            </a:r>
-            <a:r>
-              <a:rPr/>
-              <a:t>Mapping</a:t>
-            </a:r>
-            <a:r>
-              <a:rPr/>
-              <a:t> </a:t>
-            </a:r>
-            <a:r>
-              <a:rPr/>
-              <a:t>Detail</a:t>
+              <a:t>Field Mapping Detail</a:t>
             </a:r>
           </a:p>
         </p:txBody>
       </p:sp>
       <p:pic>
         <p:nvPicPr>
-          <p:cNvPr descr="/tmp/doc-diagrams/TRANSFORMER_PIPELINE_diag3.png" id="0" name="Picture 1"/>
+          <p:cNvPr id="3" name="Picture 1" descr="/tmp/doc-diagrams/TRANSFORMER_PIPELINE_diag3.png"/>
           <p:cNvPicPr>
             <a:picLocks noGrp="1" noChangeAspect="1"/>
           </p:cNvPicPr>
@@ -3341,7 +3254,7 @@
       </p:pic>
       <p:sp>
         <p:nvSpPr>
-          <p:cNvPr id="1" name="TextBox 3"/>
+          <p:cNvPr id="4" name="TextBox 3"/>
           <p:cNvSpPr txBox="1"/>
           <p:nvPr/>
         </p:nvSpPr>
@@ -3359,26 +3272,20 @@
           <a:bodyPr/>
           <a:lstStyle/>
           <a:p>
-            <a:pPr lvl="0" marL="0" indent="0" algn="ctr">
+            <a:pPr marL="0" lvl="0" indent="0" algn="ctr">
               <a:buNone/>
             </a:pPr>
             <a:r>
-              <a:rPr/>
-              <a:t>Field</a:t>
-            </a:r>
-            <a:r>
-              <a:rPr/>
-              <a:t> </a:t>
-            </a:r>
-            <a:r>
-              <a:rPr/>
-              <a:t>Mapping</a:t>
+              <a:t>Field Mapping</a:t>
             </a:r>
           </a:p>
         </p:txBody>
       </p:sp>
     </p:spTree>
   </p:cSld>
+  <p:clrMapOvr>
+    <a:masterClrMapping/>
+  </p:clrMapOvr>
 </p:sld>
 </file>
 
@@ -3414,36 +3321,11 @@
           <a:bodyPr/>
           <a:lstStyle/>
           <a:p>
-            <a:pPr lvl="0" marL="0" indent="0">
+            <a:pPr marL="0" lvl="0" indent="0">
               <a:buNone/>
             </a:pPr>
             <a:r>
-              <a:rPr/>
-              <a:t>Built-In</a:t>
-            </a:r>
-            <a:r>
-              <a:rPr/>
-              <a:t> </a:t>
-            </a:r>
-            <a:r>
-              <a:rPr/>
-              <a:t>Transforms</a:t>
-            </a:r>
-            <a:r>
-              <a:rPr/>
-              <a:t> </a:t>
-            </a:r>
-            <a:r>
-              <a:rPr/>
-              <a:t>(13</a:t>
-            </a:r>
-            <a:r>
-              <a:rPr/>
-              <a:t> </a:t>
-            </a:r>
-            <a:r>
-              <a:rPr/>
-              <a:t>Total)</a:t>
+              <a:t>Built-In Transforms (13 Total)</a:t>
             </a:r>
           </a:p>
         </p:txBody>
@@ -3460,7 +3342,7 @@
         </p:nvGraphicFramePr>
         <p:xfrm>
           <a:off x="457200" y="1600200"/>
-          <a:ext cx="8229600" cy="4521200"/>
+          <a:ext cx="8229600" cy="3840480"/>
         </p:xfrm>
         <a:graphic>
           <a:graphicData uri="http://schemas.openxmlformats.org/drawingml/2006/table">
@@ -3469,9 +3351,27 @@
                 <a:tableStyleId>{5C22544A-7EE6-4342-B048-85BDC9FD1C3A}</a:tableStyleId>
               </a:tblPr>
               <a:tblGrid>
-                <a:gridCol w="2743200"/>
-                <a:gridCol w="2743200"/>
-                <a:gridCol w="2743200"/>
+                <a:gridCol w="2743200">
+                  <a:extLst>
+                    <a:ext uri="{9D8B030D-6E8A-4147-A177-3AD203B41FA5}">
+                      <a16:colId xmlns:a16="http://schemas.microsoft.com/office/drawing/2014/main" val="20000"/>
+                    </a:ext>
+                  </a:extLst>
+                </a:gridCol>
+                <a:gridCol w="2743200">
+                  <a:extLst>
+                    <a:ext uri="{9D8B030D-6E8A-4147-A177-3AD203B41FA5}">
+                      <a16:colId xmlns:a16="http://schemas.microsoft.com/office/drawing/2014/main" val="20001"/>
+                    </a:ext>
+                  </a:extLst>
+                </a:gridCol>
+                <a:gridCol w="2743200">
+                  <a:extLst>
+                    <a:ext uri="{9D8B030D-6E8A-4147-A177-3AD203B41FA5}">
+                      <a16:colId xmlns:a16="http://schemas.microsoft.com/office/drawing/2014/main" val="20002"/>
+                    </a:ext>
+                  </a:extLst>
+                </a:gridCol>
               </a:tblGrid>
               <a:tr h="0">
                 <a:tc>
@@ -3479,11 +3379,10 @@
                     <a:bodyPr/>
                     <a:lstStyle/>
                     <a:p>
-                      <a:pPr lvl="0" marL="0" indent="0">
+                      <a:pPr marL="0" lvl="0" indent="0">
                         <a:buNone/>
                       </a:pPr>
                       <a:r>
-                        <a:rPr/>
                         <a:t>Transform</a:t>
                       </a:r>
                     </a:p>
@@ -3495,11 +3394,10 @@
                     <a:bodyPr/>
                     <a:lstStyle/>
                     <a:p>
-                      <a:pPr lvl="0" marL="0" indent="0">
+                      <a:pPr marL="0" lvl="0" indent="0">
                         <a:buNone/>
                       </a:pPr>
                       <a:r>
-                        <a:rPr/>
                         <a:t>Direction</a:t>
                       </a:r>
                     </a:p>
@@ -3511,17 +3409,21 @@
                     <a:bodyPr/>
                     <a:lstStyle/>
                     <a:p>
-                      <a:pPr lvl="0" marL="0" indent="0">
+                      <a:pPr marL="0" lvl="0" indent="0">
                         <a:buNone/>
                       </a:pPr>
                       <a:r>
-                        <a:rPr/>
                         <a:t>Behavior</a:t>
                       </a:r>
                     </a:p>
                   </a:txBody>
                   <a:tcPr/>
                 </a:tc>
+                <a:extLst>
+                  <a:ext uri="{0D108BD9-81ED-4DB2-BD59-A6C34878D82A}">
+                    <a16:rowId xmlns:a16="http://schemas.microsoft.com/office/drawing/2014/main" val="10000"/>
+                  </a:ext>
+                </a:extLst>
               </a:tr>
               <a:tr h="0">
                 <a:tc>
@@ -3529,7 +3431,7 @@
                     <a:bodyPr/>
                     <a:lstStyle/>
                     <a:p>
-                      <a:pPr lvl="0" marL="0" indent="0">
+                      <a:pPr marL="0" lvl="0" indent="0">
                         <a:buNone/>
                       </a:pPr>
                       <a:r>
@@ -3540,61 +3442,43 @@
                       </a:r>
                     </a:p>
                   </a:txBody>
+                  <a:tcPr/>
                 </a:tc>
                 <a:tc>
                   <a:txBody>
                     <a:bodyPr/>
                     <a:lstStyle/>
                     <a:p>
-                      <a:pPr lvl="0" marL="0" indent="0">
+                      <a:pPr marL="0" lvl="0" indent="0">
                         <a:buNone/>
                       </a:pPr>
                       <a:r>
-                        <a:rPr/>
                         <a:t>toDb</a:t>
                       </a:r>
                     </a:p>
                   </a:txBody>
+                  <a:tcPr/>
                 </a:tc>
                 <a:tc>
                   <a:txBody>
                     <a:bodyPr/>
                     <a:lstStyle/>
                     <a:p>
-                      <a:pPr lvl="0" marL="0" indent="0">
+                      <a:pPr marL="0" lvl="0" indent="0">
                         <a:buNone/>
                       </a:pPr>
                       <a:r>
-                        <a:rPr/>
-                        <a:t>ISO</a:t>
-                      </a:r>
-                      <a:r>
-                        <a:rPr/>
-                        <a:t> </a:t>
-                      </a:r>
-                      <a:r>
-                        <a:rPr/>
-                        <a:t>string</a:t>
-                      </a:r>
-                      <a:r>
-                        <a:rPr/>
-                        <a:t> </a:t>
-                      </a:r>
-                      <a:r>
-                        <a:rPr/>
-                        <a:t>to</a:t>
-                      </a:r>
-                      <a:r>
-                        <a:rPr/>
-                        <a:t> </a:t>
-                      </a:r>
-                      <a:r>
-                        <a:rPr/>
-                        <a:t>LocalDate</a:t>
+                        <a:t>ISO string to LocalDate</a:t>
                       </a:r>
                     </a:p>
                   </a:txBody>
+                  <a:tcPr/>
                 </a:tc>
+                <a:extLst>
+                  <a:ext uri="{0D108BD9-81ED-4DB2-BD59-A6C34878D82A}">
+                    <a16:rowId xmlns:a16="http://schemas.microsoft.com/office/drawing/2014/main" val="10001"/>
+                  </a:ext>
+                </a:extLst>
               </a:tr>
               <a:tr h="0">
                 <a:tc>
@@ -3602,7 +3486,7 @@
                     <a:bodyPr/>
                     <a:lstStyle/>
                     <a:p>
-                      <a:pPr lvl="0" marL="0" indent="0">
+                      <a:pPr marL="0" lvl="0" indent="0">
                         <a:buNone/>
                       </a:pPr>
                       <a:r>
@@ -3613,53 +3497,43 @@
                       </a:r>
                     </a:p>
                   </a:txBody>
+                  <a:tcPr/>
                 </a:tc>
                 <a:tc>
                   <a:txBody>
                     <a:bodyPr/>
                     <a:lstStyle/>
                     <a:p>
-                      <a:pPr lvl="0" marL="0" indent="0">
+                      <a:pPr marL="0" lvl="0" indent="0">
                         <a:buNone/>
                       </a:pPr>
                       <a:r>
-                        <a:rPr/>
                         <a:t>fromDb</a:t>
                       </a:r>
                     </a:p>
                   </a:txBody>
+                  <a:tcPr/>
                 </a:tc>
                 <a:tc>
                   <a:txBody>
                     <a:bodyPr/>
                     <a:lstStyle/>
                     <a:p>
-                      <a:pPr lvl="0" marL="0" indent="0">
+                      <a:pPr marL="0" lvl="0" indent="0">
                         <a:buNone/>
                       </a:pPr>
                       <a:r>
-                        <a:rPr/>
-                        <a:t>LocalDate</a:t>
-                      </a:r>
-                      <a:r>
-                        <a:rPr/>
-                        <a:t> </a:t>
-                      </a:r>
-                      <a:r>
-                        <a:rPr/>
-                        <a:t>to</a:t>
-                      </a:r>
-                      <a:r>
-                        <a:rPr/>
-                        <a:t> </a:t>
-                      </a:r>
-                      <a:r>
-                        <a:rPr/>
-                        <a:t>yyyy-MM-dd</a:t>
+                        <a:t>LocalDate to yyyy-MM-dd</a:t>
                       </a:r>
                     </a:p>
                   </a:txBody>
+                  <a:tcPr/>
                 </a:tc>
+                <a:extLst>
+                  <a:ext uri="{0D108BD9-81ED-4DB2-BD59-A6C34878D82A}">
+                    <a16:rowId xmlns:a16="http://schemas.microsoft.com/office/drawing/2014/main" val="10002"/>
+                  </a:ext>
+                </a:extLst>
               </a:tr>
               <a:tr h="0">
                 <a:tc>
@@ -3667,7 +3541,7 @@
                     <a:bodyPr/>
                     <a:lstStyle/>
                     <a:p>
-                      <a:pPr lvl="0" marL="0" indent="0">
+                      <a:pPr marL="0" lvl="0" indent="0">
                         <a:buNone/>
                       </a:pPr>
                       <a:r>
@@ -3678,61 +3552,43 @@
                       </a:r>
                     </a:p>
                   </a:txBody>
+                  <a:tcPr/>
                 </a:tc>
                 <a:tc>
                   <a:txBody>
                     <a:bodyPr/>
                     <a:lstStyle/>
                     <a:p>
-                      <a:pPr lvl="0" marL="0" indent="0">
+                      <a:pPr marL="0" lvl="0" indent="0">
                         <a:buNone/>
                       </a:pPr>
                       <a:r>
-                        <a:rPr/>
                         <a:t>toDb</a:t>
                       </a:r>
                     </a:p>
                   </a:txBody>
+                  <a:tcPr/>
                 </a:tc>
                 <a:tc>
                   <a:txBody>
                     <a:bodyPr/>
                     <a:lstStyle/>
                     <a:p>
-                      <a:pPr lvl="0" marL="0" indent="0">
+                      <a:pPr marL="0" lvl="0" indent="0">
                         <a:buNone/>
                       </a:pPr>
                       <a:r>
-                        <a:rPr/>
-                        <a:t>Number/String</a:t>
-                      </a:r>
-                      <a:r>
-                        <a:rPr/>
-                        <a:t> </a:t>
-                      </a:r>
-                      <a:r>
-                        <a:rPr/>
-                        <a:t>to</a:t>
-                      </a:r>
-                      <a:r>
-                        <a:rPr/>
-                        <a:t> </a:t>
-                      </a:r>
-                      <a:r>
-                        <a:rPr/>
-                        <a:t>precise</a:t>
-                      </a:r>
-                      <a:r>
-                        <a:rPr/>
-                        <a:t> </a:t>
-                      </a:r>
-                      <a:r>
-                        <a:rPr/>
-                        <a:t>decimal</a:t>
+                        <a:t>Number/String to precise decimal</a:t>
                       </a:r>
                     </a:p>
                   </a:txBody>
+                  <a:tcPr/>
                 </a:tc>
+                <a:extLst>
+                  <a:ext uri="{0D108BD9-81ED-4DB2-BD59-A6C34878D82A}">
+                    <a16:rowId xmlns:a16="http://schemas.microsoft.com/office/drawing/2014/main" val="10003"/>
+                  </a:ext>
+                </a:extLst>
               </a:tr>
               <a:tr h="0">
                 <a:tc>
@@ -3740,7 +3596,7 @@
                     <a:bodyPr/>
                     <a:lstStyle/>
                     <a:p>
-                      <a:pPr lvl="0" marL="0" indent="0">
+                      <a:pPr marL="0" lvl="0" indent="0">
                         <a:buNone/>
                       </a:pPr>
                       <a:r>
@@ -3750,16 +3606,7 @@
                         <a:t>jsonStringify</a:t>
                       </a:r>
                       <a:r>
-                        <a:rPr/>
-                        <a:t> </a:t>
-                      </a:r>
-                      <a:r>
-                        <a:rPr/>
-                        <a:t>/</a:t>
-                      </a:r>
-                      <a:r>
-                        <a:rPr/>
-                        <a:t> </a:t>
+                        <a:t> / </a:t>
                       </a:r>
                       <a:r>
                         <a:rPr>
@@ -3769,61 +3616,43 @@
                       </a:r>
                     </a:p>
                   </a:txBody>
+                  <a:tcPr/>
                 </a:tc>
                 <a:tc>
                   <a:txBody>
                     <a:bodyPr/>
                     <a:lstStyle/>
                     <a:p>
-                      <a:pPr lvl="0" marL="0" indent="0">
+                      <a:pPr marL="0" lvl="0" indent="0">
                         <a:buNone/>
                       </a:pPr>
                       <a:r>
-                        <a:rPr/>
                         <a:t>both</a:t>
                       </a:r>
                     </a:p>
                   </a:txBody>
+                  <a:tcPr/>
                 </a:tc>
                 <a:tc>
                   <a:txBody>
                     <a:bodyPr/>
                     <a:lstStyle/>
                     <a:p>
-                      <a:pPr lvl="0" marL="0" indent="0">
+                      <a:pPr marL="0" lvl="0" indent="0">
                         <a:buNone/>
                       </a:pPr>
                       <a:r>
-                        <a:rPr/>
-                        <a:t>Map/List</a:t>
-                      </a:r>
-                      <a:r>
-                        <a:rPr/>
-                        <a:t> </a:t>
-                      </a:r>
-                      <a:r>
-                        <a:rPr/>
-                        <a:t>to/from</a:t>
-                      </a:r>
-                      <a:r>
-                        <a:rPr/>
-                        <a:t> </a:t>
-                      </a:r>
-                      <a:r>
-                        <a:rPr/>
-                        <a:t>JSON</a:t>
-                      </a:r>
-                      <a:r>
-                        <a:rPr/>
-                        <a:t> </a:t>
-                      </a:r>
-                      <a:r>
-                        <a:rPr/>
-                        <a:t>string</a:t>
+                        <a:t>Map/List to/from JSON string</a:t>
                       </a:r>
                     </a:p>
                   </a:txBody>
+                  <a:tcPr/>
                 </a:tc>
+                <a:extLst>
+                  <a:ext uri="{0D108BD9-81ED-4DB2-BD59-A6C34878D82A}">
+                    <a16:rowId xmlns:a16="http://schemas.microsoft.com/office/drawing/2014/main" val="10004"/>
+                  </a:ext>
+                </a:extLst>
               </a:tr>
               <a:tr h="0">
                 <a:tc>
@@ -3831,7 +3660,7 @@
                     <a:bodyPr/>
                     <a:lstStyle/>
                     <a:p>
-                      <a:pPr lvl="0" marL="0" indent="0">
+                      <a:pPr marL="0" lvl="0" indent="0">
                         <a:buNone/>
                       </a:pPr>
                       <a:r>
@@ -3842,45 +3671,43 @@
                       </a:r>
                     </a:p>
                   </a:txBody>
+                  <a:tcPr/>
                 </a:tc>
                 <a:tc>
                   <a:txBody>
                     <a:bodyPr/>
                     <a:lstStyle/>
                     <a:p>
-                      <a:pPr lvl="0" marL="0" indent="0">
+                      <a:pPr marL="0" lvl="0" indent="0">
                         <a:buNone/>
                       </a:pPr>
                       <a:r>
-                        <a:rPr/>
                         <a:t>toDb</a:t>
                       </a:r>
                     </a:p>
                   </a:txBody>
+                  <a:tcPr/>
                 </a:tc>
                 <a:tc>
                   <a:txBody>
                     <a:bodyPr/>
                     <a:lstStyle/>
                     <a:p>
-                      <a:pPr lvl="0" marL="0" indent="0">
+                      <a:pPr marL="0" lvl="0" indent="0">
                         <a:buNone/>
                       </a:pPr>
                       <a:r>
-                        <a:rPr/>
-                        <a:t>Whitespace</a:t>
-                      </a:r>
-                      <a:r>
-                        <a:rPr/>
-                        <a:t> </a:t>
-                      </a:r>
-                      <a:r>
-                        <a:rPr/>
-                        <a:t>removal</a:t>
+                        <a:t>Whitespace removal</a:t>
                       </a:r>
                     </a:p>
                   </a:txBody>
+                  <a:tcPr/>
                 </a:tc>
+                <a:extLst>
+                  <a:ext uri="{0D108BD9-81ED-4DB2-BD59-A6C34878D82A}">
+                    <a16:rowId xmlns:a16="http://schemas.microsoft.com/office/drawing/2014/main" val="10005"/>
+                  </a:ext>
+                </a:extLst>
               </a:tr>
               <a:tr h="0">
                 <a:tc>
@@ -3888,7 +3715,7 @@
                     <a:bodyPr/>
                     <a:lstStyle/>
                     <a:p>
-                      <a:pPr lvl="0" marL="0" indent="0">
+                      <a:pPr marL="0" lvl="0" indent="0">
                         <a:buNone/>
                       </a:pPr>
                       <a:r>
@@ -3899,45 +3726,43 @@
                       </a:r>
                     </a:p>
                   </a:txBody>
+                  <a:tcPr/>
                 </a:tc>
                 <a:tc>
                   <a:txBody>
                     <a:bodyPr/>
                     <a:lstStyle/>
                     <a:p>
-                      <a:pPr lvl="0" marL="0" indent="0">
+                      <a:pPr marL="0" lvl="0" indent="0">
                         <a:buNone/>
                       </a:pPr>
                       <a:r>
-                        <a:rPr/>
                         <a:t>toDb</a:t>
                       </a:r>
                     </a:p>
                   </a:txBody>
+                  <a:tcPr/>
                 </a:tc>
                 <a:tc>
                   <a:txBody>
                     <a:bodyPr/>
                     <a:lstStyle/>
                     <a:p>
-                      <a:pPr lvl="0" marL="0" indent="0">
+                      <a:pPr marL="0" lvl="0" indent="0">
                         <a:buNone/>
                       </a:pPr>
                       <a:r>
-                        <a:rPr/>
-                        <a:t>Case</a:t>
-                      </a:r>
-                      <a:r>
-                        <a:rPr/>
-                        <a:t> </a:t>
-                      </a:r>
-                      <a:r>
-                        <a:rPr/>
-                        <a:t>normalization</a:t>
+                        <a:t>Case normalization</a:t>
                       </a:r>
                     </a:p>
                   </a:txBody>
+                  <a:tcPr/>
                 </a:tc>
+                <a:extLst>
+                  <a:ext uri="{0D108BD9-81ED-4DB2-BD59-A6C34878D82A}">
+                    <a16:rowId xmlns:a16="http://schemas.microsoft.com/office/drawing/2014/main" val="10006"/>
+                  </a:ext>
+                </a:extLst>
               </a:tr>
               <a:tr h="0">
                 <a:tc>
@@ -3945,7 +3770,7 @@
                     <a:bodyPr/>
                     <a:lstStyle/>
                     <a:p>
-                      <a:pPr lvl="0" marL="0" indent="0">
+                      <a:pPr marL="0" lvl="0" indent="0">
                         <a:buNone/>
                       </a:pPr>
                       <a:r>
@@ -3956,65 +3781,43 @@
                       </a:r>
                     </a:p>
                   </a:txBody>
+                  <a:tcPr/>
                 </a:tc>
                 <a:tc>
                   <a:txBody>
                     <a:bodyPr/>
                     <a:lstStyle/>
                     <a:p>
-                      <a:pPr lvl="0" marL="0" indent="0">
+                      <a:pPr marL="0" lvl="0" indent="0">
                         <a:buNone/>
                       </a:pPr>
                       <a:r>
-                        <a:rPr/>
                         <a:t>toDb</a:t>
                       </a:r>
                     </a:p>
                   </a:txBody>
+                  <a:tcPr/>
                 </a:tc>
                 <a:tc>
                   <a:txBody>
                     <a:bodyPr/>
                     <a:lstStyle/>
                     <a:p>
-                      <a:pPr lvl="0" marL="0" indent="0">
+                      <a:pPr marL="0" lvl="0" indent="0">
                         <a:buNone/>
                       </a:pPr>
                       <a:r>
-                        <a:rPr/>
-                        <a:t>“</a:t>
-                      </a:r>
-                      <a:r>
-                        <a:rPr/>
-                        <a:t>true</a:t>
-                      </a:r>
-                      <a:r>
-                        <a:rPr/>
-                        <a:t>”</a:t>
-                      </a:r>
-                      <a:r>
-                        <a:rPr/>
-                        <a:t>/1/true</a:t>
-                      </a:r>
-                      <a:r>
-                        <a:rPr/>
-                        <a:t> </a:t>
-                      </a:r>
-                      <a:r>
-                        <a:rPr/>
-                        <a:t>to</a:t>
-                      </a:r>
-                      <a:r>
-                        <a:rPr/>
-                        <a:t> </a:t>
-                      </a:r>
-                      <a:r>
-                        <a:rPr/>
-                        <a:t>Boolean</a:t>
+                        <a:t>“true”/1/true to Boolean</a:t>
                       </a:r>
                     </a:p>
                   </a:txBody>
+                  <a:tcPr/>
                 </a:tc>
+                <a:extLst>
+                  <a:ext uri="{0D108BD9-81ED-4DB2-BD59-A6C34878D82A}">
+                    <a16:rowId xmlns:a16="http://schemas.microsoft.com/office/drawing/2014/main" val="10007"/>
+                  </a:ext>
+                </a:extLst>
               </a:tr>
               <a:tr h="0">
                 <a:tc>
@@ -4022,7 +3825,7 @@
                     <a:bodyPr/>
                     <a:lstStyle/>
                     <a:p>
-                      <a:pPr lvl="0" marL="0" indent="0">
+                      <a:pPr marL="0" lvl="0" indent="0">
                         <a:buNone/>
                       </a:pPr>
                       <a:r>
@@ -4033,61 +3836,43 @@
                       </a:r>
                     </a:p>
                   </a:txBody>
+                  <a:tcPr/>
                 </a:tc>
                 <a:tc>
                   <a:txBody>
                     <a:bodyPr/>
                     <a:lstStyle/>
                     <a:p>
-                      <a:pPr lvl="0" marL="0" indent="0">
+                      <a:pPr marL="0" lvl="0" indent="0">
                         <a:buNone/>
                       </a:pPr>
                       <a:r>
-                        <a:rPr/>
                         <a:t>fromDb</a:t>
                       </a:r>
                     </a:p>
                   </a:txBody>
+                  <a:tcPr/>
                 </a:tc>
                 <a:tc>
                   <a:txBody>
                     <a:bodyPr/>
                     <a:lstStyle/>
                     <a:p>
-                      <a:pPr lvl="0" marL="0" indent="0">
+                      <a:pPr marL="0" lvl="0" indent="0">
                         <a:buNone/>
                       </a:pPr>
                       <a:r>
-                        <a:rPr/>
-                        <a:t>PII</a:t>
-                      </a:r>
-                      <a:r>
-                        <a:rPr/>
-                        <a:t> </a:t>
-                      </a:r>
-                      <a:r>
-                        <a:rPr/>
-                        <a:t>masking</a:t>
-                      </a:r>
-                      <a:r>
-                        <a:rPr/>
-                        <a:t> </a:t>
-                      </a:r>
-                      <a:r>
-                        <a:rPr/>
-                        <a:t>for</a:t>
-                      </a:r>
-                      <a:r>
-                        <a:rPr/>
-                        <a:t> </a:t>
-                      </a:r>
-                      <a:r>
-                        <a:rPr/>
-                        <a:t>display</a:t>
+                        <a:t>PII masking for display</a:t>
                       </a:r>
                     </a:p>
                   </a:txBody>
+                  <a:tcPr/>
                 </a:tc>
+                <a:extLst>
+                  <a:ext uri="{0D108BD9-81ED-4DB2-BD59-A6C34878D82A}">
+                    <a16:rowId xmlns:a16="http://schemas.microsoft.com/office/drawing/2014/main" val="10008"/>
+                  </a:ext>
+                </a:extLst>
               </a:tr>
             </a:tbl>
           </a:graphicData>
@@ -4095,6 +3880,9 @@
       </p:graphicFrame>
     </p:spTree>
   </p:cSld>
+  <p:clrMapOvr>
+    <a:masterClrMapping/>
+  </p:clrMapOvr>
 </p:sld>
 </file>
 
@@ -4117,12 +3905,12 @@
       </p:grpSpPr>
       <p:sp>
         <p:nvSpPr>
-          <p:cNvPr id="3" name="Content Placeholder 2"/>
-          <p:cNvSpPr>
-            <a:spLocks noGrp="1"/>
-          </p:cNvSpPr>
-          <p:nvPr>
-            <p:ph idx="1"/>
+          <p:cNvPr id="2" name="Title 1"/>
+          <p:cNvSpPr>
+            <a:spLocks noGrp="1"/>
+          </p:cNvSpPr>
+          <p:nvPr>
+            <p:ph type="title"/>
           </p:nvPr>
         </p:nvSpPr>
         <p:spPr/>
@@ -4130,54 +3918,519 @@
           <a:bodyPr/>
           <a:lstStyle/>
           <a:p>
-            <a:pPr lvl="0" marL="0" indent="0">
+            <a:pPr marL="0" lvl="0" indent="0">
               <a:buNone/>
             </a:pPr>
             <a:r>
-              <a:rPr/>
-              <a:t>Plus: </a:t>
-            </a:r>
-            <a:r>
-              <a:rPr>
-                <a:latin typeface="Courier"/>
-              </a:rPr>
-              <a:t>toInstant</a:t>
-            </a:r>
-            <a:r>
-              <a:rPr/>
-              <a:t>, </a:t>
-            </a:r>
-            <a:r>
-              <a:rPr>
-                <a:latin typeface="Courier"/>
-              </a:rPr>
-              <a:t>fromInstant</a:t>
-            </a:r>
-            <a:r>
-              <a:rPr/>
-              <a:t>, </a:t>
-            </a:r>
-            <a:r>
-              <a:rPr>
-                <a:latin typeface="Courier"/>
-              </a:rPr>
-              <a:t>toInteger</a:t>
-            </a:r>
-            <a:r>
-              <a:rPr/>
-              <a:t>, </a:t>
-            </a:r>
-            <a:r>
-              <a:rPr>
-                <a:latin typeface="Courier"/>
-              </a:rPr>
-              <a:t>toUUID</a:t>
+              <a:t>Validation Gate: Complete Error Reporting</a:t>
+            </a:r>
+          </a:p>
+        </p:txBody>
+      </p:sp>
+      <p:sp>
+        <p:nvSpPr>
+          <p:cNvPr id="3" name="Content Placeholder 2"/>
+          <p:cNvSpPr>
+            <a:spLocks noGrp="1"/>
+          </p:cNvSpPr>
+          <p:nvPr>
+            <p:ph idx="1"/>
+          </p:nvPr>
+        </p:nvSpPr>
+        <p:spPr/>
+        <p:txBody>
+          <a:bodyPr>
+            <a:noAutofit/>
+          </a:bodyPr>
+          <a:lstStyle/>
+          <a:p>
+            <a:pPr lvl="0" indent="0">
+              <a:buNone/>
+            </a:pPr>
+            <a:r>
+              <a:rPr sz="2000" dirty="0">
+                <a:solidFill>
+                  <a:srgbClr val="06287E"/>
+                </a:solidFill>
+                <a:latin typeface="Courier"/>
+              </a:rPr>
+              <a:t>{</a:t>
+            </a:r>
+            <a:br>
+              <a:rPr sz="2000" dirty="0"/>
+            </a:br>
+            <a:r>
+              <a:rPr sz="2000" dirty="0">
+                <a:latin typeface="Courier"/>
+              </a:rPr>
+              <a:t>  </a:t>
+            </a:r>
+            <a:r>
+              <a:rPr sz="2000" dirty="0">
+                <a:solidFill>
+                  <a:srgbClr val="902000"/>
+                </a:solidFill>
+                <a:latin typeface="Courier"/>
+              </a:rPr>
+              <a:t>"error"</a:t>
+            </a:r>
+            <a:r>
+              <a:rPr sz="2000" dirty="0">
+                <a:solidFill>
+                  <a:srgbClr val="06287E"/>
+                </a:solidFill>
+                <a:latin typeface="Courier"/>
+              </a:rPr>
+              <a:t>:</a:t>
+            </a:r>
+            <a:r>
+              <a:rPr sz="2000" dirty="0">
+                <a:latin typeface="Courier"/>
+              </a:rPr>
+              <a:t> </a:t>
+            </a:r>
+            <a:r>
+              <a:rPr sz="2000" dirty="0">
+                <a:solidFill>
+                  <a:srgbClr val="4070A0"/>
+                </a:solidFill>
+                <a:latin typeface="Courier"/>
+              </a:rPr>
+              <a:t>"VALIDATION_FAILED"</a:t>
+            </a:r>
+            <a:r>
+              <a:rPr sz="2000" dirty="0">
+                <a:solidFill>
+                  <a:srgbClr val="06287E"/>
+                </a:solidFill>
+                <a:latin typeface="Courier"/>
+              </a:rPr>
+              <a:t>,</a:t>
+            </a:r>
+            <a:br>
+              <a:rPr sz="2000" dirty="0"/>
+            </a:br>
+            <a:r>
+              <a:rPr sz="2000" dirty="0">
+                <a:latin typeface="Courier"/>
+              </a:rPr>
+              <a:t>  </a:t>
+            </a:r>
+            <a:r>
+              <a:rPr sz="2000" dirty="0">
+                <a:solidFill>
+                  <a:srgbClr val="902000"/>
+                </a:solidFill>
+                <a:latin typeface="Courier"/>
+              </a:rPr>
+              <a:t>"violations"</a:t>
+            </a:r>
+            <a:r>
+              <a:rPr sz="2000" dirty="0">
+                <a:solidFill>
+                  <a:srgbClr val="06287E"/>
+                </a:solidFill>
+                <a:latin typeface="Courier"/>
+              </a:rPr>
+              <a:t>:</a:t>
+            </a:r>
+            <a:r>
+              <a:rPr sz="2000" dirty="0">
+                <a:latin typeface="Courier"/>
+              </a:rPr>
+              <a:t> </a:t>
+            </a:r>
+            <a:r>
+              <a:rPr sz="2000" dirty="0">
+                <a:solidFill>
+                  <a:srgbClr val="007020"/>
+                </a:solidFill>
+                <a:latin typeface="Courier"/>
+              </a:rPr>
+              <a:t>[</a:t>
+            </a:r>
+            <a:br>
+              <a:rPr sz="2000" dirty="0"/>
+            </a:br>
+            <a:r>
+              <a:rPr sz="2000" dirty="0">
+                <a:latin typeface="Courier"/>
+              </a:rPr>
+              <a:t>    </a:t>
+            </a:r>
+            <a:r>
+              <a:rPr sz="2000" dirty="0">
+                <a:solidFill>
+                  <a:srgbClr val="06287E"/>
+                </a:solidFill>
+                <a:latin typeface="Courier"/>
+              </a:rPr>
+              <a:t>{</a:t>
+            </a:r>
+            <a:r>
+              <a:rPr sz="2000" dirty="0">
+                <a:latin typeface="Courier"/>
+              </a:rPr>
+              <a:t> </a:t>
+            </a:r>
+            <a:r>
+              <a:rPr sz="2000" dirty="0">
+                <a:solidFill>
+                  <a:srgbClr val="902000"/>
+                </a:solidFill>
+                <a:latin typeface="Courier"/>
+              </a:rPr>
+              <a:t>"</a:t>
+            </a:r>
+            <a:r>
+              <a:rPr sz="2000" dirty="0" err="1">
+                <a:solidFill>
+                  <a:srgbClr val="902000"/>
+                </a:solidFill>
+                <a:latin typeface="Courier"/>
+              </a:rPr>
+              <a:t>json_path</a:t>
+            </a:r>
+            <a:r>
+              <a:rPr sz="2000" dirty="0">
+                <a:solidFill>
+                  <a:srgbClr val="902000"/>
+                </a:solidFill>
+                <a:latin typeface="Courier"/>
+              </a:rPr>
+              <a:t>"</a:t>
+            </a:r>
+            <a:r>
+              <a:rPr sz="2000" dirty="0">
+                <a:solidFill>
+                  <a:srgbClr val="06287E"/>
+                </a:solidFill>
+                <a:latin typeface="Courier"/>
+              </a:rPr>
+              <a:t>:</a:t>
+            </a:r>
+            <a:r>
+              <a:rPr sz="2000" dirty="0">
+                <a:latin typeface="Courier"/>
+              </a:rPr>
+              <a:t> </a:t>
+            </a:r>
+            <a:r>
+              <a:rPr sz="2000" dirty="0">
+                <a:solidFill>
+                  <a:srgbClr val="4070A0"/>
+                </a:solidFill>
+                <a:latin typeface="Courier"/>
+              </a:rPr>
+              <a:t>"</a:t>
+            </a:r>
+            <a:r>
+              <a:rPr sz="2000" dirty="0" err="1">
+                <a:solidFill>
+                  <a:srgbClr val="4070A0"/>
+                </a:solidFill>
+                <a:latin typeface="Courier"/>
+              </a:rPr>
+              <a:t>program_manager</a:t>
+            </a:r>
+            <a:r>
+              <a:rPr sz="2000" dirty="0">
+                <a:solidFill>
+                  <a:srgbClr val="4070A0"/>
+                </a:solidFill>
+                <a:latin typeface="Courier"/>
+              </a:rPr>
+              <a:t>"</a:t>
+            </a:r>
+            <a:r>
+              <a:rPr sz="2000" dirty="0">
+                <a:solidFill>
+                  <a:srgbClr val="06287E"/>
+                </a:solidFill>
+                <a:latin typeface="Courier"/>
+              </a:rPr>
+              <a:t>,</a:t>
+            </a:r>
+            <a:br>
+              <a:rPr sz="2000" dirty="0"/>
+            </a:br>
+            <a:r>
+              <a:rPr sz="2000" dirty="0">
+                <a:latin typeface="Courier"/>
+              </a:rPr>
+              <a:t>      </a:t>
+            </a:r>
+            <a:r>
+              <a:rPr sz="2000" dirty="0">
+                <a:solidFill>
+                  <a:srgbClr val="902000"/>
+                </a:solidFill>
+                <a:latin typeface="Courier"/>
+              </a:rPr>
+              <a:t>"message"</a:t>
+            </a:r>
+            <a:r>
+              <a:rPr sz="2000" dirty="0">
+                <a:solidFill>
+                  <a:srgbClr val="06287E"/>
+                </a:solidFill>
+                <a:latin typeface="Courier"/>
+              </a:rPr>
+              <a:t>:</a:t>
+            </a:r>
+            <a:r>
+              <a:rPr sz="2000" dirty="0">
+                <a:latin typeface="Courier"/>
+              </a:rPr>
+              <a:t> </a:t>
+            </a:r>
+            <a:r>
+              <a:rPr sz="2000" dirty="0">
+                <a:solidFill>
+                  <a:srgbClr val="4070A0"/>
+                </a:solidFill>
+                <a:latin typeface="Courier"/>
+              </a:rPr>
+              <a:t>"Required field is missing"</a:t>
+            </a:r>
+            <a:r>
+              <a:rPr sz="2000" dirty="0">
+                <a:latin typeface="Courier"/>
+              </a:rPr>
+              <a:t> </a:t>
+            </a:r>
+            <a:r>
+              <a:rPr sz="2000" dirty="0">
+                <a:solidFill>
+                  <a:srgbClr val="06287E"/>
+                </a:solidFill>
+                <a:latin typeface="Courier"/>
+              </a:rPr>
+              <a:t>}</a:t>
+            </a:r>
+            <a:r>
+              <a:rPr sz="2000" dirty="0">
+                <a:solidFill>
+                  <a:srgbClr val="007020"/>
+                </a:solidFill>
+                <a:latin typeface="Courier"/>
+              </a:rPr>
+              <a:t>,</a:t>
+            </a:r>
+            <a:br>
+              <a:rPr sz="2000" dirty="0"/>
+            </a:br>
+            <a:r>
+              <a:rPr sz="2000" dirty="0">
+                <a:latin typeface="Courier"/>
+              </a:rPr>
+              <a:t>    </a:t>
+            </a:r>
+            <a:r>
+              <a:rPr sz="2000" dirty="0">
+                <a:solidFill>
+                  <a:srgbClr val="06287E"/>
+                </a:solidFill>
+                <a:latin typeface="Courier"/>
+              </a:rPr>
+              <a:t>{</a:t>
+            </a:r>
+            <a:r>
+              <a:rPr sz="2000" dirty="0">
+                <a:latin typeface="Courier"/>
+              </a:rPr>
+              <a:t> </a:t>
+            </a:r>
+            <a:r>
+              <a:rPr sz="2000" dirty="0">
+                <a:solidFill>
+                  <a:srgbClr val="902000"/>
+                </a:solidFill>
+                <a:latin typeface="Courier"/>
+              </a:rPr>
+              <a:t>"</a:t>
+            </a:r>
+            <a:r>
+              <a:rPr sz="2000" dirty="0" err="1">
+                <a:solidFill>
+                  <a:srgbClr val="902000"/>
+                </a:solidFill>
+                <a:latin typeface="Courier"/>
+              </a:rPr>
+              <a:t>json_path</a:t>
+            </a:r>
+            <a:r>
+              <a:rPr sz="2000" dirty="0">
+                <a:solidFill>
+                  <a:srgbClr val="902000"/>
+                </a:solidFill>
+                <a:latin typeface="Courier"/>
+              </a:rPr>
+              <a:t>"</a:t>
+            </a:r>
+            <a:r>
+              <a:rPr sz="2000" dirty="0">
+                <a:solidFill>
+                  <a:srgbClr val="06287E"/>
+                </a:solidFill>
+                <a:latin typeface="Courier"/>
+              </a:rPr>
+              <a:t>:</a:t>
+            </a:r>
+            <a:r>
+              <a:rPr sz="2000" dirty="0">
+                <a:latin typeface="Courier"/>
+              </a:rPr>
+              <a:t> </a:t>
+            </a:r>
+            <a:r>
+              <a:rPr sz="2000" dirty="0">
+                <a:solidFill>
+                  <a:srgbClr val="4070A0"/>
+                </a:solidFill>
+                <a:latin typeface="Courier"/>
+              </a:rPr>
+              <a:t>"</a:t>
+            </a:r>
+            <a:r>
+              <a:rPr sz="2000" dirty="0" err="1">
+                <a:solidFill>
+                  <a:srgbClr val="4070A0"/>
+                </a:solidFill>
+                <a:latin typeface="Courier"/>
+              </a:rPr>
+              <a:t>prime_award_type</a:t>
+            </a:r>
+            <a:r>
+              <a:rPr sz="2000" dirty="0">
+                <a:solidFill>
+                  <a:srgbClr val="4070A0"/>
+                </a:solidFill>
+                <a:latin typeface="Courier"/>
+              </a:rPr>
+              <a:t>"</a:t>
+            </a:r>
+            <a:r>
+              <a:rPr sz="2000" dirty="0">
+                <a:solidFill>
+                  <a:srgbClr val="06287E"/>
+                </a:solidFill>
+                <a:latin typeface="Courier"/>
+              </a:rPr>
+              <a:t>,</a:t>
+            </a:r>
+            <a:br>
+              <a:rPr sz="2000" dirty="0"/>
+            </a:br>
+            <a:r>
+              <a:rPr sz="2000" dirty="0">
+                <a:latin typeface="Courier"/>
+              </a:rPr>
+              <a:t>      </a:t>
+            </a:r>
+            <a:r>
+              <a:rPr sz="2000" dirty="0">
+                <a:solidFill>
+                  <a:srgbClr val="902000"/>
+                </a:solidFill>
+                <a:latin typeface="Courier"/>
+              </a:rPr>
+              <a:t>"message"</a:t>
+            </a:r>
+            <a:r>
+              <a:rPr sz="2000" dirty="0">
+                <a:solidFill>
+                  <a:srgbClr val="06287E"/>
+                </a:solidFill>
+                <a:latin typeface="Courier"/>
+              </a:rPr>
+              <a:t>:</a:t>
+            </a:r>
+            <a:r>
+              <a:rPr sz="2000" dirty="0">
+                <a:latin typeface="Courier"/>
+              </a:rPr>
+              <a:t> </a:t>
+            </a:r>
+            <a:r>
+              <a:rPr sz="2000" dirty="0">
+                <a:solidFill>
+                  <a:srgbClr val="4070A0"/>
+                </a:solidFill>
+                <a:latin typeface="Courier"/>
+              </a:rPr>
+              <a:t>"Value not in allowed values"</a:t>
+            </a:r>
+            <a:r>
+              <a:rPr sz="2000" dirty="0">
+                <a:latin typeface="Courier"/>
+              </a:rPr>
+              <a:t> </a:t>
+            </a:r>
+            <a:r>
+              <a:rPr sz="2000" dirty="0">
+                <a:solidFill>
+                  <a:srgbClr val="06287E"/>
+                </a:solidFill>
+                <a:latin typeface="Courier"/>
+              </a:rPr>
+              <a:t>}</a:t>
+            </a:r>
+            <a:br>
+              <a:rPr sz="2000" dirty="0"/>
+            </a:br>
+            <a:r>
+              <a:rPr sz="2000" dirty="0">
+                <a:latin typeface="Courier"/>
+              </a:rPr>
+              <a:t>  </a:t>
+            </a:r>
+            <a:r>
+              <a:rPr sz="2000" dirty="0">
+                <a:solidFill>
+                  <a:srgbClr val="007020"/>
+                </a:solidFill>
+                <a:latin typeface="Courier"/>
+              </a:rPr>
+              <a:t>]</a:t>
+            </a:r>
+            <a:br>
+              <a:rPr sz="2000" dirty="0"/>
+            </a:br>
+            <a:r>
+              <a:rPr sz="2000" dirty="0">
+                <a:solidFill>
+                  <a:srgbClr val="06287E"/>
+                </a:solidFill>
+                <a:latin typeface="Courier"/>
+              </a:rPr>
+              <a:t>}</a:t>
+            </a:r>
+          </a:p>
+          <a:p>
+            <a:pPr marL="0" lvl="0" indent="0">
+              <a:buNone/>
+            </a:pPr>
+            <a:r>
+              <a:rPr sz="2000" dirty="0"/>
+              <a:t>All violations collected before throwing — caller gets a </a:t>
+            </a:r>
+            <a:r>
+              <a:rPr sz="2000" b="1" dirty="0"/>
+              <a:t>complete</a:t>
+            </a:r>
+            <a:r>
+              <a:rPr sz="2000" dirty="0"/>
+              <a:t> error list.</a:t>
             </a:r>
           </a:p>
         </p:txBody>
       </p:sp>
     </p:spTree>
   </p:cSld>
+  <p:clrMapOvr>
+    <a:masterClrMapping/>
+  </p:clrMapOvr>
 </p:sld>
 </file>
 
@@ -4213,531 +4466,18 @@
           <a:bodyPr/>
           <a:lstStyle/>
           <a:p>
-            <a:pPr lvl="0" marL="0" indent="0">
+            <a:pPr marL="0" lvl="0" indent="0">
               <a:buNone/>
             </a:pPr>
             <a:r>
-              <a:rPr/>
-              <a:t>Validation</a:t>
-            </a:r>
-            <a:r>
-              <a:rPr/>
-              <a:t> </a:t>
-            </a:r>
-            <a:r>
-              <a:rPr/>
-              <a:t>Gate:</a:t>
-            </a:r>
-            <a:r>
-              <a:rPr/>
-              <a:t> </a:t>
-            </a:r>
-            <a:r>
-              <a:rPr/>
-              <a:t>Complete</a:t>
-            </a:r>
-            <a:r>
-              <a:rPr/>
-              <a:t> </a:t>
-            </a:r>
-            <a:r>
-              <a:rPr/>
-              <a:t>Error</a:t>
-            </a:r>
-            <a:r>
-              <a:rPr/>
-              <a:t> </a:t>
-            </a:r>
-            <a:r>
-              <a:rPr/>
-              <a:t>Reporting</a:t>
-            </a:r>
-          </a:p>
-        </p:txBody>
-      </p:sp>
-      <p:sp>
-        <p:nvSpPr>
-          <p:cNvPr id="3" name="Content Placeholder 2"/>
-          <p:cNvSpPr>
-            <a:spLocks noGrp="1"/>
-          </p:cNvSpPr>
-          <p:nvPr>
-            <p:ph idx="1"/>
-          </p:nvPr>
-        </p:nvSpPr>
-        <p:spPr/>
-        <p:txBody>
-          <a:bodyPr/>
-          <a:lstStyle/>
-          <a:p>
-            <a:pPr lvl="0" indent="0">
-              <a:buNone/>
-            </a:pPr>
-            <a:r>
-              <a:rPr>
-                <a:solidFill>
-                  <a:srgbClr val="06287E"/>
-                </a:solidFill>
-                <a:latin typeface="Courier"/>
-              </a:rPr>
-              <a:t>{</a:t>
-            </a:r>
-            <a:br/>
-            <a:r>
-              <a:rPr>
-                <a:latin typeface="Courier"/>
-              </a:rPr>
-              <a:t>  </a:t>
-            </a:r>
-            <a:r>
-              <a:rPr>
-                <a:solidFill>
-                  <a:srgbClr val="902000"/>
-                </a:solidFill>
-                <a:latin typeface="Courier"/>
-              </a:rPr>
-              <a:t>"error"</a:t>
-            </a:r>
-            <a:r>
-              <a:rPr>
-                <a:solidFill>
-                  <a:srgbClr val="06287E"/>
-                </a:solidFill>
-                <a:latin typeface="Courier"/>
-              </a:rPr>
-              <a:t>:</a:t>
-            </a:r>
-            <a:r>
-              <a:rPr>
-                <a:latin typeface="Courier"/>
-              </a:rPr>
-              <a:t> </a:t>
-            </a:r>
-            <a:r>
-              <a:rPr>
-                <a:solidFill>
-                  <a:srgbClr val="4070A0"/>
-                </a:solidFill>
-                <a:latin typeface="Courier"/>
-              </a:rPr>
-              <a:t>"VALIDATION_FAILED"</a:t>
-            </a:r>
-            <a:r>
-              <a:rPr>
-                <a:solidFill>
-                  <a:srgbClr val="06287E"/>
-                </a:solidFill>
-                <a:latin typeface="Courier"/>
-              </a:rPr>
-              <a:t>,</a:t>
-            </a:r>
-            <a:br/>
-            <a:r>
-              <a:rPr>
-                <a:latin typeface="Courier"/>
-              </a:rPr>
-              <a:t>  </a:t>
-            </a:r>
-            <a:r>
-              <a:rPr>
-                <a:solidFill>
-                  <a:srgbClr val="902000"/>
-                </a:solidFill>
-                <a:latin typeface="Courier"/>
-              </a:rPr>
-              <a:t>"violations"</a:t>
-            </a:r>
-            <a:r>
-              <a:rPr>
-                <a:solidFill>
-                  <a:srgbClr val="06287E"/>
-                </a:solidFill>
-                <a:latin typeface="Courier"/>
-              </a:rPr>
-              <a:t>:</a:t>
-            </a:r>
-            <a:r>
-              <a:rPr>
-                <a:latin typeface="Courier"/>
-              </a:rPr>
-              <a:t> </a:t>
-            </a:r>
-            <a:r>
-              <a:rPr>
-                <a:solidFill>
-                  <a:srgbClr val="007020"/>
-                </a:solidFill>
-                <a:latin typeface="Courier"/>
-              </a:rPr>
-              <a:t>[</a:t>
-            </a:r>
-            <a:br/>
-            <a:r>
-              <a:rPr>
-                <a:latin typeface="Courier"/>
-              </a:rPr>
-              <a:t>    </a:t>
-            </a:r>
-            <a:r>
-              <a:rPr>
-                <a:solidFill>
-                  <a:srgbClr val="06287E"/>
-                </a:solidFill>
-                <a:latin typeface="Courier"/>
-              </a:rPr>
-              <a:t>{</a:t>
-            </a:r>
-            <a:r>
-              <a:rPr>
-                <a:latin typeface="Courier"/>
-              </a:rPr>
-              <a:t> </a:t>
-            </a:r>
-            <a:r>
-              <a:rPr>
-                <a:solidFill>
-                  <a:srgbClr val="902000"/>
-                </a:solidFill>
-                <a:latin typeface="Courier"/>
-              </a:rPr>
-              <a:t>"json_path"</a:t>
-            </a:r>
-            <a:r>
-              <a:rPr>
-                <a:solidFill>
-                  <a:srgbClr val="06287E"/>
-                </a:solidFill>
-                <a:latin typeface="Courier"/>
-              </a:rPr>
-              <a:t>:</a:t>
-            </a:r>
-            <a:r>
-              <a:rPr>
-                <a:latin typeface="Courier"/>
-              </a:rPr>
-              <a:t> </a:t>
-            </a:r>
-            <a:r>
-              <a:rPr>
-                <a:solidFill>
-                  <a:srgbClr val="4070A0"/>
-                </a:solidFill>
-                <a:latin typeface="Courier"/>
-              </a:rPr>
-              <a:t>"program_manager"</a:t>
-            </a:r>
-            <a:r>
-              <a:rPr>
-                <a:solidFill>
-                  <a:srgbClr val="06287E"/>
-                </a:solidFill>
-                <a:latin typeface="Courier"/>
-              </a:rPr>
-              <a:t>,</a:t>
-            </a:r>
-            <a:br/>
-            <a:r>
-              <a:rPr>
-                <a:latin typeface="Courier"/>
-              </a:rPr>
-              <a:t>      </a:t>
-            </a:r>
-            <a:r>
-              <a:rPr>
-                <a:solidFill>
-                  <a:srgbClr val="902000"/>
-                </a:solidFill>
-                <a:latin typeface="Courier"/>
-              </a:rPr>
-              <a:t>"message"</a:t>
-            </a:r>
-            <a:r>
-              <a:rPr>
-                <a:solidFill>
-                  <a:srgbClr val="06287E"/>
-                </a:solidFill>
-                <a:latin typeface="Courier"/>
-              </a:rPr>
-              <a:t>:</a:t>
-            </a:r>
-            <a:r>
-              <a:rPr>
-                <a:latin typeface="Courier"/>
-              </a:rPr>
-              <a:t> </a:t>
-            </a:r>
-            <a:r>
-              <a:rPr>
-                <a:solidFill>
-                  <a:srgbClr val="4070A0"/>
-                </a:solidFill>
-                <a:latin typeface="Courier"/>
-              </a:rPr>
-              <a:t>"Required field is missing"</a:t>
-            </a:r>
-            <a:r>
-              <a:rPr>
-                <a:latin typeface="Courier"/>
-              </a:rPr>
-              <a:t> </a:t>
-            </a:r>
-            <a:r>
-              <a:rPr>
-                <a:solidFill>
-                  <a:srgbClr val="06287E"/>
-                </a:solidFill>
-                <a:latin typeface="Courier"/>
-              </a:rPr>
-              <a:t>}</a:t>
-            </a:r>
-            <a:r>
-              <a:rPr>
-                <a:solidFill>
-                  <a:srgbClr val="007020"/>
-                </a:solidFill>
-                <a:latin typeface="Courier"/>
-              </a:rPr>
-              <a:t>,</a:t>
-            </a:r>
-            <a:br/>
-            <a:r>
-              <a:rPr>
-                <a:latin typeface="Courier"/>
-              </a:rPr>
-              <a:t>    </a:t>
-            </a:r>
-            <a:r>
-              <a:rPr>
-                <a:solidFill>
-                  <a:srgbClr val="06287E"/>
-                </a:solidFill>
-                <a:latin typeface="Courier"/>
-              </a:rPr>
-              <a:t>{</a:t>
-            </a:r>
-            <a:r>
-              <a:rPr>
-                <a:latin typeface="Courier"/>
-              </a:rPr>
-              <a:t> </a:t>
-            </a:r>
-            <a:r>
-              <a:rPr>
-                <a:solidFill>
-                  <a:srgbClr val="902000"/>
-                </a:solidFill>
-                <a:latin typeface="Courier"/>
-              </a:rPr>
-              <a:t>"json_path"</a:t>
-            </a:r>
-            <a:r>
-              <a:rPr>
-                <a:solidFill>
-                  <a:srgbClr val="06287E"/>
-                </a:solidFill>
-                <a:latin typeface="Courier"/>
-              </a:rPr>
-              <a:t>:</a:t>
-            </a:r>
-            <a:r>
-              <a:rPr>
-                <a:latin typeface="Courier"/>
-              </a:rPr>
-              <a:t> </a:t>
-            </a:r>
-            <a:r>
-              <a:rPr>
-                <a:solidFill>
-                  <a:srgbClr val="4070A0"/>
-                </a:solidFill>
-                <a:latin typeface="Courier"/>
-              </a:rPr>
-              <a:t>"prime_award_type"</a:t>
-            </a:r>
-            <a:r>
-              <a:rPr>
-                <a:solidFill>
-                  <a:srgbClr val="06287E"/>
-                </a:solidFill>
-                <a:latin typeface="Courier"/>
-              </a:rPr>
-              <a:t>,</a:t>
-            </a:r>
-            <a:br/>
-            <a:r>
-              <a:rPr>
-                <a:latin typeface="Courier"/>
-              </a:rPr>
-              <a:t>      </a:t>
-            </a:r>
-            <a:r>
-              <a:rPr>
-                <a:solidFill>
-                  <a:srgbClr val="902000"/>
-                </a:solidFill>
-                <a:latin typeface="Courier"/>
-              </a:rPr>
-              <a:t>"message"</a:t>
-            </a:r>
-            <a:r>
-              <a:rPr>
-                <a:solidFill>
-                  <a:srgbClr val="06287E"/>
-                </a:solidFill>
-                <a:latin typeface="Courier"/>
-              </a:rPr>
-              <a:t>:</a:t>
-            </a:r>
-            <a:r>
-              <a:rPr>
-                <a:latin typeface="Courier"/>
-              </a:rPr>
-              <a:t> </a:t>
-            </a:r>
-            <a:r>
-              <a:rPr>
-                <a:solidFill>
-                  <a:srgbClr val="4070A0"/>
-                </a:solidFill>
-                <a:latin typeface="Courier"/>
-              </a:rPr>
-              <a:t>"Value not in allowed values"</a:t>
-            </a:r>
-            <a:r>
-              <a:rPr>
-                <a:latin typeface="Courier"/>
-              </a:rPr>
-              <a:t> </a:t>
-            </a:r>
-            <a:r>
-              <a:rPr>
-                <a:solidFill>
-                  <a:srgbClr val="06287E"/>
-                </a:solidFill>
-                <a:latin typeface="Courier"/>
-              </a:rPr>
-              <a:t>}</a:t>
-            </a:r>
-            <a:br/>
-            <a:r>
-              <a:rPr>
-                <a:latin typeface="Courier"/>
-              </a:rPr>
-              <a:t>  </a:t>
-            </a:r>
-            <a:r>
-              <a:rPr>
-                <a:solidFill>
-                  <a:srgbClr val="007020"/>
-                </a:solidFill>
-                <a:latin typeface="Courier"/>
-              </a:rPr>
-              <a:t>]</a:t>
-            </a:r>
-            <a:br/>
-            <a:r>
-              <a:rPr>
-                <a:solidFill>
-                  <a:srgbClr val="06287E"/>
-                </a:solidFill>
-                <a:latin typeface="Courier"/>
-              </a:rPr>
-              <a:t>}</a:t>
-            </a:r>
-          </a:p>
-          <a:p>
-            <a:pPr lvl="0" marL="0" indent="0">
-              <a:buNone/>
-            </a:pPr>
-            <a:r>
-              <a:rPr/>
-              <a:t>All violations collected before throwing — caller gets a </a:t>
-            </a:r>
-            <a:r>
-              <a:rPr b="1"/>
-              <a:t>complete</a:t>
-            </a:r>
-            <a:r>
-              <a:rPr/>
-              <a:t> error list.</a:t>
-            </a:r>
-          </a:p>
-        </p:txBody>
-      </p:sp>
-    </p:spTree>
-  </p:cSld>
-</p:sld>
-</file>
-
-<file path=ppt/slides/slide14.xml><?xml version="1.0" encoding="utf-8"?>
-<p:sld xmlns:a="http://schemas.openxmlformats.org/drawingml/2006/main" xmlns:r="http://schemas.openxmlformats.org/officeDocument/2006/relationships" xmlns:p="http://schemas.openxmlformats.org/presentationml/2006/main">
-  <p:cSld>
-    <p:spTree>
-      <p:nvGrpSpPr>
-        <p:cNvPr id="1" name=""/>
-        <p:cNvGrpSpPr/>
-        <p:nvPr/>
-      </p:nvGrpSpPr>
-      <p:grpSpPr>
-        <a:xfrm>
-          <a:off x="0" y="0"/>
-          <a:ext cx="0" cy="0"/>
-          <a:chOff x="0" y="0"/>
-          <a:chExt cx="0" cy="0"/>
-        </a:xfrm>
-      </p:grpSpPr>
-      <p:sp>
-        <p:nvSpPr>
-          <p:cNvPr id="2" name="Title 1"/>
-          <p:cNvSpPr>
-            <a:spLocks noGrp="1"/>
-          </p:cNvSpPr>
-          <p:nvPr>
-            <p:ph type="title"/>
-          </p:nvPr>
-        </p:nvSpPr>
-        <p:spPr/>
-        <p:txBody>
-          <a:bodyPr/>
-          <a:lstStyle/>
-          <a:p>
-            <a:pPr lvl="0" marL="0" indent="0">
-              <a:buNone/>
-            </a:pPr>
-            <a:r>
-              <a:rPr/>
-              <a:t>SQL</a:t>
-            </a:r>
-            <a:r>
-              <a:rPr/>
-              <a:t> </a:t>
-            </a:r>
-            <a:r>
-              <a:rPr/>
-              <a:t>Insert:</a:t>
-            </a:r>
-            <a:r>
-              <a:rPr/>
-              <a:t> </a:t>
-            </a:r>
-            <a:r>
-              <a:rPr/>
-              <a:t>Transactional</a:t>
-            </a:r>
-            <a:r>
-              <a:rPr/>
-              <a:t> </a:t>
-            </a:r>
-            <a:r>
-              <a:rPr/>
-              <a:t>Safety</a:t>
+              <a:t>SQL Insert: Transactional Safety</a:t>
             </a:r>
           </a:p>
         </p:txBody>
       </p:sp>
       <p:pic>
         <p:nvPicPr>
-          <p:cNvPr descr="/tmp/doc-diagrams/TRANSFORMER_PIPELINE_diag4.png" id="0" name="Picture 1"/>
+          <p:cNvPr id="3" name="Picture 1" descr="/tmp/doc-diagrams/TRANSFORMER_PIPELINE_diag4.png"/>
           <p:cNvPicPr>
             <a:picLocks noGrp="1" noChangeAspect="1"/>
           </p:cNvPicPr>
@@ -4767,7 +4507,7 @@
       </p:pic>
       <p:sp>
         <p:nvSpPr>
-          <p:cNvPr id="1" name="TextBox 3"/>
+          <p:cNvPr id="4" name="TextBox 3"/>
           <p:cNvSpPr txBox="1"/>
           <p:nvPr/>
         </p:nvSpPr>
@@ -4785,26 +4525,100 @@
           <a:bodyPr/>
           <a:lstStyle/>
           <a:p>
-            <a:pPr lvl="0" marL="0" indent="0" algn="ctr">
+            <a:pPr marL="0" lvl="0" indent="0" algn="ctr">
               <a:buNone/>
             </a:pPr>
             <a:r>
-              <a:rPr/>
-              <a:t>SQL</a:t>
-            </a:r>
-            <a:r>
-              <a:rPr/>
-              <a:t> </a:t>
-            </a:r>
-            <a:r>
-              <a:rPr/>
-              <a:t>Insert</a:t>
+              <a:t>SQL Insert</a:t>
             </a:r>
           </a:p>
         </p:txBody>
       </p:sp>
     </p:spTree>
   </p:cSld>
+  <p:clrMapOvr>
+    <a:masterClrMapping/>
+  </p:clrMapOvr>
+</p:sld>
+</file>
+
+<file path=ppt/slides/slide14.xml><?xml version="1.0" encoding="utf-8"?>
+<p:sld xmlns:a="http://schemas.openxmlformats.org/drawingml/2006/main" xmlns:r="http://schemas.openxmlformats.org/officeDocument/2006/relationships" xmlns:p="http://schemas.openxmlformats.org/presentationml/2006/main">
+  <p:cSld>
+    <p:spTree>
+      <p:nvGrpSpPr>
+        <p:cNvPr id="1" name=""/>
+        <p:cNvGrpSpPr/>
+        <p:nvPr/>
+      </p:nvGrpSpPr>
+      <p:grpSpPr>
+        <a:xfrm>
+          <a:off x="0" y="0"/>
+          <a:ext cx="0" cy="0"/>
+          <a:chOff x="0" y="0"/>
+          <a:chExt cx="0" cy="0"/>
+        </a:xfrm>
+      </p:grpSpPr>
+      <p:sp>
+        <p:nvSpPr>
+          <p:cNvPr id="3" name="Content Placeholder 2"/>
+          <p:cNvSpPr>
+            <a:spLocks noGrp="1"/>
+          </p:cNvSpPr>
+          <p:nvPr>
+            <p:ph idx="1"/>
+          </p:nvPr>
+        </p:nvSpPr>
+        <p:spPr/>
+        <p:txBody>
+          <a:bodyPr/>
+          <a:lstStyle/>
+          <a:p>
+            <a:pPr lvl="1"/>
+            <a:r>
+              <a:rPr>
+                <a:latin typeface="Courier"/>
+              </a:rPr>
+              <a:t>@Transactional(isolation = REPEATABLE_READ)</a:t>
+            </a:r>
+          </a:p>
+          <a:p>
+            <a:pPr lvl="1"/>
+            <a:r>
+              <a:t>Parent + child tables in single atomic transaction</a:t>
+            </a:r>
+          </a:p>
+          <a:p>
+            <a:pPr lvl="1"/>
+            <a:r>
+              <a:rPr>
+                <a:latin typeface="Courier"/>
+              </a:rPr>
+              <a:t>GeneratedKeyHolder</a:t>
+            </a:r>
+            <a:r>
+              <a:t> captures auto-generated </a:t>
+            </a:r>
+            <a:r>
+              <a:rPr>
+                <a:latin typeface="Courier"/>
+              </a:rPr>
+              <a:t>submission_id</a:t>
+            </a:r>
+          </a:p>
+          <a:p>
+            <a:pPr lvl="1"/>
+            <a:r>
+              <a:t>Duplicate key caught and returned as HTTP 409</a:t>
+            </a:r>
+          </a:p>
+        </p:txBody>
+      </p:sp>
+    </p:spTree>
+  </p:cSld>
+  <p:clrMapOvr>
+    <a:masterClrMapping/>
+  </p:clrMapOvr>
 </p:sld>
 </file>
 
@@ -4827,12 +4641,12 @@
       </p:grpSpPr>
       <p:sp>
         <p:nvSpPr>
-          <p:cNvPr id="3" name="Content Placeholder 2"/>
-          <p:cNvSpPr>
-            <a:spLocks noGrp="1"/>
-          </p:cNvSpPr>
-          <p:nvPr>
-            <p:ph idx="1"/>
+          <p:cNvPr id="2" name="Title 1"/>
+          <p:cNvSpPr>
+            <a:spLocks noGrp="1"/>
+          </p:cNvSpPr>
+          <p:nvPr>
+            <p:ph type="title"/>
           </p:nvPr>
         </p:nvSpPr>
         <p:spPr/>
@@ -4840,51 +4654,152 @@
           <a:bodyPr/>
           <a:lstStyle/>
           <a:p>
-            <a:pPr lvl="1"/>
-            <a:r>
-              <a:rPr>
-                <a:latin typeface="Courier"/>
-              </a:rPr>
-              <a:t>@Transactional(isolation = REPEATABLE_READ)</a:t>
-            </a:r>
-          </a:p>
-          <a:p>
-            <a:pPr lvl="1"/>
-            <a:r>
-              <a:rPr/>
-              <a:t>Parent + child tables in single atomic transaction</a:t>
-            </a:r>
-          </a:p>
-          <a:p>
-            <a:pPr lvl="1"/>
-            <a:r>
-              <a:rPr>
-                <a:latin typeface="Courier"/>
-              </a:rPr>
-              <a:t>GeneratedKeyHolder</a:t>
-            </a:r>
-            <a:r>
-              <a:rPr/>
-              <a:t> captures auto-generated </a:t>
-            </a:r>
-            <a:r>
-              <a:rPr>
-                <a:latin typeface="Courier"/>
-              </a:rPr>
+            <a:pPr marL="0" lvl="0" indent="0">
+              <a:buNone/>
+            </a:pPr>
+            <a:r>
+              <a:t>Read Pipeline: 7 Stages</a:t>
+            </a:r>
+          </a:p>
+        </p:txBody>
+      </p:sp>
+      <p:sp>
+        <p:nvSpPr>
+          <p:cNvPr id="3" name="Content Placeholder 2"/>
+          <p:cNvSpPr>
+            <a:spLocks noGrp="1"/>
+          </p:cNvSpPr>
+          <p:nvPr>
+            <p:ph idx="1"/>
+          </p:nvPr>
+        </p:nvSpPr>
+        <p:spPr>
+          <a:xfrm>
+            <a:off x="457200" y="1568670"/>
+            <a:ext cx="8229600" cy="4525963"/>
+          </a:xfrm>
+        </p:spPr>
+        <p:txBody>
+          <a:bodyPr>
+            <a:normAutofit fontScale="92500" lnSpcReduction="10000"/>
+          </a:bodyPr>
+          <a:lstStyle/>
+          <a:p>
+            <a:pPr lvl="1">
+              <a:buAutoNum type="arabicPeriod"/>
+            </a:pPr>
+            <a:r>
+              <a:rPr b="1" dirty="0"/>
+              <a:t>Template Resolution</a:t>
+            </a:r>
+            <a:r>
+              <a:rPr dirty="0"/>
+              <a:t> — Same template, optional version pinning</a:t>
+            </a:r>
+          </a:p>
+          <a:p>
+            <a:pPr lvl="1">
+              <a:buAutoNum type="arabicPeriod"/>
+            </a:pPr>
+            <a:r>
+              <a:rPr b="1" dirty="0"/>
+              <a:t>Primary Row Query</a:t>
+            </a:r>
+            <a:r>
+              <a:rPr dirty="0"/>
+              <a:t> — SELECT by </a:t>
+            </a:r>
+            <a:r>
+              <a:rPr dirty="0" err="1"/>
               <a:t>submission_id</a:t>
             </a:r>
-          </a:p>
-          <a:p>
-            <a:pPr lvl="1"/>
-            <a:r>
-              <a:rPr/>
-              <a:t>Duplicate key caught and returned as HTTP 409</a:t>
+            <a:endParaRPr dirty="0"/>
+          </a:p>
+          <a:p>
+            <a:pPr lvl="1">
+              <a:buAutoNum type="arabicPeriod"/>
+            </a:pPr>
+            <a:r>
+              <a:rPr b="1" dirty="0"/>
+              <a:t>Child Table Queries</a:t>
+            </a:r>
+            <a:r>
+              <a:rPr dirty="0"/>
+              <a:t> — SELECT children ordered by </a:t>
+            </a:r>
+            <a:r>
+              <a:rPr dirty="0" err="1"/>
+              <a:t>item_index</a:t>
+            </a:r>
+            <a:endParaRPr dirty="0"/>
+          </a:p>
+          <a:p>
+            <a:pPr lvl="1">
+              <a:buAutoNum type="arabicPeriod"/>
+            </a:pPr>
+            <a:r>
+              <a:rPr b="1" dirty="0"/>
+              <a:t>Post-Query Hooks</a:t>
+            </a:r>
+            <a:r>
+              <a:rPr dirty="0"/>
+              <a:t> — PII masking, decryption</a:t>
+            </a:r>
+          </a:p>
+          <a:p>
+            <a:pPr lvl="1">
+              <a:buAutoNum type="arabicPeriod"/>
+            </a:pPr>
+            <a:r>
+              <a:rPr b="1" dirty="0"/>
+              <a:t>Field Assembly</a:t>
+            </a:r>
+            <a:r>
+              <a:rPr dirty="0"/>
+              <a:t> — </a:t>
+            </a:r>
+            <a:r>
+              <a:rPr dirty="0" err="1"/>
+              <a:t>fromDb</a:t>
+            </a:r>
+            <a:r>
+              <a:rPr dirty="0"/>
+              <a:t> transforms, rebuild nested JSON</a:t>
+            </a:r>
+          </a:p>
+          <a:p>
+            <a:pPr lvl="1">
+              <a:buAutoNum type="arabicPeriod"/>
+            </a:pPr>
+            <a:r>
+              <a:rPr b="1" dirty="0"/>
+              <a:t>Post-Assembly Hooks</a:t>
+            </a:r>
+            <a:r>
+              <a:rPr dirty="0"/>
+              <a:t> — Computed fields, lookup hydration</a:t>
+            </a:r>
+          </a:p>
+          <a:p>
+            <a:pPr lvl="1">
+              <a:buAutoNum type="arabicPeriod"/>
+            </a:pPr>
+            <a:r>
+              <a:rPr b="1" dirty="0"/>
+              <a:t>Response Envelope</a:t>
+            </a:r>
+            <a:r>
+              <a:rPr dirty="0"/>
+              <a:t> — Wrap with metadata</a:t>
             </a:r>
           </a:p>
         </p:txBody>
       </p:sp>
     </p:spTree>
   </p:cSld>
+  <p:clrMapOvr>
+    <a:masterClrMapping/>
+  </p:clrMapOvr>
 </p:sld>
 </file>
 
@@ -4920,149 +4835,80 @@
           <a:bodyPr/>
           <a:lstStyle/>
           <a:p>
-            <a:pPr lvl="0" marL="0" indent="0">
+            <a:pPr marL="0" lvl="0" indent="0">
               <a:buNone/>
             </a:pPr>
             <a:r>
-              <a:rPr/>
-              <a:t>Read</a:t>
-            </a:r>
-            <a:r>
-              <a:rPr/>
-              <a:t> </a:t>
-            </a:r>
-            <a:r>
-              <a:rPr/>
-              <a:t>Pipeline:</a:t>
-            </a:r>
-            <a:r>
-              <a:rPr/>
-              <a:t> </a:t>
-            </a:r>
-            <a:r>
-              <a:rPr/>
-              <a:t>7</a:t>
-            </a:r>
-            <a:r>
-              <a:rPr/>
-              <a:t> </a:t>
-            </a:r>
-            <a:r>
-              <a:rPr/>
-              <a:t>Stages</a:t>
-            </a:r>
-          </a:p>
-        </p:txBody>
-      </p:sp>
-      <p:sp>
-        <p:nvSpPr>
-          <p:cNvPr id="3" name="Content Placeholder 2"/>
-          <p:cNvSpPr>
-            <a:spLocks noGrp="1"/>
-          </p:cNvSpPr>
-          <p:nvPr>
-            <p:ph idx="1"/>
-          </p:nvPr>
-        </p:nvSpPr>
-        <p:spPr/>
+              <a:t>Hook System: Extensible Business Logic</a:t>
+            </a:r>
+          </a:p>
+        </p:txBody>
+      </p:sp>
+      <p:pic>
+        <p:nvPicPr>
+          <p:cNvPr id="3" name="Picture 1" descr="/tmp/doc-diagrams/TRANSFORMER_PIPELINE_diag5.png"/>
+          <p:cNvPicPr>
+            <a:picLocks noGrp="1" noChangeAspect="1"/>
+          </p:cNvPicPr>
+          <p:nvPr/>
+        </p:nvPicPr>
+        <p:blipFill>
+          <a:blip r:embed="rId2"/>
+          <a:stretch>
+            <a:fillRect/>
+          </a:stretch>
+        </p:blipFill>
+        <p:spPr bwMode="auto">
+          <a:xfrm>
+            <a:off x="2690648" y="1600199"/>
+            <a:ext cx="3062452" cy="5230999"/>
+          </a:xfrm>
+          <a:prstGeom prst="rect">
+            <a:avLst/>
+          </a:prstGeom>
+          <a:noFill/>
+          <a:ln w="9525">
+            <a:noFill/>
+            <a:headEnd/>
+            <a:tailEnd/>
+          </a:ln>
+        </p:spPr>
+      </p:pic>
+      <p:sp>
+        <p:nvSpPr>
+          <p:cNvPr id="4" name="TextBox 3"/>
+          <p:cNvSpPr txBox="1"/>
+          <p:nvPr/>
+        </p:nvSpPr>
+        <p:spPr>
+          <a:xfrm>
+            <a:off x="6127530" y="5613400"/>
+            <a:ext cx="2559269" cy="508000"/>
+          </a:xfrm>
+          <a:prstGeom prst="rect">
+            <a:avLst/>
+          </a:prstGeom>
+          <a:noFill/>
+        </p:spPr>
         <p:txBody>
           <a:bodyPr/>
           <a:lstStyle/>
           <a:p>
-            <a:pPr lvl="1">
-              <a:buAutoNum type="arabicPeriod"/>
+            <a:pPr marL="0" lvl="0" indent="0" algn="ctr">
+              <a:buNone/>
             </a:pPr>
             <a:r>
-              <a:rPr b="1"/>
-              <a:t>Template Resolution</a:t>
-            </a:r>
-            <a:r>
-              <a:rPr/>
-              <a:t> — Same template, optional version pinning</a:t>
-            </a:r>
-          </a:p>
-          <a:p>
-            <a:pPr lvl="1">
-              <a:buAutoNum type="arabicPeriod"/>
-            </a:pPr>
-            <a:r>
-              <a:rPr b="1"/>
-              <a:t>Primary Row Query</a:t>
-            </a:r>
-            <a:r>
-              <a:rPr/>
-              <a:t> — SELECT by submission_id</a:t>
-            </a:r>
-          </a:p>
-          <a:p>
-            <a:pPr lvl="1">
-              <a:buAutoNum type="arabicPeriod"/>
-            </a:pPr>
-            <a:r>
-              <a:rPr b="1"/>
-              <a:t>Child Table Queries</a:t>
-            </a:r>
-            <a:r>
-              <a:rPr/>
-              <a:t> — SELECT children ordered by item_index</a:t>
-            </a:r>
-          </a:p>
-          <a:p>
-            <a:pPr lvl="1">
-              <a:buAutoNum type="arabicPeriod"/>
-            </a:pPr>
-            <a:r>
-              <a:rPr b="1"/>
-              <a:t>Post-Query Hooks</a:t>
-            </a:r>
-            <a:r>
-              <a:rPr/>
-              <a:t> — PII masking, decryption</a:t>
-            </a:r>
-          </a:p>
-          <a:p>
-            <a:pPr lvl="1">
-              <a:buAutoNum type="arabicPeriod"/>
-            </a:pPr>
-            <a:r>
-              <a:rPr b="1"/>
-              <a:t>Field Assembly</a:t>
-            </a:r>
-            <a:r>
-              <a:rPr/>
-              <a:t> — fromDb transforms, rebuild nested JSON</a:t>
-            </a:r>
-          </a:p>
-          <a:p>
-            <a:pPr lvl="1">
-              <a:buAutoNum type="arabicPeriod"/>
-            </a:pPr>
-            <a:r>
-              <a:rPr b="1"/>
-              <a:t>Post-Assembly Hooks</a:t>
-            </a:r>
-            <a:r>
-              <a:rPr/>
-              <a:t> — Computed fields, lookup hydration</a:t>
-            </a:r>
-          </a:p>
-          <a:p>
-            <a:pPr lvl="1">
-              <a:buAutoNum type="arabicPeriod"/>
-            </a:pPr>
-            <a:r>
-              <a:rPr b="1"/>
-              <a:t>Response Envelope</a:t>
-            </a:r>
-            <a:r>
-              <a:rPr/>
-              <a:t> — Wrap with metadata</a:t>
+              <a:rPr dirty="0"/>
+              <a:t>Hook System</a:t>
             </a:r>
           </a:p>
         </p:txBody>
       </p:sp>
     </p:spTree>
   </p:cSld>
+  <p:clrMapOvr>
+    <a:masterClrMapping/>
+  </p:clrMapOvr>
 </p:sld>
 </file>
 
@@ -5098,118 +4944,448 @@
           <a:bodyPr/>
           <a:lstStyle/>
           <a:p>
-            <a:pPr lvl="0" marL="0" indent="0">
+            <a:pPr marL="0" lvl="0" indent="0">
               <a:buNone/>
             </a:pPr>
             <a:r>
-              <a:rPr/>
-              <a:t>Hook</a:t>
-            </a:r>
-            <a:r>
-              <a:rPr/>
+              <a:t>Writing a Custom Hook</a:t>
+            </a:r>
+          </a:p>
+        </p:txBody>
+      </p:sp>
+      <p:sp>
+        <p:nvSpPr>
+          <p:cNvPr id="3" name="Content Placeholder 2"/>
+          <p:cNvSpPr>
+            <a:spLocks noGrp="1"/>
+          </p:cNvSpPr>
+          <p:nvPr>
+            <p:ph idx="1"/>
+          </p:nvPr>
+        </p:nvSpPr>
+        <p:spPr/>
+        <p:txBody>
+          <a:bodyPr>
+            <a:noAutofit/>
+          </a:bodyPr>
+          <a:lstStyle/>
+          <a:p>
+            <a:pPr lvl="0" indent="0">
+              <a:buNone/>
+            </a:pPr>
+            <a:r>
+              <a:rPr sz="2000" dirty="0">
+                <a:solidFill>
+                  <a:srgbClr val="7D9029"/>
+                </a:solidFill>
+                <a:latin typeface="Courier"/>
+              </a:rPr>
+              <a:t>@Component</a:t>
+            </a:r>
+            <a:r>
+              <a:rPr sz="2000" dirty="0">
+                <a:solidFill>
+                  <a:srgbClr val="666666"/>
+                </a:solidFill>
+                <a:latin typeface="Courier"/>
+              </a:rPr>
+              <a:t>(</a:t>
+            </a:r>
+            <a:r>
+              <a:rPr sz="2000" dirty="0">
+                <a:solidFill>
+                  <a:srgbClr val="4070A0"/>
+                </a:solidFill>
+                <a:latin typeface="Courier"/>
+              </a:rPr>
+              <a:t>"</a:t>
+            </a:r>
+            <a:r>
+              <a:rPr sz="2000" dirty="0" err="1">
+                <a:solidFill>
+                  <a:srgbClr val="4070A0"/>
+                </a:solidFill>
+                <a:latin typeface="Courier"/>
+              </a:rPr>
+              <a:t>normalizePhoneNumbersHook</a:t>
+            </a:r>
+            <a:r>
+              <a:rPr sz="2000" dirty="0">
+                <a:solidFill>
+                  <a:srgbClr val="4070A0"/>
+                </a:solidFill>
+                <a:latin typeface="Courier"/>
+              </a:rPr>
+              <a:t>"</a:t>
+            </a:r>
+            <a:r>
+              <a:rPr sz="2000" dirty="0">
+                <a:solidFill>
+                  <a:srgbClr val="666666"/>
+                </a:solidFill>
+                <a:latin typeface="Courier"/>
+              </a:rPr>
+              <a:t>)</a:t>
+            </a:r>
+            <a:br>
+              <a:rPr sz="2000" dirty="0"/>
+            </a:br>
+            <a:r>
+              <a:rPr sz="2000" b="1" dirty="0">
+                <a:solidFill>
+                  <a:srgbClr val="007020"/>
+                </a:solidFill>
+                <a:latin typeface="Courier"/>
+              </a:rPr>
+              <a:t>public</a:t>
+            </a:r>
+            <a:r>
+              <a:rPr sz="2000" dirty="0">
+                <a:latin typeface="Courier"/>
+              </a:rPr>
               <a:t> </a:t>
             </a:r>
             <a:r>
-              <a:rPr/>
-              <a:t>System:</a:t>
-            </a:r>
-            <a:r>
-              <a:rPr/>
+              <a:rPr sz="2000" b="1" dirty="0">
+                <a:solidFill>
+                  <a:srgbClr val="007020"/>
+                </a:solidFill>
+                <a:latin typeface="Courier"/>
+              </a:rPr>
+              <a:t>class</a:t>
+            </a:r>
+            <a:r>
+              <a:rPr sz="2000" dirty="0">
+                <a:latin typeface="Courier"/>
+              </a:rPr>
               <a:t> </a:t>
             </a:r>
             <a:r>
-              <a:rPr/>
-              <a:t>Extensible</a:t>
-            </a:r>
-            <a:r>
-              <a:rPr/>
+              <a:rPr sz="2000" dirty="0" err="1">
+                <a:latin typeface="Courier"/>
+              </a:rPr>
+              <a:t>NormalizePhoneNumbers</a:t>
+            </a:r>
+            <a:r>
+              <a:rPr sz="2000" dirty="0">
+                <a:latin typeface="Courier"/>
+              </a:rPr>
               <a:t> </a:t>
             </a:r>
             <a:r>
-              <a:rPr/>
-              <a:t>Business</a:t>
-            </a:r>
-            <a:r>
-              <a:rPr/>
+              <a:rPr sz="2000" b="1" dirty="0">
+                <a:solidFill>
+                  <a:srgbClr val="007020"/>
+                </a:solidFill>
+                <a:latin typeface="Courier"/>
+              </a:rPr>
+              <a:t>implements</a:t>
+            </a:r>
+            <a:r>
+              <a:rPr sz="2000" dirty="0">
+                <a:latin typeface="Courier"/>
+              </a:rPr>
               <a:t> </a:t>
             </a:r>
             <a:r>
-              <a:rPr/>
-              <a:t>Logic</a:t>
-            </a:r>
-          </a:p>
-        </p:txBody>
-      </p:sp>
-      <p:pic>
-        <p:nvPicPr>
-          <p:cNvPr descr="/tmp/doc-diagrams/TRANSFORMER_PIPELINE_diag5.png" id="0" name="Picture 1"/>
-          <p:cNvPicPr>
-            <a:picLocks noGrp="1" noChangeAspect="1"/>
-          </p:cNvPicPr>
-          <p:nvPr/>
-        </p:nvPicPr>
-        <p:blipFill>
-          <a:blip r:embed="rId2"/>
-          <a:stretch>
-            <a:fillRect/>
-          </a:stretch>
-        </p:blipFill>
-        <p:spPr bwMode="auto">
-          <a:xfrm>
-            <a:off x="3403600" y="1600200"/>
-            <a:ext cx="2349500" cy="4013200"/>
-          </a:xfrm>
-          <a:prstGeom prst="rect">
-            <a:avLst/>
-          </a:prstGeom>
-          <a:noFill/>
-          <a:ln w="9525">
-            <a:noFill/>
-            <a:headEnd/>
-            <a:tailEnd/>
-          </a:ln>
-        </p:spPr>
-      </p:pic>
-      <p:sp>
-        <p:nvSpPr>
-          <p:cNvPr id="1" name="TextBox 3"/>
-          <p:cNvSpPr txBox="1"/>
-          <p:nvPr/>
-        </p:nvSpPr>
-        <p:spPr>
-          <a:xfrm>
-            <a:off x="457200" y="5613400"/>
-            <a:ext cx="8229600" cy="508000"/>
-          </a:xfrm>
-          <a:prstGeom prst="rect">
-            <a:avLst/>
-          </a:prstGeom>
-          <a:noFill/>
-        </p:spPr>
-        <p:txBody>
-          <a:bodyPr/>
-          <a:lstStyle/>
-          <a:p>
-            <a:pPr lvl="0" marL="0" indent="0" algn="ctr">
+              <a:rPr sz="2000" dirty="0" err="1">
+                <a:latin typeface="Courier"/>
+              </a:rPr>
+              <a:t>WriteHook</a:t>
+            </a:r>
+            <a:r>
+              <a:rPr sz="2000" dirty="0">
+                <a:latin typeface="Courier"/>
+              </a:rPr>
+              <a:t> </a:t>
+            </a:r>
+            <a:r>
+              <a:rPr sz="2000" dirty="0">
+                <a:solidFill>
+                  <a:srgbClr val="666666"/>
+                </a:solidFill>
+                <a:latin typeface="Courier"/>
+              </a:rPr>
+              <a:t>{</a:t>
+            </a:r>
+            <a:br>
+              <a:rPr sz="2000" dirty="0"/>
+            </a:br>
+            <a:r>
+              <a:rPr sz="2000" dirty="0">
+                <a:latin typeface="Courier"/>
+              </a:rPr>
+              <a:t>    </a:t>
+            </a:r>
+            <a:r>
+              <a:rPr sz="2000" dirty="0">
+                <a:solidFill>
+                  <a:srgbClr val="7D9029"/>
+                </a:solidFill>
+                <a:latin typeface="Courier"/>
+              </a:rPr>
+              <a:t>@Override</a:t>
+            </a:r>
+            <a:br>
+              <a:rPr sz="2000" dirty="0"/>
+            </a:br>
+            <a:r>
+              <a:rPr sz="2000" dirty="0">
+                <a:latin typeface="Courier"/>
+              </a:rPr>
+              <a:t>    </a:t>
+            </a:r>
+            <a:r>
+              <a:rPr sz="2000" b="1" dirty="0">
+                <a:solidFill>
+                  <a:srgbClr val="007020"/>
+                </a:solidFill>
+                <a:latin typeface="Courier"/>
+              </a:rPr>
+              <a:t>public</a:t>
+            </a:r>
+            <a:r>
+              <a:rPr sz="2000" dirty="0">
+                <a:latin typeface="Courier"/>
+              </a:rPr>
+              <a:t> Map</a:t>
+            </a:r>
+            <a:r>
+              <a:rPr sz="2000" dirty="0">
+                <a:solidFill>
+                  <a:srgbClr val="666666"/>
+                </a:solidFill>
+                <a:latin typeface="Courier"/>
+              </a:rPr>
+              <a:t>&lt;</a:t>
+            </a:r>
+            <a:r>
+              <a:rPr sz="2000" dirty="0">
+                <a:latin typeface="Courier"/>
+              </a:rPr>
+              <a:t>String</a:t>
+            </a:r>
+            <a:r>
+              <a:rPr sz="2000" dirty="0">
+                <a:solidFill>
+                  <a:srgbClr val="666666"/>
+                </a:solidFill>
+                <a:latin typeface="Courier"/>
+              </a:rPr>
+              <a:t>,</a:t>
+            </a:r>
+            <a:r>
+              <a:rPr sz="2000" dirty="0">
+                <a:latin typeface="Courier"/>
+              </a:rPr>
+              <a:t> Object</a:t>
+            </a:r>
+            <a:r>
+              <a:rPr sz="2000" dirty="0">
+                <a:solidFill>
+                  <a:srgbClr val="666666"/>
+                </a:solidFill>
+                <a:latin typeface="Courier"/>
+              </a:rPr>
+              <a:t>&gt;</a:t>
+            </a:r>
+            <a:r>
+              <a:rPr sz="2000" dirty="0">
+                <a:latin typeface="Courier"/>
+              </a:rPr>
+              <a:t> </a:t>
+            </a:r>
+            <a:r>
+              <a:rPr sz="2000" dirty="0">
+                <a:solidFill>
+                  <a:srgbClr val="06287E"/>
+                </a:solidFill>
+                <a:latin typeface="Courier"/>
+              </a:rPr>
+              <a:t>apply</a:t>
+            </a:r>
+            <a:r>
+              <a:rPr sz="2000" dirty="0">
+                <a:solidFill>
+                  <a:srgbClr val="666666"/>
+                </a:solidFill>
+                <a:latin typeface="Courier"/>
+              </a:rPr>
+              <a:t>(</a:t>
+            </a:r>
+            <a:r>
+              <a:rPr sz="2000" dirty="0">
+                <a:latin typeface="Courier"/>
+              </a:rPr>
+              <a:t>Map</a:t>
+            </a:r>
+            <a:r>
+              <a:rPr sz="2000" dirty="0">
+                <a:solidFill>
+                  <a:srgbClr val="666666"/>
+                </a:solidFill>
+                <a:latin typeface="Courier"/>
+              </a:rPr>
+              <a:t>&lt;</a:t>
+            </a:r>
+            <a:r>
+              <a:rPr sz="2000" dirty="0">
+                <a:latin typeface="Courier"/>
+              </a:rPr>
+              <a:t>String</a:t>
+            </a:r>
+            <a:r>
+              <a:rPr sz="2000" dirty="0">
+                <a:solidFill>
+                  <a:srgbClr val="666666"/>
+                </a:solidFill>
+                <a:latin typeface="Courier"/>
+              </a:rPr>
+              <a:t>,</a:t>
+            </a:r>
+            <a:r>
+              <a:rPr sz="2000" dirty="0">
+                <a:latin typeface="Courier"/>
+              </a:rPr>
+              <a:t> Object</a:t>
+            </a:r>
+            <a:r>
+              <a:rPr sz="2000" dirty="0">
+                <a:solidFill>
+                  <a:srgbClr val="666666"/>
+                </a:solidFill>
+                <a:latin typeface="Courier"/>
+              </a:rPr>
+              <a:t>&gt;</a:t>
+            </a:r>
+            <a:r>
+              <a:rPr sz="2000" dirty="0">
+                <a:latin typeface="Courier"/>
+              </a:rPr>
+              <a:t> data</a:t>
+            </a:r>
+            <a:r>
+              <a:rPr sz="2000" dirty="0">
+                <a:solidFill>
+                  <a:srgbClr val="666666"/>
+                </a:solidFill>
+                <a:latin typeface="Courier"/>
+              </a:rPr>
+              <a:t>)</a:t>
+            </a:r>
+            <a:r>
+              <a:rPr sz="2000" dirty="0">
+                <a:latin typeface="Courier"/>
+              </a:rPr>
+              <a:t> </a:t>
+            </a:r>
+            <a:r>
+              <a:rPr sz="2000" dirty="0">
+                <a:solidFill>
+                  <a:srgbClr val="666666"/>
+                </a:solidFill>
+                <a:latin typeface="Courier"/>
+              </a:rPr>
+              <a:t>{</a:t>
+            </a:r>
+            <a:br>
+              <a:rPr sz="2000" dirty="0"/>
+            </a:br>
+            <a:r>
+              <a:rPr sz="2000" dirty="0">
+                <a:latin typeface="Courier"/>
+              </a:rPr>
+              <a:t>        </a:t>
+            </a:r>
+            <a:r>
+              <a:rPr sz="2000" i="1" dirty="0">
+                <a:solidFill>
+                  <a:srgbClr val="60A0B0"/>
+                </a:solidFill>
+                <a:latin typeface="Courier"/>
+              </a:rPr>
+              <a:t>// Normalize phone fields to E.164 format</a:t>
+            </a:r>
+            <a:br>
+              <a:rPr sz="2000" dirty="0"/>
+            </a:br>
+            <a:r>
+              <a:rPr sz="2000" dirty="0">
+                <a:latin typeface="Courier"/>
+              </a:rPr>
+              <a:t>        </a:t>
+            </a:r>
+            <a:r>
+              <a:rPr sz="2000" b="1" dirty="0">
+                <a:solidFill>
+                  <a:srgbClr val="007020"/>
+                </a:solidFill>
+                <a:latin typeface="Courier"/>
+              </a:rPr>
+              <a:t>return</a:t>
+            </a:r>
+            <a:r>
+              <a:rPr sz="2000" dirty="0">
+                <a:latin typeface="Courier"/>
+              </a:rPr>
+              <a:t> data</a:t>
+            </a:r>
+            <a:r>
+              <a:rPr sz="2000" dirty="0">
+                <a:solidFill>
+                  <a:srgbClr val="666666"/>
+                </a:solidFill>
+                <a:latin typeface="Courier"/>
+              </a:rPr>
+              <a:t>;</a:t>
+            </a:r>
+            <a:br>
+              <a:rPr sz="2000" dirty="0"/>
+            </a:br>
+            <a:r>
+              <a:rPr sz="2000" dirty="0">
+                <a:latin typeface="Courier"/>
+              </a:rPr>
+              <a:t>    </a:t>
+            </a:r>
+            <a:r>
+              <a:rPr sz="2000" dirty="0">
+                <a:solidFill>
+                  <a:srgbClr val="666666"/>
+                </a:solidFill>
+                <a:latin typeface="Courier"/>
+              </a:rPr>
+              <a:t>}</a:t>
+            </a:r>
+            <a:br>
+              <a:rPr sz="2000" dirty="0"/>
+            </a:br>
+            <a:r>
+              <a:rPr sz="2000" dirty="0">
+                <a:solidFill>
+                  <a:srgbClr val="666666"/>
+                </a:solidFill>
+                <a:latin typeface="Courier"/>
+              </a:rPr>
+              <a:t>}</a:t>
+            </a:r>
+          </a:p>
+          <a:p>
+            <a:pPr marL="0" lvl="0" indent="0">
               <a:buNone/>
             </a:pPr>
             <a:r>
-              <a:rPr/>
-              <a:t>Hook</a:t>
-            </a:r>
-            <a:r>
-              <a:rPr/>
-              <a:t> </a:t>
-            </a:r>
-            <a:r>
-              <a:rPr/>
-              <a:t>System</a:t>
+              <a:rPr sz="2000" dirty="0"/>
+              <a:t>Reference by name in template JSON — no pipeline code changes needed.</a:t>
             </a:r>
           </a:p>
         </p:txBody>
       </p:sp>
     </p:spTree>
   </p:cSld>
+  <p:clrMapOvr>
+    <a:masterClrMapping/>
+  </p:clrMapOvr>
 </p:sld>
 </file>
 
@@ -5245,36 +5421,11 @@
           <a:bodyPr/>
           <a:lstStyle/>
           <a:p>
-            <a:pPr lvl="0" marL="0" indent="0">
+            <a:pPr marL="0" lvl="0" indent="0">
               <a:buNone/>
             </a:pPr>
             <a:r>
-              <a:rPr/>
-              <a:t>Writing</a:t>
-            </a:r>
-            <a:r>
-              <a:rPr/>
-              <a:t> </a:t>
-            </a:r>
-            <a:r>
-              <a:rPr/>
-              <a:t>a</a:t>
-            </a:r>
-            <a:r>
-              <a:rPr/>
-              <a:t> </a:t>
-            </a:r>
-            <a:r>
-              <a:rPr/>
-              <a:t>Custom</a:t>
-            </a:r>
-            <a:r>
-              <a:rPr/>
-              <a:t> </a:t>
-            </a:r>
-            <a:r>
-              <a:rPr/>
-              <a:t>Hook</a:t>
+              <a:t>API Contract</a:t>
             </a:r>
           </a:p>
         </p:txBody>
@@ -5291,366 +5442,157 @@
         </p:nvSpPr>
         <p:spPr/>
         <p:txBody>
-          <a:bodyPr/>
+          <a:bodyPr>
+            <a:noAutofit/>
+          </a:bodyPr>
           <a:lstStyle/>
           <a:p>
+            <a:pPr marL="0" lvl="0" indent="0">
+              <a:buNone/>
+            </a:pPr>
+            <a:r>
+              <a:rPr sz="2000" b="1" dirty="0"/>
+              <a:t>Write:</a:t>
+            </a:r>
+          </a:p>
+          <a:p>
             <a:pPr lvl="0" indent="0">
               <a:buNone/>
             </a:pPr>
             <a:r>
-              <a:rPr>
-                <a:solidFill>
-                  <a:srgbClr val="7D9029"/>
-                </a:solidFill>
-                <a:latin typeface="Courier"/>
-              </a:rPr>
-              <a:t>@Component</a:t>
-            </a:r>
-            <a:r>
-              <a:rPr>
-                <a:solidFill>
-                  <a:srgbClr val="666666"/>
-                </a:solidFill>
-                <a:latin typeface="Courier"/>
-              </a:rPr>
-              <a:t>(</a:t>
-            </a:r>
-            <a:r>
-              <a:rPr>
-                <a:solidFill>
-                  <a:srgbClr val="4070A0"/>
-                </a:solidFill>
-                <a:latin typeface="Courier"/>
-              </a:rPr>
-              <a:t>"normalizePhoneNumbersHook"</a:t>
-            </a:r>
-            <a:r>
-              <a:rPr>
-                <a:solidFill>
-                  <a:srgbClr val="666666"/>
-                </a:solidFill>
-                <a:latin typeface="Courier"/>
-              </a:rPr>
-              <a:t>)</a:t>
-            </a:r>
-            <a:br/>
-            <a:r>
-              <a:rPr b="1">
-                <a:solidFill>
-                  <a:srgbClr val="007020"/>
-                </a:solidFill>
-                <a:latin typeface="Courier"/>
-              </a:rPr>
-              <a:t>public</a:t>
-            </a:r>
-            <a:r>
-              <a:rPr>
-                <a:latin typeface="Courier"/>
-              </a:rPr>
-              <a:t> </a:t>
-            </a:r>
-            <a:r>
-              <a:rPr b="1">
-                <a:solidFill>
-                  <a:srgbClr val="007020"/>
-                </a:solidFill>
-                <a:latin typeface="Courier"/>
-              </a:rPr>
-              <a:t>class</a:t>
-            </a:r>
-            <a:r>
-              <a:rPr>
-                <a:latin typeface="Courier"/>
-              </a:rPr>
-              <a:t> NormalizePhoneNumbers </a:t>
-            </a:r>
-            <a:r>
-              <a:rPr b="1">
-                <a:solidFill>
-                  <a:srgbClr val="007020"/>
-                </a:solidFill>
-                <a:latin typeface="Courier"/>
-              </a:rPr>
-              <a:t>implements</a:t>
-            </a:r>
-            <a:r>
-              <a:rPr>
-                <a:latin typeface="Courier"/>
-              </a:rPr>
-              <a:t> WriteHook </a:t>
-            </a:r>
-            <a:r>
-              <a:rPr>
-                <a:solidFill>
-                  <a:srgbClr val="666666"/>
-                </a:solidFill>
-                <a:latin typeface="Courier"/>
-              </a:rPr>
-              <a:t>{</a:t>
-            </a:r>
-            <a:br/>
-            <a:r>
-              <a:rPr>
-                <a:latin typeface="Courier"/>
-              </a:rPr>
-              <a:t>    </a:t>
-            </a:r>
-            <a:r>
-              <a:rPr>
-                <a:solidFill>
-                  <a:srgbClr val="7D9029"/>
-                </a:solidFill>
-                <a:latin typeface="Courier"/>
-              </a:rPr>
-              <a:t>@Override</a:t>
-            </a:r>
-            <a:br/>
-            <a:r>
-              <a:rPr>
-                <a:latin typeface="Courier"/>
-              </a:rPr>
-              <a:t>    </a:t>
-            </a:r>
-            <a:r>
-              <a:rPr b="1">
-                <a:solidFill>
-                  <a:srgbClr val="007020"/>
-                </a:solidFill>
-                <a:latin typeface="Courier"/>
-              </a:rPr>
-              <a:t>public</a:t>
-            </a:r>
-            <a:r>
-              <a:rPr>
-                <a:latin typeface="Courier"/>
-              </a:rPr>
-              <a:t> Map</a:t>
-            </a:r>
-            <a:r>
-              <a:rPr>
-                <a:solidFill>
-                  <a:srgbClr val="666666"/>
-                </a:solidFill>
-                <a:latin typeface="Courier"/>
-              </a:rPr>
-              <a:t>&lt;</a:t>
-            </a:r>
-            <a:r>
-              <a:rPr>
-                <a:latin typeface="Courier"/>
-              </a:rPr>
-              <a:t>String</a:t>
-            </a:r>
-            <a:r>
-              <a:rPr>
-                <a:solidFill>
-                  <a:srgbClr val="666666"/>
-                </a:solidFill>
-                <a:latin typeface="Courier"/>
-              </a:rPr>
-              <a:t>,</a:t>
-            </a:r>
-            <a:r>
-              <a:rPr>
-                <a:latin typeface="Courier"/>
-              </a:rPr>
-              <a:t> Object</a:t>
-            </a:r>
-            <a:r>
-              <a:rPr>
-                <a:solidFill>
-                  <a:srgbClr val="666666"/>
-                </a:solidFill>
-                <a:latin typeface="Courier"/>
-              </a:rPr>
-              <a:t>&gt;</a:t>
-            </a:r>
-            <a:r>
-              <a:rPr>
-                <a:latin typeface="Courier"/>
-              </a:rPr>
-              <a:t> </a:t>
-            </a:r>
-            <a:r>
-              <a:rPr>
-                <a:solidFill>
-                  <a:srgbClr val="06287E"/>
-                </a:solidFill>
-                <a:latin typeface="Courier"/>
-              </a:rPr>
-              <a:t>apply</a:t>
-            </a:r>
-            <a:r>
-              <a:rPr>
-                <a:solidFill>
-                  <a:srgbClr val="666666"/>
-                </a:solidFill>
-                <a:latin typeface="Courier"/>
-              </a:rPr>
-              <a:t>(</a:t>
-            </a:r>
-            <a:r>
-              <a:rPr>
-                <a:latin typeface="Courier"/>
-              </a:rPr>
-              <a:t>Map</a:t>
-            </a:r>
-            <a:r>
-              <a:rPr>
-                <a:solidFill>
-                  <a:srgbClr val="666666"/>
-                </a:solidFill>
-                <a:latin typeface="Courier"/>
-              </a:rPr>
-              <a:t>&lt;</a:t>
-            </a:r>
-            <a:r>
-              <a:rPr>
-                <a:latin typeface="Courier"/>
-              </a:rPr>
-              <a:t>String</a:t>
-            </a:r>
-            <a:r>
-              <a:rPr>
-                <a:solidFill>
-                  <a:srgbClr val="666666"/>
-                </a:solidFill>
-                <a:latin typeface="Courier"/>
-              </a:rPr>
-              <a:t>,</a:t>
-            </a:r>
-            <a:r>
-              <a:rPr>
-                <a:latin typeface="Courier"/>
-              </a:rPr>
-              <a:t> Object</a:t>
-            </a:r>
-            <a:r>
-              <a:rPr>
-                <a:solidFill>
-                  <a:srgbClr val="666666"/>
-                </a:solidFill>
-                <a:latin typeface="Courier"/>
-              </a:rPr>
-              <a:t>&gt;</a:t>
-            </a:r>
-            <a:r>
-              <a:rPr>
-                <a:latin typeface="Courier"/>
-              </a:rPr>
-              <a:t> data</a:t>
-            </a:r>
-            <a:r>
-              <a:rPr>
-                <a:solidFill>
-                  <a:srgbClr val="666666"/>
-                </a:solidFill>
-                <a:latin typeface="Courier"/>
-              </a:rPr>
-              <a:t>)</a:t>
-            </a:r>
-            <a:r>
-              <a:rPr>
-                <a:latin typeface="Courier"/>
-              </a:rPr>
-              <a:t> </a:t>
-            </a:r>
-            <a:r>
-              <a:rPr>
-                <a:solidFill>
-                  <a:srgbClr val="666666"/>
-                </a:solidFill>
-                <a:latin typeface="Courier"/>
-              </a:rPr>
-              <a:t>{</a:t>
-            </a:r>
-            <a:br/>
-            <a:r>
-              <a:rPr>
-                <a:latin typeface="Courier"/>
-              </a:rPr>
-              <a:t>        </a:t>
-            </a:r>
-            <a:r>
-              <a:rPr i="1">
-                <a:solidFill>
-                  <a:srgbClr val="60A0B0"/>
-                </a:solidFill>
-                <a:latin typeface="Courier"/>
-              </a:rPr>
-              <a:t>// Normalize phone fields to E.164 format</a:t>
-            </a:r>
-            <a:br/>
-            <a:r>
-              <a:rPr>
-                <a:latin typeface="Courier"/>
-              </a:rPr>
-              <a:t>        </a:t>
-            </a:r>
-            <a:r>
-              <a:rPr b="1">
-                <a:solidFill>
-                  <a:srgbClr val="007020"/>
-                </a:solidFill>
-                <a:latin typeface="Courier"/>
-              </a:rPr>
-              <a:t>return</a:t>
-            </a:r>
-            <a:r>
-              <a:rPr>
-                <a:latin typeface="Courier"/>
-              </a:rPr>
-              <a:t> data</a:t>
-            </a:r>
-            <a:r>
-              <a:rPr>
-                <a:solidFill>
-                  <a:srgbClr val="666666"/>
-                </a:solidFill>
-                <a:latin typeface="Courier"/>
-              </a:rPr>
-              <a:t>;</a:t>
-            </a:r>
-            <a:br/>
-            <a:r>
-              <a:rPr>
-                <a:latin typeface="Courier"/>
-              </a:rPr>
-              <a:t>    </a:t>
-            </a:r>
-            <a:r>
-              <a:rPr>
-                <a:solidFill>
-                  <a:srgbClr val="666666"/>
-                </a:solidFill>
-                <a:latin typeface="Courier"/>
-              </a:rPr>
-              <a:t>}</a:t>
-            </a:r>
-            <a:br/>
-            <a:r>
-              <a:rPr>
-                <a:solidFill>
-                  <a:srgbClr val="666666"/>
-                </a:solidFill>
-                <a:latin typeface="Courier"/>
-              </a:rPr>
-              <a:t>}</a:t>
-            </a:r>
-          </a:p>
-          <a:p>
-            <a:pPr lvl="0" marL="0" indent="0">
+              <a:rPr sz="2000" dirty="0">
+                <a:latin typeface="Courier"/>
+              </a:rPr>
+              <a:t>POST /</a:t>
+            </a:r>
+            <a:r>
+              <a:rPr sz="2000" dirty="0" err="1">
+                <a:latin typeface="Courier"/>
+              </a:rPr>
+              <a:t>api</a:t>
+            </a:r>
+            <a:r>
+              <a:rPr sz="2000" dirty="0">
+                <a:latin typeface="Courier"/>
+              </a:rPr>
+              <a:t>/v1/submissions
+{ "</a:t>
+            </a:r>
+            <a:r>
+              <a:rPr sz="2000" dirty="0" err="1">
+                <a:latin typeface="Courier"/>
+              </a:rPr>
+              <a:t>form_id</a:t>
+            </a:r>
+            <a:r>
+              <a:rPr sz="2000" dirty="0">
+                <a:latin typeface="Courier"/>
+              </a:rPr>
+              <a:t>": "pre-award-overview",
+  "</a:t>
+            </a:r>
+            <a:r>
+              <a:rPr sz="2000" dirty="0" err="1">
+                <a:latin typeface="Courier"/>
+              </a:rPr>
+              <a:t>form_data</a:t>
+            </a:r>
+            <a:r>
+              <a:rPr sz="2000" dirty="0">
+                <a:latin typeface="Courier"/>
+              </a:rPr>
+              <a:t>": { "</a:t>
+            </a:r>
+            <a:r>
+              <a:rPr sz="2000" dirty="0" err="1">
+                <a:latin typeface="Courier"/>
+              </a:rPr>
+              <a:t>pi_budget</a:t>
+            </a:r>
+            <a:r>
+              <a:rPr sz="2000" dirty="0">
+                <a:latin typeface="Courier"/>
+              </a:rPr>
+              <a:t>": 1448199, ... } }
+→ 201 { "</a:t>
+            </a:r>
+            <a:r>
+              <a:rPr sz="2000" dirty="0" err="1">
+                <a:latin typeface="Courier"/>
+              </a:rPr>
+              <a:t>submission_id</a:t>
+            </a:r>
+            <a:r>
+              <a:rPr sz="2000" dirty="0">
+                <a:latin typeface="Courier"/>
+              </a:rPr>
+              <a:t>": 1, "version": 1 }</a:t>
+            </a:r>
+          </a:p>
+          <a:p>
+            <a:pPr marL="0" lvl="0" indent="0">
               <a:buNone/>
             </a:pPr>
             <a:r>
-              <a:rPr/>
-              <a:t>Reference by name in template JSON — no pipeline code changes needed.</a:t>
+              <a:rPr sz="2000" b="1" dirty="0"/>
+              <a:t>Read:</a:t>
+            </a:r>
+          </a:p>
+          <a:p>
+            <a:pPr lvl="0" indent="0">
+              <a:buNone/>
+            </a:pPr>
+            <a:r>
+              <a:rPr sz="2000" dirty="0">
+                <a:latin typeface="Courier"/>
+              </a:rPr>
+              <a:t>GET /</a:t>
+            </a:r>
+            <a:r>
+              <a:rPr sz="2000" dirty="0" err="1">
+                <a:latin typeface="Courier"/>
+              </a:rPr>
+              <a:t>api</a:t>
+            </a:r>
+            <a:r>
+              <a:rPr sz="2000" dirty="0">
+                <a:latin typeface="Courier"/>
+              </a:rPr>
+              <a:t>/v1/submissions/1?form_id=pre-award-overview
+→ 200 { "</a:t>
+            </a:r>
+            <a:r>
+              <a:rPr sz="2000" dirty="0" err="1">
+                <a:latin typeface="Courier"/>
+              </a:rPr>
+              <a:t>submission_id</a:t>
+            </a:r>
+            <a:r>
+              <a:rPr sz="2000" dirty="0">
+                <a:latin typeface="Courier"/>
+              </a:rPr>
+              <a:t>": 1, "</a:t>
+            </a:r>
+            <a:r>
+              <a:rPr sz="2000" dirty="0" err="1">
+                <a:latin typeface="Courier"/>
+              </a:rPr>
+              <a:t>form_data</a:t>
+            </a:r>
+            <a:r>
+              <a:rPr sz="2000" dirty="0">
+                <a:latin typeface="Courier"/>
+              </a:rPr>
+              <a:t>": { ... } }</a:t>
             </a:r>
           </a:p>
         </p:txBody>
       </p:sp>
     </p:spTree>
   </p:cSld>
+  <p:clrMapOvr>
+    <a:masterClrMapping/>
+  </p:clrMapOvr>
 </p:sld>
 </file>
 
@@ -5686,86 +5628,379 @@
           <a:bodyPr/>
           <a:lstStyle/>
           <a:p>
-            <a:pPr lvl="0" marL="0" indent="0">
+            <a:pPr marL="0" lvl="0" indent="0">
               <a:buNone/>
             </a:pPr>
             <a:r>
-              <a:rPr/>
-              <a:t>API</a:t>
-            </a:r>
-            <a:r>
-              <a:rPr/>
-              <a:t> </a:t>
-            </a:r>
-            <a:r>
-              <a:rPr/>
-              <a:t>Contract</a:t>
-            </a:r>
-          </a:p>
-        </p:txBody>
-      </p:sp>
-      <p:sp>
-        <p:nvSpPr>
-          <p:cNvPr id="3" name="Content Placeholder 2"/>
-          <p:cNvSpPr>
-            <a:spLocks noGrp="1"/>
-          </p:cNvSpPr>
+              <a:t>Error Handling</a:t>
+            </a:r>
+          </a:p>
+        </p:txBody>
+      </p:sp>
+      <p:graphicFrame>
+        <p:nvGraphicFramePr>
+          <p:cNvPr id="6" name="Content Placeholder 5"/>
+          <p:cNvGraphicFramePr>
+            <a:graphicFrameLocks noGrp="1"/>
+          </p:cNvGraphicFramePr>
           <p:nvPr>
             <p:ph idx="1"/>
           </p:nvPr>
-        </p:nvSpPr>
-        <p:spPr/>
-        <p:txBody>
-          <a:bodyPr/>
-          <a:lstStyle/>
-          <a:p>
-            <a:pPr lvl="0" marL="0" indent="0">
-              <a:buNone/>
-            </a:pPr>
-            <a:r>
-              <a:rPr b="1"/>
-              <a:t>Write:</a:t>
-            </a:r>
-          </a:p>
-          <a:p>
-            <a:pPr lvl="0" indent="0">
-              <a:buNone/>
-            </a:pPr>
-            <a:r>
-              <a:rPr>
-                <a:latin typeface="Courier"/>
-              </a:rPr>
-              <a:t>POST /api/v1/submissions
-{ "form_id": "pre-award-overview",
-  "form_data": { "pi_budget": 1448199, ... } }
-→ 201 { "submission_id": 1, "version": 1 }</a:t>
-            </a:r>
-          </a:p>
-          <a:p>
-            <a:pPr lvl="0" marL="0" indent="0">
-              <a:buNone/>
-            </a:pPr>
-            <a:r>
-              <a:rPr b="1"/>
-              <a:t>Read:</a:t>
-            </a:r>
-          </a:p>
-          <a:p>
-            <a:pPr lvl="0" indent="0">
-              <a:buNone/>
-            </a:pPr>
-            <a:r>
-              <a:rPr>
-                <a:latin typeface="Courier"/>
-              </a:rPr>
-              <a:t>GET /api/v1/submissions/1?form_id=pre-award-overview
-→ 200 { "submission_id": 1, "form_data": { ... } }</a:t>
-            </a:r>
-          </a:p>
-        </p:txBody>
-      </p:sp>
+        </p:nvGraphicFramePr>
+        <p:xfrm>
+          <a:off x="457200" y="1600200"/>
+          <a:ext cx="8229600" cy="2194560"/>
+        </p:xfrm>
+        <a:graphic>
+          <a:graphicData uri="http://schemas.openxmlformats.org/drawingml/2006/table">
+            <a:tbl>
+              <a:tblPr firstRow="1" bandRow="1">
+                <a:tableStyleId>{5C22544A-7EE6-4342-B048-85BDC9FD1C3A}</a:tableStyleId>
+              </a:tblPr>
+              <a:tblGrid>
+                <a:gridCol w="2743200">
+                  <a:extLst>
+                    <a:ext uri="{9D8B030D-6E8A-4147-A177-3AD203B41FA5}">
+                      <a16:colId xmlns:a16="http://schemas.microsoft.com/office/drawing/2014/main" val="20000"/>
+                    </a:ext>
+                  </a:extLst>
+                </a:gridCol>
+                <a:gridCol w="2743200">
+                  <a:extLst>
+                    <a:ext uri="{9D8B030D-6E8A-4147-A177-3AD203B41FA5}">
+                      <a16:colId xmlns:a16="http://schemas.microsoft.com/office/drawing/2014/main" val="20001"/>
+                    </a:ext>
+                  </a:extLst>
+                </a:gridCol>
+                <a:gridCol w="2743200">
+                  <a:extLst>
+                    <a:ext uri="{9D8B030D-6E8A-4147-A177-3AD203B41FA5}">
+                      <a16:colId xmlns:a16="http://schemas.microsoft.com/office/drawing/2014/main" val="20002"/>
+                    </a:ext>
+                  </a:extLst>
+                </a:gridCol>
+              </a:tblGrid>
+              <a:tr h="0">
+                <a:tc>
+                  <a:txBody>
+                    <a:bodyPr/>
+                    <a:lstStyle/>
+                    <a:p>
+                      <a:pPr marL="0" lvl="0" indent="0">
+                        <a:buNone/>
+                      </a:pPr>
+                      <a:r>
+                        <a:t>HTTP</a:t>
+                      </a:r>
+                    </a:p>
+                  </a:txBody>
+                  <a:tcPr/>
+                </a:tc>
+                <a:tc>
+                  <a:txBody>
+                    <a:bodyPr/>
+                    <a:lstStyle/>
+                    <a:p>
+                      <a:pPr marL="0" lvl="0" indent="0">
+                        <a:buNone/>
+                      </a:pPr>
+                      <a:r>
+                        <a:t>Error Code</a:t>
+                      </a:r>
+                    </a:p>
+                  </a:txBody>
+                  <a:tcPr/>
+                </a:tc>
+                <a:tc>
+                  <a:txBody>
+                    <a:bodyPr/>
+                    <a:lstStyle/>
+                    <a:p>
+                      <a:pPr marL="0" lvl="0" indent="0">
+                        <a:buNone/>
+                      </a:pPr>
+                      <a:r>
+                        <a:t>Condition</a:t>
+                      </a:r>
+                    </a:p>
+                  </a:txBody>
+                  <a:tcPr/>
+                </a:tc>
+                <a:extLst>
+                  <a:ext uri="{0D108BD9-81ED-4DB2-BD59-A6C34878D82A}">
+                    <a16:rowId xmlns:a16="http://schemas.microsoft.com/office/drawing/2014/main" val="10000"/>
+                  </a:ext>
+                </a:extLst>
+              </a:tr>
+              <a:tr h="0">
+                <a:tc>
+                  <a:txBody>
+                    <a:bodyPr/>
+                    <a:lstStyle/>
+                    <a:p>
+                      <a:pPr marL="0" lvl="0" indent="0">
+                        <a:buNone/>
+                      </a:pPr>
+                      <a:r>
+                        <a:t>400</a:t>
+                      </a:r>
+                    </a:p>
+                  </a:txBody>
+                  <a:tcPr/>
+                </a:tc>
+                <a:tc>
+                  <a:txBody>
+                    <a:bodyPr/>
+                    <a:lstStyle/>
+                    <a:p>
+                      <a:pPr marL="0" lvl="0" indent="0">
+                        <a:buNone/>
+                      </a:pPr>
+                      <a:r>
+                        <a:t>TEMPLATE_NOT_FOUND</a:t>
+                      </a:r>
+                    </a:p>
+                  </a:txBody>
+                  <a:tcPr/>
+                </a:tc>
+                <a:tc>
+                  <a:txBody>
+                    <a:bodyPr/>
+                    <a:lstStyle/>
+                    <a:p>
+                      <a:pPr marL="0" lvl="0" indent="0">
+                        <a:buNone/>
+                      </a:pPr>
+                      <a:r>
+                        <a:t>No template for formId</a:t>
+                      </a:r>
+                    </a:p>
+                  </a:txBody>
+                  <a:tcPr/>
+                </a:tc>
+                <a:extLst>
+                  <a:ext uri="{0D108BD9-81ED-4DB2-BD59-A6C34878D82A}">
+                    <a16:rowId xmlns:a16="http://schemas.microsoft.com/office/drawing/2014/main" val="10001"/>
+                  </a:ext>
+                </a:extLst>
+              </a:tr>
+              <a:tr h="0">
+                <a:tc>
+                  <a:txBody>
+                    <a:bodyPr/>
+                    <a:lstStyle/>
+                    <a:p>
+                      <a:pPr marL="0" lvl="0" indent="0">
+                        <a:buNone/>
+                      </a:pPr>
+                      <a:r>
+                        <a:t>400</a:t>
+                      </a:r>
+                    </a:p>
+                  </a:txBody>
+                  <a:tcPr/>
+                </a:tc>
+                <a:tc>
+                  <a:txBody>
+                    <a:bodyPr/>
+                    <a:lstStyle/>
+                    <a:p>
+                      <a:pPr marL="0" lvl="0" indent="0">
+                        <a:buNone/>
+                      </a:pPr>
+                      <a:r>
+                        <a:t>VALIDATION_FAILED</a:t>
+                      </a:r>
+                    </a:p>
+                  </a:txBody>
+                  <a:tcPr/>
+                </a:tc>
+                <a:tc>
+                  <a:txBody>
+                    <a:bodyPr/>
+                    <a:lstStyle/>
+                    <a:p>
+                      <a:pPr marL="0" lvl="0" indent="0">
+                        <a:buNone/>
+                      </a:pPr>
+                      <a:r>
+                        <a:t>Field constraint violations</a:t>
+                      </a:r>
+                    </a:p>
+                  </a:txBody>
+                  <a:tcPr/>
+                </a:tc>
+                <a:extLst>
+                  <a:ext uri="{0D108BD9-81ED-4DB2-BD59-A6C34878D82A}">
+                    <a16:rowId xmlns:a16="http://schemas.microsoft.com/office/drawing/2014/main" val="10002"/>
+                  </a:ext>
+                </a:extLst>
+              </a:tr>
+              <a:tr h="0">
+                <a:tc>
+                  <a:txBody>
+                    <a:bodyPr/>
+                    <a:lstStyle/>
+                    <a:p>
+                      <a:pPr marL="0" lvl="0" indent="0">
+                        <a:buNone/>
+                      </a:pPr>
+                      <a:r>
+                        <a:t>400</a:t>
+                      </a:r>
+                    </a:p>
+                  </a:txBody>
+                  <a:tcPr/>
+                </a:tc>
+                <a:tc>
+                  <a:txBody>
+                    <a:bodyPr/>
+                    <a:lstStyle/>
+                    <a:p>
+                      <a:pPr marL="0" lvl="0" indent="0">
+                        <a:buNone/>
+                      </a:pPr>
+                      <a:r>
+                        <a:t>VERSION_MISMATCH</a:t>
+                      </a:r>
+                    </a:p>
+                  </a:txBody>
+                  <a:tcPr/>
+                </a:tc>
+                <a:tc>
+                  <a:txBody>
+                    <a:bodyPr/>
+                    <a:lstStyle/>
+                    <a:p>
+                      <a:pPr marL="0" lvl="0" indent="0">
+                        <a:buNone/>
+                      </a:pPr>
+                      <a:r>
+                        <a:t>Version exceeds template</a:t>
+                      </a:r>
+                    </a:p>
+                  </a:txBody>
+                  <a:tcPr/>
+                </a:tc>
+                <a:extLst>
+                  <a:ext uri="{0D108BD9-81ED-4DB2-BD59-A6C34878D82A}">
+                    <a16:rowId xmlns:a16="http://schemas.microsoft.com/office/drawing/2014/main" val="10003"/>
+                  </a:ext>
+                </a:extLst>
+              </a:tr>
+              <a:tr h="0">
+                <a:tc>
+                  <a:txBody>
+                    <a:bodyPr/>
+                    <a:lstStyle/>
+                    <a:p>
+                      <a:pPr marL="0" lvl="0" indent="0">
+                        <a:buNone/>
+                      </a:pPr>
+                      <a:r>
+                        <a:t>404</a:t>
+                      </a:r>
+                    </a:p>
+                  </a:txBody>
+                  <a:tcPr/>
+                </a:tc>
+                <a:tc>
+                  <a:txBody>
+                    <a:bodyPr/>
+                    <a:lstStyle/>
+                    <a:p>
+                      <a:pPr marL="0" lvl="0" indent="0">
+                        <a:buNone/>
+                      </a:pPr>
+                      <a:r>
+                        <a:t>SUBMISSION_NOT_FOUND</a:t>
+                      </a:r>
+                    </a:p>
+                  </a:txBody>
+                  <a:tcPr/>
+                </a:tc>
+                <a:tc>
+                  <a:txBody>
+                    <a:bodyPr/>
+                    <a:lstStyle/>
+                    <a:p>
+                      <a:pPr marL="0" lvl="0" indent="0">
+                        <a:buNone/>
+                      </a:pPr>
+                      <a:r>
+                        <a:t>No row for submissionId</a:t>
+                      </a:r>
+                    </a:p>
+                  </a:txBody>
+                  <a:tcPr/>
+                </a:tc>
+                <a:extLst>
+                  <a:ext uri="{0D108BD9-81ED-4DB2-BD59-A6C34878D82A}">
+                    <a16:rowId xmlns:a16="http://schemas.microsoft.com/office/drawing/2014/main" val="10004"/>
+                  </a:ext>
+                </a:extLst>
+              </a:tr>
+              <a:tr h="0">
+                <a:tc>
+                  <a:txBody>
+                    <a:bodyPr/>
+                    <a:lstStyle/>
+                    <a:p>
+                      <a:pPr marL="0" lvl="0" indent="0">
+                        <a:buNone/>
+                      </a:pPr>
+                      <a:r>
+                        <a:t>409</a:t>
+                      </a:r>
+                    </a:p>
+                  </a:txBody>
+                  <a:tcPr/>
+                </a:tc>
+                <a:tc>
+                  <a:txBody>
+                    <a:bodyPr/>
+                    <a:lstStyle/>
+                    <a:p>
+                      <a:pPr marL="0" lvl="0" indent="0">
+                        <a:buNone/>
+                      </a:pPr>
+                      <a:r>
+                        <a:t>DUPLICATE_SUBMISSION</a:t>
+                      </a:r>
+                    </a:p>
+                  </a:txBody>
+                  <a:tcPr/>
+                </a:tc>
+                <a:tc>
+                  <a:txBody>
+                    <a:bodyPr/>
+                    <a:lstStyle/>
+                    <a:p>
+                      <a:pPr marL="0" lvl="0" indent="0">
+                        <a:buNone/>
+                      </a:pPr>
+                      <a:r>
+                        <a:t>Unique constraint violation</a:t>
+                      </a:r>
+                    </a:p>
+                  </a:txBody>
+                  <a:tcPr/>
+                </a:tc>
+                <a:extLst>
+                  <a:ext uri="{0D108BD9-81ED-4DB2-BD59-A6C34878D82A}">
+                    <a16:rowId xmlns:a16="http://schemas.microsoft.com/office/drawing/2014/main" val="10005"/>
+                  </a:ext>
+                </a:extLst>
+              </a:tr>
+            </a:tbl>
+          </a:graphicData>
+        </a:graphic>
+      </p:graphicFrame>
     </p:spTree>
   </p:cSld>
+  <p:clrMapOvr>
+    <a:masterClrMapping/>
+  </p:clrMapOvr>
 </p:sld>
 </file>
 
@@ -5801,28 +6036,11 @@
           <a:bodyPr/>
           <a:lstStyle/>
           <a:p>
-            <a:pPr lvl="0" marL="0" indent="0">
+            <a:pPr marL="0" lvl="0" indent="0">
               <a:buNone/>
             </a:pPr>
             <a:r>
-              <a:rPr/>
-              <a:t>The</a:t>
-            </a:r>
-            <a:r>
-              <a:rPr/>
-              <a:t> </a:t>
-            </a:r>
-            <a:r>
-              <a:rPr/>
-              <a:t>Business</a:t>
-            </a:r>
-            <a:r>
-              <a:rPr/>
-              <a:t> </a:t>
-            </a:r>
-            <a:r>
-              <a:rPr/>
-              <a:t>Problem</a:t>
+              <a:t>The Business Problem</a:t>
             </a:r>
           </a:p>
         </p:txBody>
@@ -5844,7 +6062,6 @@
           <a:p>
             <a:pPr lvl="1"/>
             <a:r>
-              <a:rPr/>
               <a:t>Form data collected as flexible </a:t>
             </a:r>
             <a:r>
@@ -5852,21 +6069,18 @@
               <a:t>JSON documents</a:t>
             </a:r>
             <a:r>
-              <a:rPr/>
               <a:t> from web forms</a:t>
             </a:r>
           </a:p>
           <a:p>
             <a:pPr lvl="1"/>
             <a:r>
-              <a:rPr/>
               <a:t>JSON storage creates challenges:</a:t>
             </a:r>
           </a:p>
           <a:p>
             <a:pPr lvl="2"/>
             <a:r>
-              <a:rPr/>
               <a:t>Reporting tools </a:t>
             </a:r>
             <a:r>
@@ -5874,14 +6088,12 @@
               <a:t>cannot query</a:t>
             </a:r>
             <a:r>
-              <a:rPr/>
               <a:t> individual fields</a:t>
             </a:r>
           </a:p>
           <a:p>
             <a:pPr lvl="2"/>
             <a:r>
-              <a:rPr/>
               <a:t>Compliance audits require </a:t>
             </a:r>
             <a:r>
@@ -5892,7 +6104,6 @@
           <a:p>
             <a:pPr lvl="2"/>
             <a:r>
-              <a:rPr/>
               <a:t>Cross-form analytics impractical with opaque JSON blobs</a:t>
             </a:r>
           </a:p>
@@ -5900,6 +6111,9 @@
       </p:sp>
     </p:spTree>
   </p:cSld>
+  <p:clrMapOvr>
+    <a:masterClrMapping/>
+  </p:clrMapOvr>
 </p:sld>
 </file>
 
@@ -5935,20 +6149,11 @@
           <a:bodyPr/>
           <a:lstStyle/>
           <a:p>
-            <a:pPr lvl="0" marL="0" indent="0">
+            <a:pPr marL="0" lvl="0" indent="0">
               <a:buNone/>
             </a:pPr>
             <a:r>
-              <a:rPr/>
-              <a:t>Error</a:t>
-            </a:r>
-            <a:r>
-              <a:rPr/>
-              <a:t> </a:t>
-            </a:r>
-            <a:r>
-              <a:rPr/>
-              <a:t>Handling</a:t>
+              <a:t>Safety Guarantees</a:t>
             </a:r>
           </a:p>
         </p:txBody>
@@ -5974,9 +6179,20 @@
                 <a:tableStyleId>{5C22544A-7EE6-4342-B048-85BDC9FD1C3A}</a:tableStyleId>
               </a:tblPr>
               <a:tblGrid>
-                <a:gridCol w="2743200"/>
-                <a:gridCol w="2743200"/>
-                <a:gridCol w="2743200"/>
+                <a:gridCol w="4114800">
+                  <a:extLst>
+                    <a:ext uri="{9D8B030D-6E8A-4147-A177-3AD203B41FA5}">
+                      <a16:colId xmlns:a16="http://schemas.microsoft.com/office/drawing/2014/main" val="20000"/>
+                    </a:ext>
+                  </a:extLst>
+                </a:gridCol>
+                <a:gridCol w="4114800">
+                  <a:extLst>
+                    <a:ext uri="{9D8B030D-6E8A-4147-A177-3AD203B41FA5}">
+                      <a16:colId xmlns:a16="http://schemas.microsoft.com/office/drawing/2014/main" val="20001"/>
+                    </a:ext>
+                  </a:extLst>
+                </a:gridCol>
               </a:tblGrid>
               <a:tr h="0">
                 <a:tc>
@@ -5984,12 +6200,11 @@
                     <a:bodyPr/>
                     <a:lstStyle/>
                     <a:p>
-                      <a:pPr lvl="0" marL="0" indent="0">
+                      <a:pPr marL="0" lvl="0" indent="0">
                         <a:buNone/>
                       </a:pPr>
                       <a:r>
-                        <a:rPr/>
-                        <a:t>HTTP</a:t>
+                        <a:t>Guarantee</a:t>
                       </a:r>
                     </a:p>
                   </a:txBody>
@@ -6000,20 +6215,34 @@
                     <a:bodyPr/>
                     <a:lstStyle/>
                     <a:p>
-                      <a:pPr lvl="0" marL="0" indent="0">
+                      <a:pPr marL="0" lvl="0" indent="0">
                         <a:buNone/>
                       </a:pPr>
                       <a:r>
-                        <a:rPr/>
-                        <a:t>Error</a:t>
+                        <a:t>Implementation</a:t>
                       </a:r>
+                    </a:p>
+                  </a:txBody>
+                  <a:tcPr/>
+                </a:tc>
+                <a:extLst>
+                  <a:ext uri="{0D108BD9-81ED-4DB2-BD59-A6C34878D82A}">
+                    <a16:rowId xmlns:a16="http://schemas.microsoft.com/office/drawing/2014/main" val="10000"/>
+                  </a:ext>
+                </a:extLst>
+              </a:tr>
+              <a:tr h="0">
+                <a:tc>
+                  <a:txBody>
+                    <a:bodyPr/>
+                    <a:lstStyle/>
+                    <a:p>
+                      <a:pPr marL="0" lvl="0" indent="0">
+                        <a:buNone/>
+                      </a:pPr>
                       <a:r>
-                        <a:rPr/>
-                        <a:t> </a:t>
-                      </a:r>
-                      <a:r>
-                        <a:rPr/>
-                        <a:t>Code</a:t>
+                        <a:rPr b="1"/>
+                        <a:t>Atomic writes</a:t>
                       </a:r>
                     </a:p>
                   </a:txBody>
@@ -6024,17 +6253,21 @@
                     <a:bodyPr/>
                     <a:lstStyle/>
                     <a:p>
-                      <a:pPr lvl="0" marL="0" indent="0">
+                      <a:pPr marL="0" lvl="0" indent="0">
                         <a:buNone/>
                       </a:pPr>
                       <a:r>
-                        <a:rPr/>
-                        <a:t>Condition</a:t>
+                        <a:t>@Transactional with REPEATABLE_READ</a:t>
                       </a:r>
                     </a:p>
                   </a:txBody>
                   <a:tcPr/>
                 </a:tc>
+                <a:extLst>
+                  <a:ext uri="{0D108BD9-81ED-4DB2-BD59-A6C34878D82A}">
+                    <a16:rowId xmlns:a16="http://schemas.microsoft.com/office/drawing/2014/main" val="10001"/>
+                  </a:ext>
+                </a:extLst>
               </a:tr>
               <a:tr h="0">
                 <a:tc>
@@ -6042,70 +6275,37 @@
                     <a:bodyPr/>
                     <a:lstStyle/>
                     <a:p>
-                      <a:pPr lvl="0" marL="0" indent="0">
+                      <a:pPr marL="0" lvl="0" indent="0">
                         <a:buNone/>
                       </a:pPr>
                       <a:r>
-                        <a:rPr/>
-                        <a:t>400</a:t>
+                        <a:rPr b="1"/>
+                        <a:t>Rollback on error</a:t>
                       </a:r>
                     </a:p>
                   </a:txBody>
+                  <a:tcPr/>
                 </a:tc>
                 <a:tc>
                   <a:txBody>
                     <a:bodyPr/>
                     <a:lstStyle/>
                     <a:p>
-                      <a:pPr lvl="0" marL="0" indent="0">
+                      <a:pPr marL="0" lvl="0" indent="0">
                         <a:buNone/>
                       </a:pPr>
                       <a:r>
-                        <a:rPr/>
-                        <a:t>TEMPLATE_NOT_FOUND</a:t>
+                        <a:t>DataAccessException triggers rollback</a:t>
                       </a:r>
                     </a:p>
                   </a:txBody>
+                  <a:tcPr/>
                 </a:tc>
-                <a:tc>
-                  <a:txBody>
-                    <a:bodyPr/>
-                    <a:lstStyle/>
-                    <a:p>
-                      <a:pPr lvl="0" marL="0" indent="0">
-                        <a:buNone/>
-                      </a:pPr>
-                      <a:r>
-                        <a:rPr/>
-                        <a:t>No</a:t>
-                      </a:r>
-                      <a:r>
-                        <a:rPr/>
-                        <a:t> </a:t>
-                      </a:r>
-                      <a:r>
-                        <a:rPr/>
-                        <a:t>template</a:t>
-                      </a:r>
-                      <a:r>
-                        <a:rPr/>
-                        <a:t> </a:t>
-                      </a:r>
-                      <a:r>
-                        <a:rPr/>
-                        <a:t>for</a:t>
-                      </a:r>
-                      <a:r>
-                        <a:rPr/>
-                        <a:t> </a:t>
-                      </a:r>
-                      <a:r>
-                        <a:rPr/>
-                        <a:t>formId</a:t>
-                      </a:r>
-                    </a:p>
-                  </a:txBody>
-                </a:tc>
+                <a:extLst>
+                  <a:ext uri="{0D108BD9-81ED-4DB2-BD59-A6C34878D82A}">
+                    <a16:rowId xmlns:a16="http://schemas.microsoft.com/office/drawing/2014/main" val="10002"/>
+                  </a:ext>
+                </a:extLst>
               </a:tr>
               <a:tr h="0">
                 <a:tc>
@@ -6113,62 +6313,37 @@
                     <a:bodyPr/>
                     <a:lstStyle/>
                     <a:p>
-                      <a:pPr lvl="0" marL="0" indent="0">
+                      <a:pPr marL="0" lvl="0" indent="0">
                         <a:buNone/>
                       </a:pPr>
                       <a:r>
-                        <a:rPr/>
-                        <a:t>400</a:t>
+                        <a:rPr b="1"/>
+                        <a:t>SQL injection prevention</a:t>
                       </a:r>
                     </a:p>
                   </a:txBody>
+                  <a:tcPr/>
                 </a:tc>
                 <a:tc>
                   <a:txBody>
                     <a:bodyPr/>
                     <a:lstStyle/>
                     <a:p>
-                      <a:pPr lvl="0" marL="0" indent="0">
+                      <a:pPr marL="0" lvl="0" indent="0">
                         <a:buNone/>
                       </a:pPr>
                       <a:r>
-                        <a:rPr/>
-                        <a:t>VALIDATION_FAILED</a:t>
+                        <a:t>IdentifierValidator + named parameters</a:t>
                       </a:r>
                     </a:p>
                   </a:txBody>
+                  <a:tcPr/>
                 </a:tc>
-                <a:tc>
-                  <a:txBody>
-                    <a:bodyPr/>
-                    <a:lstStyle/>
-                    <a:p>
-                      <a:pPr lvl="0" marL="0" indent="0">
-                        <a:buNone/>
-                      </a:pPr>
-                      <a:r>
-                        <a:rPr/>
-                        <a:t>Field</a:t>
-                      </a:r>
-                      <a:r>
-                        <a:rPr/>
-                        <a:t> </a:t>
-                      </a:r>
-                      <a:r>
-                        <a:rPr/>
-                        <a:t>constraint</a:t>
-                      </a:r>
-                      <a:r>
-                        <a:rPr/>
-                        <a:t> </a:t>
-                      </a:r>
-                      <a:r>
-                        <a:rPr/>
-                        <a:t>violations</a:t>
-                      </a:r>
-                    </a:p>
-                  </a:txBody>
-                </a:tc>
+                <a:extLst>
+                  <a:ext uri="{0D108BD9-81ED-4DB2-BD59-A6C34878D82A}">
+                    <a16:rowId xmlns:a16="http://schemas.microsoft.com/office/drawing/2014/main" val="10003"/>
+                  </a:ext>
+                </a:extLst>
               </a:tr>
               <a:tr h="0">
                 <a:tc>
@@ -6176,62 +6351,37 @@
                     <a:bodyPr/>
                     <a:lstStyle/>
                     <a:p>
-                      <a:pPr lvl="0" marL="0" indent="0">
+                      <a:pPr marL="0" lvl="0" indent="0">
                         <a:buNone/>
                       </a:pPr>
                       <a:r>
-                        <a:rPr/>
-                        <a:t>400</a:t>
+                        <a:rPr b="1"/>
+                        <a:t>Additive-only DDL</a:t>
                       </a:r>
                     </a:p>
                   </a:txBody>
+                  <a:tcPr/>
                 </a:tc>
                 <a:tc>
                   <a:txBody>
                     <a:bodyPr/>
                     <a:lstStyle/>
                     <a:p>
-                      <a:pPr lvl="0" marL="0" indent="0">
+                      <a:pPr marL="0" lvl="0" indent="0">
                         <a:buNone/>
                       </a:pPr>
                       <a:r>
-                        <a:rPr/>
-                        <a:t>VERSION_MISMATCH</a:t>
+                        <a:t>Never drop columns or tables</a:t>
                       </a:r>
                     </a:p>
                   </a:txBody>
+                  <a:tcPr/>
                 </a:tc>
-                <a:tc>
-                  <a:txBody>
-                    <a:bodyPr/>
-                    <a:lstStyle/>
-                    <a:p>
-                      <a:pPr lvl="0" marL="0" indent="0">
-                        <a:buNone/>
-                      </a:pPr>
-                      <a:r>
-                        <a:rPr/>
-                        <a:t>Version</a:t>
-                      </a:r>
-                      <a:r>
-                        <a:rPr/>
-                        <a:t> </a:t>
-                      </a:r>
-                      <a:r>
-                        <a:rPr/>
-                        <a:t>exceeds</a:t>
-                      </a:r>
-                      <a:r>
-                        <a:rPr/>
-                        <a:t> </a:t>
-                      </a:r>
-                      <a:r>
-                        <a:rPr/>
-                        <a:t>template</a:t>
-                      </a:r>
-                    </a:p>
-                  </a:txBody>
-                </a:tc>
+                <a:extLst>
+                  <a:ext uri="{0D108BD9-81ED-4DB2-BD59-A6C34878D82A}">
+                    <a16:rowId xmlns:a16="http://schemas.microsoft.com/office/drawing/2014/main" val="10004"/>
+                  </a:ext>
+                </a:extLst>
               </a:tr>
               <a:tr h="0">
                 <a:tc>
@@ -6239,133 +6389,37 @@
                     <a:bodyPr/>
                     <a:lstStyle/>
                     <a:p>
-                      <a:pPr lvl="0" marL="0" indent="0">
+                      <a:pPr marL="0" lvl="0" indent="0">
                         <a:buNone/>
                       </a:pPr>
                       <a:r>
-                        <a:rPr/>
-                        <a:t>404</a:t>
+                        <a:rPr b="1"/>
+                        <a:t>Post-insert isolation</a:t>
                       </a:r>
                     </a:p>
                   </a:txBody>
+                  <a:tcPr/>
                 </a:tc>
                 <a:tc>
                   <a:txBody>
                     <a:bodyPr/>
                     <a:lstStyle/>
                     <a:p>
-                      <a:pPr lvl="0" marL="0" indent="0">
+                      <a:pPr marL="0" lvl="0" indent="0">
                         <a:buNone/>
                       </a:pPr>
                       <a:r>
-                        <a:rPr/>
-                        <a:t>SUBMISSION_NOT_FOUND</a:t>
+                        <a:t>Hook failures don’t rollback data</a:t>
                       </a:r>
                     </a:p>
                   </a:txBody>
+                  <a:tcPr/>
                 </a:tc>
-                <a:tc>
-                  <a:txBody>
-                    <a:bodyPr/>
-                    <a:lstStyle/>
-                    <a:p>
-                      <a:pPr lvl="0" marL="0" indent="0">
-                        <a:buNone/>
-                      </a:pPr>
-                      <a:r>
-                        <a:rPr/>
-                        <a:t>No</a:t>
-                      </a:r>
-                      <a:r>
-                        <a:rPr/>
-                        <a:t> </a:t>
-                      </a:r>
-                      <a:r>
-                        <a:rPr/>
-                        <a:t>row</a:t>
-                      </a:r>
-                      <a:r>
-                        <a:rPr/>
-                        <a:t> </a:t>
-                      </a:r>
-                      <a:r>
-                        <a:rPr/>
-                        <a:t>for</a:t>
-                      </a:r>
-                      <a:r>
-                        <a:rPr/>
-                        <a:t> </a:t>
-                      </a:r>
-                      <a:r>
-                        <a:rPr/>
-                        <a:t>submissionId</a:t>
-                      </a:r>
-                    </a:p>
-                  </a:txBody>
-                </a:tc>
-              </a:tr>
-              <a:tr h="0">
-                <a:tc>
-                  <a:txBody>
-                    <a:bodyPr/>
-                    <a:lstStyle/>
-                    <a:p>
-                      <a:pPr lvl="0" marL="0" indent="0">
-                        <a:buNone/>
-                      </a:pPr>
-                      <a:r>
-                        <a:rPr/>
-                        <a:t>409</a:t>
-                      </a:r>
-                    </a:p>
-                  </a:txBody>
-                </a:tc>
-                <a:tc>
-                  <a:txBody>
-                    <a:bodyPr/>
-                    <a:lstStyle/>
-                    <a:p>
-                      <a:pPr lvl="0" marL="0" indent="0">
-                        <a:buNone/>
-                      </a:pPr>
-                      <a:r>
-                        <a:rPr/>
-                        <a:t>DUPLICATE_SUBMISSION</a:t>
-                      </a:r>
-                    </a:p>
-                  </a:txBody>
-                </a:tc>
-                <a:tc>
-                  <a:txBody>
-                    <a:bodyPr/>
-                    <a:lstStyle/>
-                    <a:p>
-                      <a:pPr lvl="0" marL="0" indent="0">
-                        <a:buNone/>
-                      </a:pPr>
-                      <a:r>
-                        <a:rPr/>
-                        <a:t>Unique</a:t>
-                      </a:r>
-                      <a:r>
-                        <a:rPr/>
-                        <a:t> </a:t>
-                      </a:r>
-                      <a:r>
-                        <a:rPr/>
-                        <a:t>constraint</a:t>
-                      </a:r>
-                      <a:r>
-                        <a:rPr/>
-                        <a:t> </a:t>
-                      </a:r>
-                      <a:r>
-                        <a:rPr/>
-                        <a:t>violation</a:t>
-                      </a:r>
-                    </a:p>
-                  </a:txBody>
-                </a:tc>
+                <a:extLst>
+                  <a:ext uri="{0D108BD9-81ED-4DB2-BD59-A6C34878D82A}">
+                    <a16:rowId xmlns:a16="http://schemas.microsoft.com/office/drawing/2014/main" val="10005"/>
+                  </a:ext>
+                </a:extLst>
               </a:tr>
             </a:tbl>
           </a:graphicData>
@@ -6373,6 +6427,9 @@
       </p:graphicFrame>
     </p:spTree>
   </p:cSld>
+  <p:clrMapOvr>
+    <a:masterClrMapping/>
+  </p:clrMapOvr>
 </p:sld>
 </file>
 
@@ -6408,531 +6465,76 @@
           <a:bodyPr/>
           <a:lstStyle/>
           <a:p>
-            <a:pPr lvl="0" marL="0" indent="0">
+            <a:pPr marL="0" lvl="0" indent="0">
               <a:buNone/>
             </a:pPr>
             <a:r>
-              <a:rPr/>
-              <a:t>Safety</a:t>
-            </a:r>
-            <a:r>
-              <a:rPr/>
-              <a:t> </a:t>
-            </a:r>
-            <a:r>
-              <a:rPr/>
-              <a:t>Guarantees</a:t>
-            </a:r>
-          </a:p>
-        </p:txBody>
-      </p:sp>
-      <p:graphicFrame>
-        <p:nvGraphicFramePr>
-          <p:cNvPr id="6" name="Content Placeholder 5"/>
-          <p:cNvGraphicFramePr>
-            <a:graphicFrameLocks noGrp="1"/>
-          </p:cNvGraphicFramePr>
+              <a:t>Summary</a:t>
+            </a:r>
+          </a:p>
+        </p:txBody>
+      </p:sp>
+      <p:sp>
+        <p:nvSpPr>
+          <p:cNvPr id="3" name="Content Placeholder 2"/>
+          <p:cNvSpPr>
+            <a:spLocks noGrp="1"/>
+          </p:cNvSpPr>
           <p:nvPr>
             <p:ph idx="1"/>
           </p:nvPr>
-        </p:nvGraphicFramePr>
-        <p:xfrm>
-          <a:off x="457200" y="1600200"/>
-          <a:ext cx="8229600" cy="4521200"/>
-        </p:xfrm>
-        <a:graphic>
-          <a:graphicData uri="http://schemas.openxmlformats.org/drawingml/2006/table">
-            <a:tbl>
-              <a:tblPr firstRow="1" bandRow="1">
-                <a:tableStyleId>{5C22544A-7EE6-4342-B048-85BDC9FD1C3A}</a:tableStyleId>
-              </a:tblPr>
-              <a:tblGrid>
-                <a:gridCol w="4114800"/>
-                <a:gridCol w="4114800"/>
-              </a:tblGrid>
-              <a:tr h="0">
-                <a:tc>
-                  <a:txBody>
-                    <a:bodyPr/>
-                    <a:lstStyle/>
-                    <a:p>
-                      <a:pPr lvl="0" marL="0" indent="0">
-                        <a:buNone/>
-                      </a:pPr>
-                      <a:r>
-                        <a:rPr/>
-                        <a:t>Guarantee</a:t>
-                      </a:r>
-                    </a:p>
-                  </a:txBody>
-                  <a:tcPr/>
-                </a:tc>
-                <a:tc>
-                  <a:txBody>
-                    <a:bodyPr/>
-                    <a:lstStyle/>
-                    <a:p>
-                      <a:pPr lvl="0" marL="0" indent="0">
-                        <a:buNone/>
-                      </a:pPr>
-                      <a:r>
-                        <a:rPr/>
-                        <a:t>Implementation</a:t>
-                      </a:r>
-                    </a:p>
-                  </a:txBody>
-                  <a:tcPr/>
-                </a:tc>
-              </a:tr>
-              <a:tr h="0">
-                <a:tc>
-                  <a:txBody>
-                    <a:bodyPr/>
-                    <a:lstStyle/>
-                    <a:p>
-                      <a:pPr lvl="0" marL="0" indent="0">
-                        <a:buNone/>
-                      </a:pPr>
-                      <a:r>
-                        <a:rPr b="1"/>
-                        <a:t>Atomic</a:t>
-                      </a:r>
-                      <a:r>
-                        <a:rPr b="1"/>
-                        <a:t> </a:t>
-                      </a:r>
-                      <a:r>
-                        <a:rPr b="1"/>
-                        <a:t>writes</a:t>
-                      </a:r>
-                    </a:p>
-                  </a:txBody>
-                </a:tc>
-                <a:tc>
-                  <a:txBody>
-                    <a:bodyPr/>
-                    <a:lstStyle/>
-                    <a:p>
-                      <a:pPr lvl="0" marL="0" indent="0">
-                        <a:buNone/>
-                      </a:pPr>
-                      <a:r>
-                        <a:rPr/>
-                        <a:t>@Transactional</a:t>
-                      </a:r>
-                      <a:r>
-                        <a:rPr/>
-                        <a:t> </a:t>
-                      </a:r>
-                      <a:r>
-                        <a:rPr/>
-                        <a:t>with</a:t>
-                      </a:r>
-                      <a:r>
-                        <a:rPr/>
-                        <a:t> </a:t>
-                      </a:r>
-                      <a:r>
-                        <a:rPr/>
-                        <a:t>REPEATABLE_READ</a:t>
-                      </a:r>
-                    </a:p>
-                  </a:txBody>
-                </a:tc>
-              </a:tr>
-              <a:tr h="0">
-                <a:tc>
-                  <a:txBody>
-                    <a:bodyPr/>
-                    <a:lstStyle/>
-                    <a:p>
-                      <a:pPr lvl="0" marL="0" indent="0">
-                        <a:buNone/>
-                      </a:pPr>
-                      <a:r>
-                        <a:rPr b="1"/>
-                        <a:t>Rollback</a:t>
-                      </a:r>
-                      <a:r>
-                        <a:rPr b="1"/>
-                        <a:t> </a:t>
-                      </a:r>
-                      <a:r>
-                        <a:rPr b="1"/>
-                        <a:t>on</a:t>
-                      </a:r>
-                      <a:r>
-                        <a:rPr b="1"/>
-                        <a:t> </a:t>
-                      </a:r>
-                      <a:r>
-                        <a:rPr b="1"/>
-                        <a:t>error</a:t>
-                      </a:r>
-                    </a:p>
-                  </a:txBody>
-                </a:tc>
-                <a:tc>
-                  <a:txBody>
-                    <a:bodyPr/>
-                    <a:lstStyle/>
-                    <a:p>
-                      <a:pPr lvl="0" marL="0" indent="0">
-                        <a:buNone/>
-                      </a:pPr>
-                      <a:r>
-                        <a:rPr/>
-                        <a:t>DataAccessException</a:t>
-                      </a:r>
-                      <a:r>
-                        <a:rPr/>
-                        <a:t> </a:t>
-                      </a:r>
-                      <a:r>
-                        <a:rPr/>
-                        <a:t>triggers</a:t>
-                      </a:r>
-                      <a:r>
-                        <a:rPr/>
-                        <a:t> </a:t>
-                      </a:r>
-                      <a:r>
-                        <a:rPr/>
-                        <a:t>rollback</a:t>
-                      </a:r>
-                    </a:p>
-                  </a:txBody>
-                </a:tc>
-              </a:tr>
-              <a:tr h="0">
-                <a:tc>
-                  <a:txBody>
-                    <a:bodyPr/>
-                    <a:lstStyle/>
-                    <a:p>
-                      <a:pPr lvl="0" marL="0" indent="0">
-                        <a:buNone/>
-                      </a:pPr>
-                      <a:r>
-                        <a:rPr b="1"/>
-                        <a:t>SQL</a:t>
-                      </a:r>
-                      <a:r>
-                        <a:rPr b="1"/>
-                        <a:t> </a:t>
-                      </a:r>
-                      <a:r>
-                        <a:rPr b="1"/>
-                        <a:t>injection</a:t>
-                      </a:r>
-                      <a:r>
-                        <a:rPr b="1"/>
-                        <a:t> </a:t>
-                      </a:r>
-                      <a:r>
-                        <a:rPr b="1"/>
-                        <a:t>prevention</a:t>
-                      </a:r>
-                    </a:p>
-                  </a:txBody>
-                </a:tc>
-                <a:tc>
-                  <a:txBody>
-                    <a:bodyPr/>
-                    <a:lstStyle/>
-                    <a:p>
-                      <a:pPr lvl="0" marL="0" indent="0">
-                        <a:buNone/>
-                      </a:pPr>
-                      <a:r>
-                        <a:rPr/>
-                        <a:t>IdentifierValidator</a:t>
-                      </a:r>
-                      <a:r>
-                        <a:rPr/>
-                        <a:t> </a:t>
-                      </a:r>
-                      <a:r>
-                        <a:rPr/>
-                        <a:t>+</a:t>
-                      </a:r>
-                      <a:r>
-                        <a:rPr/>
-                        <a:t> </a:t>
-                      </a:r>
-                      <a:r>
-                        <a:rPr/>
-                        <a:t>named</a:t>
-                      </a:r>
-                      <a:r>
-                        <a:rPr/>
-                        <a:t> </a:t>
-                      </a:r>
-                      <a:r>
-                        <a:rPr/>
-                        <a:t>parameters</a:t>
-                      </a:r>
-                    </a:p>
-                  </a:txBody>
-                </a:tc>
-              </a:tr>
-              <a:tr h="0">
-                <a:tc>
-                  <a:txBody>
-                    <a:bodyPr/>
-                    <a:lstStyle/>
-                    <a:p>
-                      <a:pPr lvl="0" marL="0" indent="0">
-                        <a:buNone/>
-                      </a:pPr>
-                      <a:r>
-                        <a:rPr b="1"/>
-                        <a:t>Additive-only</a:t>
-                      </a:r>
-                      <a:r>
-                        <a:rPr b="1"/>
-                        <a:t> </a:t>
-                      </a:r>
-                      <a:r>
-                        <a:rPr b="1"/>
-                        <a:t>DDL</a:t>
-                      </a:r>
-                    </a:p>
-                  </a:txBody>
-                </a:tc>
-                <a:tc>
-                  <a:txBody>
-                    <a:bodyPr/>
-                    <a:lstStyle/>
-                    <a:p>
-                      <a:pPr lvl="0" marL="0" indent="0">
-                        <a:buNone/>
-                      </a:pPr>
-                      <a:r>
-                        <a:rPr/>
-                        <a:t>Never</a:t>
-                      </a:r>
-                      <a:r>
-                        <a:rPr/>
-                        <a:t> </a:t>
-                      </a:r>
-                      <a:r>
-                        <a:rPr/>
-                        <a:t>drop</a:t>
-                      </a:r>
-                      <a:r>
-                        <a:rPr/>
-                        <a:t> </a:t>
-                      </a:r>
-                      <a:r>
-                        <a:rPr/>
-                        <a:t>columns</a:t>
-                      </a:r>
-                      <a:r>
-                        <a:rPr/>
-                        <a:t> </a:t>
-                      </a:r>
-                      <a:r>
-                        <a:rPr/>
-                        <a:t>or</a:t>
-                      </a:r>
-                      <a:r>
-                        <a:rPr/>
-                        <a:t> </a:t>
-                      </a:r>
-                      <a:r>
-                        <a:rPr/>
-                        <a:t>tables</a:t>
-                      </a:r>
-                    </a:p>
-                  </a:txBody>
-                </a:tc>
-              </a:tr>
-              <a:tr h="0">
-                <a:tc>
-                  <a:txBody>
-                    <a:bodyPr/>
-                    <a:lstStyle/>
-                    <a:p>
-                      <a:pPr lvl="0" marL="0" indent="0">
-                        <a:buNone/>
-                      </a:pPr>
-                      <a:r>
-                        <a:rPr b="1"/>
-                        <a:t>Post-insert</a:t>
-                      </a:r>
-                      <a:r>
-                        <a:rPr b="1"/>
-                        <a:t> </a:t>
-                      </a:r>
-                      <a:r>
-                        <a:rPr b="1"/>
-                        <a:t>isolation</a:t>
-                      </a:r>
-                    </a:p>
-                  </a:txBody>
-                </a:tc>
-                <a:tc>
-                  <a:txBody>
-                    <a:bodyPr/>
-                    <a:lstStyle/>
-                    <a:p>
-                      <a:pPr lvl="0" marL="0" indent="0">
-                        <a:buNone/>
-                      </a:pPr>
-                      <a:r>
-                        <a:rPr/>
-                        <a:t>Hook</a:t>
-                      </a:r>
-                      <a:r>
-                        <a:rPr/>
-                        <a:t> </a:t>
-                      </a:r>
-                      <a:r>
-                        <a:rPr/>
-                        <a:t>failures</a:t>
-                      </a:r>
-                      <a:r>
-                        <a:rPr/>
-                        <a:t> </a:t>
-                      </a:r>
-                      <a:r>
-                        <a:rPr/>
-                        <a:t>don’t</a:t>
-                      </a:r>
-                      <a:r>
-                        <a:rPr/>
-                        <a:t> </a:t>
-                      </a:r>
-                      <a:r>
-                        <a:rPr/>
-                        <a:t>rollback</a:t>
-                      </a:r>
-                      <a:r>
-                        <a:rPr/>
-                        <a:t> </a:t>
-                      </a:r>
-                      <a:r>
-                        <a:rPr/>
-                        <a:t>data</a:t>
-                      </a:r>
-                    </a:p>
-                  </a:txBody>
-                </a:tc>
-              </a:tr>
-            </a:tbl>
-          </a:graphicData>
-        </a:graphic>
-      </p:graphicFrame>
+        </p:nvSpPr>
+        <p:spPr/>
+        <p:txBody>
+          <a:bodyPr/>
+          <a:lstStyle/>
+          <a:p>
+            <a:pPr lvl="1"/>
+            <a:r>
+              <a:rPr b="1"/>
+              <a:t>For Business</a:t>
+            </a:r>
+            <a:r>
+              <a:t>: Queryable, typed data for reporting and analytics</a:t>
+            </a:r>
+          </a:p>
+          <a:p>
+            <a:pPr lvl="1"/>
+            <a:r>
+              <a:rPr b="1"/>
+              <a:t>For Compliance</a:t>
+            </a:r>
+            <a:r>
+              <a:t>: Schema-versioned submissions with audit trail</a:t>
+            </a:r>
+          </a:p>
+          <a:p>
+            <a:pPr lvl="1"/>
+            <a:r>
+              <a:rPr b="1"/>
+              <a:t>For Development</a:t>
+            </a:r>
+            <a:r>
+              <a:t>: 13 built-in transforms, pluggable hooks, zero-code form additions</a:t>
+            </a:r>
+          </a:p>
+          <a:p>
+            <a:pPr lvl="1"/>
+            <a:r>
+              <a:rPr b="1"/>
+              <a:t>For Operations</a:t>
+            </a:r>
+            <a:r>
+              <a:t>: Atomic transactions, additive-only DDL, safe error handling</a:t>
+            </a:r>
+          </a:p>
+        </p:txBody>
+      </p:sp>
     </p:spTree>
   </p:cSld>
-</p:sld>
-</file>
-
-<file path=ppt/slides/slide22.xml><?xml version="1.0" encoding="utf-8"?>
-<p:sld xmlns:a="http://schemas.openxmlformats.org/drawingml/2006/main" xmlns:r="http://schemas.openxmlformats.org/officeDocument/2006/relationships" xmlns:p="http://schemas.openxmlformats.org/presentationml/2006/main">
-  <p:cSld>
-    <p:spTree>
-      <p:nvGrpSpPr>
-        <p:cNvPr id="1" name=""/>
-        <p:cNvGrpSpPr/>
-        <p:nvPr/>
-      </p:nvGrpSpPr>
-      <p:grpSpPr>
-        <a:xfrm>
-          <a:off x="0" y="0"/>
-          <a:ext cx="0" cy="0"/>
-          <a:chOff x="0" y="0"/>
-          <a:chExt cx="0" cy="0"/>
-        </a:xfrm>
-      </p:grpSpPr>
-      <p:sp>
-        <p:nvSpPr>
-          <p:cNvPr id="2" name="Title 1"/>
-          <p:cNvSpPr>
-            <a:spLocks noGrp="1"/>
-          </p:cNvSpPr>
-          <p:nvPr>
-            <p:ph type="title"/>
-          </p:nvPr>
-        </p:nvSpPr>
-        <p:spPr/>
-        <p:txBody>
-          <a:bodyPr/>
-          <a:lstStyle/>
-          <a:p>
-            <a:pPr lvl="0" marL="0" indent="0">
-              <a:buNone/>
-            </a:pPr>
-            <a:r>
-              <a:rPr/>
-              <a:t>Summary</a:t>
-            </a:r>
-          </a:p>
-        </p:txBody>
-      </p:sp>
-      <p:sp>
-        <p:nvSpPr>
-          <p:cNvPr id="3" name="Content Placeholder 2"/>
-          <p:cNvSpPr>
-            <a:spLocks noGrp="1"/>
-          </p:cNvSpPr>
-          <p:nvPr>
-            <p:ph idx="1"/>
-          </p:nvPr>
-        </p:nvSpPr>
-        <p:spPr/>
-        <p:txBody>
-          <a:bodyPr/>
-          <a:lstStyle/>
-          <a:p>
-            <a:pPr lvl="1"/>
-            <a:r>
-              <a:rPr b="1"/>
-              <a:t>For Business</a:t>
-            </a:r>
-            <a:r>
-              <a:rPr/>
-              <a:t>: Queryable, typed data for reporting and analytics</a:t>
-            </a:r>
-          </a:p>
-          <a:p>
-            <a:pPr lvl="1"/>
-            <a:r>
-              <a:rPr b="1"/>
-              <a:t>For Compliance</a:t>
-            </a:r>
-            <a:r>
-              <a:rPr/>
-              <a:t>: Schema-versioned submissions with audit trail</a:t>
-            </a:r>
-          </a:p>
-          <a:p>
-            <a:pPr lvl="1"/>
-            <a:r>
-              <a:rPr b="1"/>
-              <a:t>For Development</a:t>
-            </a:r>
-            <a:r>
-              <a:rPr/>
-              <a:t>: 13 built-in transforms, pluggable hooks, zero-code form additions</a:t>
-            </a:r>
-          </a:p>
-          <a:p>
-            <a:pPr lvl="1"/>
-            <a:r>
-              <a:rPr b="1"/>
-              <a:t>For Operations</a:t>
-            </a:r>
-            <a:r>
-              <a:rPr/>
-              <a:t>: Atomic transactions, additive-only DDL, safe error handling</a:t>
-            </a:r>
-          </a:p>
-        </p:txBody>
-      </p:sp>
-    </p:spTree>
-  </p:cSld>
+  <p:clrMapOvr>
+    <a:masterClrMapping/>
+  </p:clrMapOvr>
 </p:sld>
 </file>
 
@@ -6968,43 +6570,18 @@
           <a:bodyPr/>
           <a:lstStyle/>
           <a:p>
-            <a:pPr lvl="0" marL="0" indent="0">
+            <a:pPr marL="0" lvl="0" indent="0">
               <a:buNone/>
             </a:pPr>
             <a:r>
-              <a:rPr/>
-              <a:t>The</a:t>
-            </a:r>
-            <a:r>
-              <a:rPr/>
-              <a:t> </a:t>
-            </a:r>
-            <a:r>
-              <a:rPr/>
-              <a:t>Solution:</a:t>
-            </a:r>
-            <a:r>
-              <a:rPr/>
-              <a:t> </a:t>
-            </a:r>
-            <a:r>
-              <a:rPr/>
-              <a:t>Bidirectional</a:t>
-            </a:r>
-            <a:r>
-              <a:rPr/>
-              <a:t> </a:t>
-            </a:r>
-            <a:r>
-              <a:rPr/>
-              <a:t>Transformation</a:t>
+              <a:t>The Solution: Bidirectional Transformation</a:t>
             </a:r>
           </a:p>
         </p:txBody>
       </p:sp>
       <p:pic>
         <p:nvPicPr>
-          <p:cNvPr descr="/tmp/doc-diagrams/TRANSFORMER_PIPELINE_diag1.png" id="0" name="Picture 1"/>
+          <p:cNvPr id="3" name="Picture 1" descr="/tmp/doc-diagrams/TRANSFORMER_PIPELINE_diag1.png"/>
           <p:cNvPicPr>
             <a:picLocks noGrp="1" noChangeAspect="1"/>
           </p:cNvPicPr>
@@ -7034,7 +6611,7 @@
       </p:pic>
       <p:sp>
         <p:nvSpPr>
-          <p:cNvPr id="1" name="TextBox 3"/>
+          <p:cNvPr id="4" name="TextBox 3"/>
           <p:cNvSpPr txBox="1"/>
           <p:nvPr/>
         </p:nvSpPr>
@@ -7052,26 +6629,20 @@
           <a:bodyPr/>
           <a:lstStyle/>
           <a:p>
-            <a:pPr lvl="0" marL="0" indent="0" algn="ctr">
+            <a:pPr marL="0" lvl="0" indent="0" algn="ctr">
               <a:buNone/>
             </a:pPr>
             <a:r>
-              <a:rPr/>
-              <a:t>Bidirectional</a:t>
-            </a:r>
-            <a:r>
-              <a:rPr/>
-              <a:t> </a:t>
-            </a:r>
-            <a:r>
-              <a:rPr/>
-              <a:t>Flow</a:t>
+              <a:t>Bidirectional Flow</a:t>
             </a:r>
           </a:p>
         </p:txBody>
       </p:sp>
     </p:spTree>
   </p:cSld>
+  <p:clrMapOvr>
+    <a:masterClrMapping/>
+  </p:clrMapOvr>
 </p:sld>
 </file>
 
@@ -7113,7 +6684,6 @@
               <a:t>Write Path</a:t>
             </a:r>
             <a:r>
-              <a:rPr/>
               <a:t>: Extract fields from JSON, convert types, store in typed columns</a:t>
             </a:r>
           </a:p>
@@ -7124,7 +6694,6 @@
               <a:t>Read Path</a:t>
             </a:r>
             <a:r>
-              <a:rPr/>
               <a:t>: Query typed columns, reconstruct original JSON structure</a:t>
             </a:r>
           </a:p>
@@ -7135,7 +6704,6 @@
               <a:t>Round-trip fidelity</a:t>
             </a:r>
             <a:r>
-              <a:rPr/>
               <a:t>: What goes in comes back out identically</a:t>
             </a:r>
           </a:p>
@@ -7143,6 +6711,9 @@
       </p:sp>
     </p:spTree>
   </p:cSld>
+  <p:clrMapOvr>
+    <a:masterClrMapping/>
+  </p:clrMapOvr>
 </p:sld>
 </file>
 
@@ -7178,36 +6749,11 @@
           <a:bodyPr/>
           <a:lstStyle/>
           <a:p>
-            <a:pPr lvl="0" marL="0" indent="0">
+            <a:pPr marL="0" lvl="0" indent="0">
               <a:buNone/>
             </a:pPr>
             <a:r>
-              <a:rPr/>
-              <a:t>Real-World</a:t>
-            </a:r>
-            <a:r>
-              <a:rPr/>
-              <a:t> </a:t>
-            </a:r>
-            <a:r>
-              <a:rPr/>
-              <a:t>Example:</a:t>
-            </a:r>
-            <a:r>
-              <a:rPr/>
-              <a:t> </a:t>
-            </a:r>
-            <a:r>
-              <a:rPr/>
-              <a:t>PI</a:t>
-            </a:r>
-            <a:r>
-              <a:rPr/>
-              <a:t> </a:t>
-            </a:r>
-            <a:r>
-              <a:rPr/>
-              <a:t>Budget</a:t>
+              <a:t>Real-World Example: PI Budget</a:t>
             </a:r>
           </a:p>
         </p:txBody>
@@ -7224,7 +6770,7 @@
         </p:nvGraphicFramePr>
         <p:xfrm>
           <a:off x="457200" y="1600200"/>
-          <a:ext cx="8229600" cy="4521200"/>
+          <a:ext cx="8229600" cy="3017520"/>
         </p:xfrm>
         <a:graphic>
           <a:graphicData uri="http://schemas.openxmlformats.org/drawingml/2006/table">
@@ -7233,9 +6779,27 @@
                 <a:tableStyleId>{5C22544A-7EE6-4342-B048-85BDC9FD1C3A}</a:tableStyleId>
               </a:tblPr>
               <a:tblGrid>
-                <a:gridCol w="2743200"/>
-                <a:gridCol w="2743200"/>
-                <a:gridCol w="2743200"/>
+                <a:gridCol w="2743200">
+                  <a:extLst>
+                    <a:ext uri="{9D8B030D-6E8A-4147-A177-3AD203B41FA5}">
+                      <a16:colId xmlns:a16="http://schemas.microsoft.com/office/drawing/2014/main" val="20000"/>
+                    </a:ext>
+                  </a:extLst>
+                </a:gridCol>
+                <a:gridCol w="2743200">
+                  <a:extLst>
+                    <a:ext uri="{9D8B030D-6E8A-4147-A177-3AD203B41FA5}">
+                      <a16:colId xmlns:a16="http://schemas.microsoft.com/office/drawing/2014/main" val="20001"/>
+                    </a:ext>
+                  </a:extLst>
+                </a:gridCol>
+                <a:gridCol w="2743200">
+                  <a:extLst>
+                    <a:ext uri="{9D8B030D-6E8A-4147-A177-3AD203B41FA5}">
+                      <a16:colId xmlns:a16="http://schemas.microsoft.com/office/drawing/2014/main" val="20002"/>
+                    </a:ext>
+                  </a:extLst>
+                </a:gridCol>
               </a:tblGrid>
               <a:tr h="0">
                 <a:tc>
@@ -7243,11 +6807,10 @@
                     <a:bodyPr/>
                     <a:lstStyle/>
                     <a:p>
-                      <a:pPr lvl="0" marL="0" indent="0">
+                      <a:pPr marL="0" lvl="0" indent="0">
                         <a:buNone/>
                       </a:pPr>
                       <a:r>
-                        <a:rPr/>
                         <a:t>Stage</a:t>
                       </a:r>
                     </a:p>
@@ -7259,20 +6822,11 @@
                     <a:bodyPr/>
                     <a:lstStyle/>
                     <a:p>
-                      <a:pPr lvl="0" marL="0" indent="0">
+                      <a:pPr marL="0" lvl="0" indent="0">
                         <a:buNone/>
                       </a:pPr>
                       <a:r>
-                        <a:rPr/>
-                        <a:t>What</a:t>
-                      </a:r>
-                      <a:r>
-                        <a:rPr/>
-                        <a:t> </a:t>
-                      </a:r>
-                      <a:r>
-                        <a:rPr/>
-                        <a:t>Happens</a:t>
+                        <a:t>What Happens</a:t>
                       </a:r>
                     </a:p>
                   </a:txBody>
@@ -7283,17 +6837,21 @@
                     <a:bodyPr/>
                     <a:lstStyle/>
                     <a:p>
-                      <a:pPr lvl="0" marL="0" indent="0">
+                      <a:pPr marL="0" lvl="0" indent="0">
                         <a:buNone/>
                       </a:pPr>
                       <a:r>
-                        <a:rPr/>
                         <a:t>Value</a:t>
                       </a:r>
                     </a:p>
                   </a:txBody>
                   <a:tcPr/>
                 </a:tc>
+                <a:extLst>
+                  <a:ext uri="{0D108BD9-81ED-4DB2-BD59-A6C34878D82A}">
+                    <a16:rowId xmlns:a16="http://schemas.microsoft.com/office/drawing/2014/main" val="10000"/>
+                  </a:ext>
+                </a:extLst>
               </a:tr>
               <a:tr h="0">
                 <a:tc>
@@ -7301,61 +6859,37 @@
                     <a:bodyPr/>
                     <a:lstStyle/>
                     <a:p>
-                      <a:pPr lvl="0" marL="0" indent="0">
+                      <a:pPr marL="0" lvl="0" indent="0">
                         <a:buNone/>
                       </a:pPr>
                       <a:r>
-                        <a:rPr/>
-                        <a:t>JSON</a:t>
-                      </a:r>
-                      <a:r>
-                        <a:rPr/>
-                        <a:t> </a:t>
-                      </a:r>
-                      <a:r>
-                        <a:rPr/>
-                        <a:t>Input</a:t>
+                        <a:t>JSON Input</a:t>
                       </a:r>
                     </a:p>
                   </a:txBody>
+                  <a:tcPr/>
                 </a:tc>
                 <a:tc>
                   <a:txBody>
                     <a:bodyPr/>
                     <a:lstStyle/>
                     <a:p>
-                      <a:pPr lvl="0" marL="0" indent="0">
+                      <a:pPr marL="0" lvl="0" indent="0">
                         <a:buNone/>
                       </a:pPr>
                       <a:r>
-                        <a:rPr/>
-                        <a:t>User</a:t>
-                      </a:r>
-                      <a:r>
-                        <a:rPr/>
-                        <a:t> </a:t>
-                      </a:r>
-                      <a:r>
-                        <a:rPr/>
-                        <a:t>enters</a:t>
-                      </a:r>
-                      <a:r>
-                        <a:rPr/>
-                        <a:t> </a:t>
-                      </a:r>
-                      <a:r>
-                        <a:rPr/>
-                        <a:t>budget</a:t>
+                        <a:t>User enters budget</a:t>
                       </a:r>
                     </a:p>
                   </a:txBody>
+                  <a:tcPr/>
                 </a:tc>
                 <a:tc>
                   <a:txBody>
                     <a:bodyPr/>
                     <a:lstStyle/>
                     <a:p>
-                      <a:pPr lvl="0" marL="0" indent="0">
+                      <a:pPr marL="0" lvl="0" indent="0">
                         <a:buNone/>
                       </a:pPr>
                       <a:r>
@@ -7365,24 +6899,17 @@
                         <a:t>1448199</a:t>
                       </a:r>
                       <a:r>
-                        <a:rPr/>
-                        <a:t> </a:t>
-                      </a:r>
-                      <a:r>
-                        <a:rPr/>
-                        <a:t>(JS</a:t>
-                      </a:r>
-                      <a:r>
-                        <a:rPr/>
-                        <a:t> </a:t>
-                      </a:r>
-                      <a:r>
-                        <a:rPr/>
-                        <a:t>number)</a:t>
+                        <a:t> (JS number)</a:t>
                       </a:r>
                     </a:p>
                   </a:txBody>
+                  <a:tcPr/>
                 </a:tc>
+                <a:extLst>
+                  <a:ext uri="{0D108BD9-81ED-4DB2-BD59-A6C34878D82A}">
+                    <a16:rowId xmlns:a16="http://schemas.microsoft.com/office/drawing/2014/main" val="10001"/>
+                  </a:ext>
+                </a:extLst>
               </a:tr>
               <a:tr h="0">
                 <a:tc>
@@ -7390,22 +6917,22 @@
                     <a:bodyPr/>
                     <a:lstStyle/>
                     <a:p>
-                      <a:pPr lvl="0" marL="0" indent="0">
+                      <a:pPr marL="0" lvl="0" indent="0">
                         <a:buNone/>
                       </a:pPr>
                       <a:r>
-                        <a:rPr/>
                         <a:t>Transform</a:t>
                       </a:r>
                     </a:p>
                   </a:txBody>
+                  <a:tcPr/>
                 </a:tc>
                 <a:tc>
                   <a:txBody>
                     <a:bodyPr/>
                     <a:lstStyle/>
                     <a:p>
-                      <a:pPr lvl="0" marL="0" indent="0">
+                      <a:pPr marL="0" lvl="0" indent="0">
                         <a:buNone/>
                       </a:pPr>
                       <a:r>
@@ -7415,22 +6942,18 @@
                         <a:t>toBigDecimal</a:t>
                       </a:r>
                       <a:r>
-                        <a:rPr/>
-                        <a:t> </a:t>
-                      </a:r>
-                      <a:r>
-                        <a:rPr/>
-                        <a:t>conversion</a:t>
+                        <a:t> conversion</a:t>
                       </a:r>
                     </a:p>
                   </a:txBody>
+                  <a:tcPr/>
                 </a:tc>
                 <a:tc>
                   <a:txBody>
                     <a:bodyPr/>
                     <a:lstStyle/>
                     <a:p>
-                      <a:pPr lvl="0" marL="0" indent="0">
+                      <a:pPr marL="0" lvl="0" indent="0">
                         <a:buNone/>
                       </a:pPr>
                       <a:r>
@@ -7441,7 +6964,13 @@
                       </a:r>
                     </a:p>
                   </a:txBody>
+                  <a:tcPr/>
                 </a:tc>
+                <a:extLst>
+                  <a:ext uri="{0D108BD9-81ED-4DB2-BD59-A6C34878D82A}">
+                    <a16:rowId xmlns:a16="http://schemas.microsoft.com/office/drawing/2014/main" val="10002"/>
+                  </a:ext>
+                </a:extLst>
               </a:tr>
               <a:tr h="0">
                 <a:tc>
@@ -7449,61 +6978,37 @@
                     <a:bodyPr/>
                     <a:lstStyle/>
                     <a:p>
-                      <a:pPr lvl="0" marL="0" indent="0">
+                      <a:pPr marL="0" lvl="0" indent="0">
                         <a:buNone/>
                       </a:pPr>
                       <a:r>
-                        <a:rPr/>
                         <a:t>Database</a:t>
                       </a:r>
                     </a:p>
                   </a:txBody>
+                  <a:tcPr/>
                 </a:tc>
                 <a:tc>
                   <a:txBody>
                     <a:bodyPr/>
                     <a:lstStyle/>
                     <a:p>
-                      <a:pPr lvl="0" marL="0" indent="0">
+                      <a:pPr marL="0" lvl="0" indent="0">
                         <a:buNone/>
                       </a:pPr>
                       <a:r>
-                        <a:rPr/>
-                        <a:t>Stored</a:t>
-                      </a:r>
-                      <a:r>
-                        <a:rPr/>
-                        <a:t> </a:t>
-                      </a:r>
-                      <a:r>
-                        <a:rPr/>
-                        <a:t>in</a:t>
-                      </a:r>
-                      <a:r>
-                        <a:rPr/>
-                        <a:t> </a:t>
-                      </a:r>
-                      <a:r>
-                        <a:rPr/>
-                        <a:t>NUMERIC</a:t>
-                      </a:r>
-                      <a:r>
-                        <a:rPr/>
-                        <a:t> </a:t>
-                      </a:r>
-                      <a:r>
-                        <a:rPr/>
-                        <a:t>column</a:t>
+                        <a:t>Stored in NUMERIC column</a:t>
                       </a:r>
                     </a:p>
                   </a:txBody>
+                  <a:tcPr/>
                 </a:tc>
                 <a:tc>
                   <a:txBody>
                     <a:bodyPr/>
                     <a:lstStyle/>
                     <a:p>
-                      <a:pPr lvl="0" marL="0" indent="0">
+                      <a:pPr marL="0" lvl="0" indent="0">
                         <a:buNone/>
                       </a:pPr>
                       <a:r>
@@ -7513,24 +7018,17 @@
                         <a:t>1448199.00</a:t>
                       </a:r>
                       <a:r>
-                        <a:rPr/>
-                        <a:t> </a:t>
-                      </a:r>
-                      <a:r>
-                        <a:rPr/>
-                        <a:t>(15,2</a:t>
-                      </a:r>
-                      <a:r>
-                        <a:rPr/>
-                        <a:t> </a:t>
-                      </a:r>
-                      <a:r>
-                        <a:rPr/>
-                        <a:t>precision)</a:t>
+                        <a:t> (15,2 precision)</a:t>
                       </a:r>
                     </a:p>
                   </a:txBody>
+                  <a:tcPr/>
                 </a:tc>
+                <a:extLst>
+                  <a:ext uri="{0D108BD9-81ED-4DB2-BD59-A6C34878D82A}">
+                    <a16:rowId xmlns:a16="http://schemas.microsoft.com/office/drawing/2014/main" val="10003"/>
+                  </a:ext>
+                </a:extLst>
               </a:tr>
               <a:tr h="0">
                 <a:tc>
@@ -7538,61 +7036,37 @@
                     <a:bodyPr/>
                     <a:lstStyle/>
                     <a:p>
-                      <a:pPr lvl="0" marL="0" indent="0">
+                      <a:pPr marL="0" lvl="0" indent="0">
                         <a:buNone/>
                       </a:pPr>
                       <a:r>
-                        <a:rPr/>
-                        <a:t>Read</a:t>
-                      </a:r>
-                      <a:r>
-                        <a:rPr/>
-                        <a:t> </a:t>
-                      </a:r>
-                      <a:r>
-                        <a:rPr/>
-                        <a:t>Back</a:t>
+                        <a:t>Read Back</a:t>
                       </a:r>
                     </a:p>
                   </a:txBody>
+                  <a:tcPr/>
                 </a:tc>
                 <a:tc>
                   <a:txBody>
                     <a:bodyPr/>
                     <a:lstStyle/>
                     <a:p>
-                      <a:pPr lvl="0" marL="0" indent="0">
+                      <a:pPr marL="0" lvl="0" indent="0">
                         <a:buNone/>
                       </a:pPr>
                       <a:r>
-                        <a:rPr/>
-                        <a:t>Column</a:t>
-                      </a:r>
-                      <a:r>
-                        <a:rPr/>
-                        <a:t> </a:t>
-                      </a:r>
-                      <a:r>
-                        <a:rPr/>
-                        <a:t>value</a:t>
-                      </a:r>
-                      <a:r>
-                        <a:rPr/>
-                        <a:t> </a:t>
-                      </a:r>
-                      <a:r>
-                        <a:rPr/>
-                        <a:t>retrieved</a:t>
+                        <a:t>Column value retrieved</a:t>
                       </a:r>
                     </a:p>
                   </a:txBody>
+                  <a:tcPr/>
                 </a:tc>
                 <a:tc>
                   <a:txBody>
                     <a:bodyPr/>
                     <a:lstStyle/>
                     <a:p>
-                      <a:pPr lvl="0" marL="0" indent="0">
+                      <a:pPr marL="0" lvl="0" indent="0">
                         <a:buNone/>
                       </a:pPr>
                       <a:r>
@@ -7603,7 +7077,13 @@
                       </a:r>
                     </a:p>
                   </a:txBody>
+                  <a:tcPr/>
                 </a:tc>
+                <a:extLst>
+                  <a:ext uri="{0D108BD9-81ED-4DB2-BD59-A6C34878D82A}">
+                    <a16:rowId xmlns:a16="http://schemas.microsoft.com/office/drawing/2014/main" val="10004"/>
+                  </a:ext>
+                </a:extLst>
               </a:tr>
               <a:tr h="0">
                 <a:tc>
@@ -7611,61 +7091,37 @@
                     <a:bodyPr/>
                     <a:lstStyle/>
                     <a:p>
-                      <a:pPr lvl="0" marL="0" indent="0">
+                      <a:pPr marL="0" lvl="0" indent="0">
                         <a:buNone/>
                       </a:pPr>
                       <a:r>
-                        <a:rPr/>
-                        <a:t>JSON</a:t>
-                      </a:r>
-                      <a:r>
-                        <a:rPr/>
-                        <a:t> </a:t>
-                      </a:r>
-                      <a:r>
-                        <a:rPr/>
-                        <a:t>Output</a:t>
+                        <a:t>JSON Output</a:t>
                       </a:r>
                     </a:p>
                   </a:txBody>
+                  <a:tcPr/>
                 </a:tc>
                 <a:tc>
                   <a:txBody>
                     <a:bodyPr/>
                     <a:lstStyle/>
                     <a:p>
-                      <a:pPr lvl="0" marL="0" indent="0">
+                      <a:pPr marL="0" lvl="0" indent="0">
                         <a:buNone/>
                       </a:pPr>
                       <a:r>
-                        <a:rPr/>
-                        <a:t>Returned</a:t>
-                      </a:r>
-                      <a:r>
-                        <a:rPr/>
-                        <a:t> </a:t>
-                      </a:r>
-                      <a:r>
-                        <a:rPr/>
-                        <a:t>to</a:t>
-                      </a:r>
-                      <a:r>
-                        <a:rPr/>
-                        <a:t> </a:t>
-                      </a:r>
-                      <a:r>
-                        <a:rPr/>
-                        <a:t>frontend</a:t>
+                        <a:t>Returned to frontend</a:t>
                       </a:r>
                     </a:p>
                   </a:txBody>
+                  <a:tcPr/>
                 </a:tc>
                 <a:tc>
                   <a:txBody>
                     <a:bodyPr/>
                     <a:lstStyle/>
                     <a:p>
-                      <a:pPr lvl="0" marL="0" indent="0">
+                      <a:pPr marL="0" lvl="0" indent="0">
                         <a:buNone/>
                       </a:pPr>
                       <a:r>
@@ -7676,7 +7132,13 @@
                       </a:r>
                     </a:p>
                   </a:txBody>
+                  <a:tcPr/>
                 </a:tc>
+                <a:extLst>
+                  <a:ext uri="{0D108BD9-81ED-4DB2-BD59-A6C34878D82A}">
+                    <a16:rowId xmlns:a16="http://schemas.microsoft.com/office/drawing/2014/main" val="10005"/>
+                  </a:ext>
+                </a:extLst>
               </a:tr>
             </a:tbl>
           </a:graphicData>
@@ -7684,6 +7146,9 @@
       </p:graphicFrame>
     </p:spTree>
   </p:cSld>
+  <p:clrMapOvr>
+    <a:masterClrMapping/>
+  </p:clrMapOvr>
 </p:sld>
 </file>
 
@@ -7719,7 +7184,7 @@
           <a:bodyPr/>
           <a:lstStyle/>
           <a:p>
-            <a:pPr lvl="0" marL="0" indent="0">
+            <a:pPr marL="0" lvl="0" indent="0">
               <a:buNone/>
             </a:pPr>
             <a:r>
@@ -7731,6 +7196,9 @@
       </p:sp>
     </p:spTree>
   </p:cSld>
+  <p:clrMapOvr>
+    <a:masterClrMapping/>
+  </p:clrMapOvr>
 </p:sld>
 </file>
 
@@ -7766,28 +7234,11 @@
           <a:bodyPr/>
           <a:lstStyle/>
           <a:p>
-            <a:pPr lvl="0" marL="0" indent="0">
+            <a:pPr marL="0" lvl="0" indent="0">
               <a:buNone/>
             </a:pPr>
             <a:r>
-              <a:rPr/>
-              <a:t>Key</a:t>
-            </a:r>
-            <a:r>
-              <a:rPr/>
-              <a:t> </a:t>
-            </a:r>
-            <a:r>
-              <a:rPr/>
-              <a:t>Business</a:t>
-            </a:r>
-            <a:r>
-              <a:rPr/>
-              <a:t> </a:t>
-            </a:r>
-            <a:r>
-              <a:rPr/>
-              <a:t>Benefits</a:t>
+              <a:t>Key Business Benefits</a:t>
             </a:r>
           </a:p>
         </p:txBody>
@@ -7813,7 +7264,6 @@
               <a:t>Queryable data</a:t>
             </a:r>
             <a:r>
-              <a:rPr/>
               <a:t> — Each field in its own typed column; direct SQL for reports</a:t>
             </a:r>
           </a:p>
@@ -7824,7 +7274,6 @@
               <a:t>Data integrity</a:t>
             </a:r>
             <a:r>
-              <a:rPr/>
               <a:t> — Dates stored as dates, numbers as numbers</a:t>
             </a:r>
           </a:p>
@@ -7835,7 +7284,6 @@
               <a:t>Validation at the gate</a:t>
             </a:r>
             <a:r>
-              <a:rPr/>
               <a:t> — Required fields and formats enforced before database</a:t>
             </a:r>
           </a:p>
@@ -7846,7 +7294,6 @@
               <a:t>Extensible</a:t>
             </a:r>
             <a:r>
-              <a:rPr/>
               <a:t> — Custom business logic via named hook points, not hardcoded</a:t>
             </a:r>
           </a:p>
@@ -7857,7 +7304,6 @@
               <a:t>Compliance-ready</a:t>
             </a:r>
             <a:r>
-              <a:rPr/>
               <a:t> — Schema versioning for historical data reconstruction</a:t>
             </a:r>
           </a:p>
@@ -7865,6 +7311,9 @@
       </p:sp>
     </p:spTree>
   </p:cSld>
+  <p:clrMapOvr>
+    <a:masterClrMapping/>
+  </p:clrMapOvr>
 </p:sld>
 </file>
 
@@ -7895,32 +7344,29 @@
             <p:ph type="title"/>
           </p:nvPr>
         </p:nvSpPr>
-        <p:spPr/>
+        <p:spPr>
+          <a:xfrm>
+            <a:off x="457200" y="274638"/>
+            <a:ext cx="5029200" cy="1143000"/>
+          </a:xfrm>
+        </p:spPr>
         <p:txBody>
           <a:bodyPr/>
           <a:lstStyle/>
           <a:p>
-            <a:pPr lvl="0" marL="0" indent="0">
+            <a:pPr marL="0" lvl="0" indent="0">
               <a:buNone/>
             </a:pPr>
             <a:r>
-              <a:rPr/>
-              <a:t>Pipeline</a:t>
-            </a:r>
-            <a:r>
-              <a:rPr/>
-              <a:t> </a:t>
-            </a:r>
-            <a:r>
-              <a:rPr/>
-              <a:t>Architecture</a:t>
+              <a:rPr dirty="0"/>
+              <a:t>Pipeline Architecture</a:t>
             </a:r>
           </a:p>
         </p:txBody>
       </p:sp>
       <p:pic>
         <p:nvPicPr>
-          <p:cNvPr descr="/tmp/doc-diagrams/TRANSFORMER_PIPELINE_diag2.png" id="0" name="Picture 1"/>
+          <p:cNvPr id="3" name="Picture 1" descr="/tmp/doc-diagrams/TRANSFORMER_PIPELINE_diag2.png"/>
           <p:cNvPicPr>
             <a:picLocks noGrp="1" noChangeAspect="1"/>
           </p:cNvPicPr>
@@ -7934,8 +7380,8 @@
         </p:blipFill>
         <p:spPr bwMode="auto">
           <a:xfrm>
-            <a:off x="3708400" y="1600200"/>
-            <a:ext cx="1739900" cy="4013200"/>
+            <a:off x="6074979" y="107731"/>
+            <a:ext cx="2936328" cy="6772844"/>
           </a:xfrm>
           <a:prstGeom prst="rect">
             <a:avLst/>
@@ -7950,14 +7396,14 @@
       </p:pic>
       <p:sp>
         <p:nvSpPr>
-          <p:cNvPr id="1" name="TextBox 3"/>
+          <p:cNvPr id="4" name="TextBox 3"/>
           <p:cNvSpPr txBox="1"/>
           <p:nvPr/>
         </p:nvSpPr>
         <p:spPr>
           <a:xfrm>
             <a:off x="457200" y="5613400"/>
-            <a:ext cx="8229600" cy="508000"/>
+            <a:ext cx="4787462" cy="508000"/>
           </a:xfrm>
           <a:prstGeom prst="rect">
             <a:avLst/>
@@ -7968,26 +7414,21 @@
           <a:bodyPr/>
           <a:lstStyle/>
           <a:p>
-            <a:pPr lvl="0" marL="0" indent="0" algn="ctr">
+            <a:pPr marL="0" lvl="0" indent="0" algn="ctr">
               <a:buNone/>
             </a:pPr>
             <a:r>
-              <a:rPr/>
-              <a:t>Full</a:t>
-            </a:r>
-            <a:r>
-              <a:rPr/>
-              <a:t> </a:t>
-            </a:r>
-            <a:r>
-              <a:rPr/>
-              <a:t>Pipeline</a:t>
+              <a:rPr dirty="0"/>
+              <a:t>Full Pipeline</a:t>
             </a:r>
           </a:p>
         </p:txBody>
       </p:sp>
     </p:spTree>
   </p:cSld>
+  <p:clrMapOvr>
+    <a:masterClrMapping/>
+  </p:clrMapOvr>
 </p:sld>
 </file>
 
@@ -8023,36 +7464,11 @@
           <a:bodyPr/>
           <a:lstStyle/>
           <a:p>
-            <a:pPr lvl="0" marL="0" indent="0">
+            <a:pPr marL="0" lvl="0" indent="0">
               <a:buNone/>
             </a:pPr>
             <a:r>
-              <a:rPr/>
-              <a:t>Write</a:t>
-            </a:r>
-            <a:r>
-              <a:rPr/>
-              <a:t> </a:t>
-            </a:r>
-            <a:r>
-              <a:rPr/>
-              <a:t>Pipeline:</a:t>
-            </a:r>
-            <a:r>
-              <a:rPr/>
-              <a:t> </a:t>
-            </a:r>
-            <a:r>
-              <a:rPr/>
-              <a:t>7</a:t>
-            </a:r>
-            <a:r>
-              <a:rPr/>
-              <a:t> </a:t>
-            </a:r>
-            <a:r>
-              <a:rPr/>
-              <a:t>Stages</a:t>
+              <a:t>Write Pipeline: 7 Stages</a:t>
             </a:r>
           </a:p>
         </p:txBody>
@@ -8080,7 +7496,6 @@
               <a:t>Template Resolution</a:t>
             </a:r>
             <a:r>
-              <a:rPr/>
               <a:t> — Load template from cache by formId</a:t>
             </a:r>
           </a:p>
@@ -8093,7 +7508,6 @@
               <a:t>Pre-Validation Hooks</a:t>
             </a:r>
             <a:r>
-              <a:rPr/>
               <a:t> — Normalize data (trim, format phones)</a:t>
             </a:r>
           </a:p>
@@ -8106,7 +7520,6 @@
               <a:t>Validation Gate</a:t>
             </a:r>
             <a:r>
-              <a:rPr/>
               <a:t> — Check required fields, enums, formats; collect ALL errors</a:t>
             </a:r>
           </a:p>
@@ -8119,7 +7532,6 @@
               <a:t>Field Mapping</a:t>
             </a:r>
             <a:r>
-              <a:rPr/>
               <a:t> — Extract by jsonPath, apply transforms, coerce types</a:t>
             </a:r>
           </a:p>
@@ -8132,7 +7544,6 @@
               <a:t>Pre-Insert Hooks</a:t>
             </a:r>
             <a:r>
-              <a:rPr/>
               <a:t> — Encrypt, hash, cross-field logic</a:t>
             </a:r>
           </a:p>
@@ -8145,7 +7556,6 @@
               <a:t>SQL Insert</a:t>
             </a:r>
             <a:r>
-              <a:rPr/>
               <a:t> — Atomic parent + child table writes</a:t>
             </a:r>
           </a:p>
@@ -8158,7 +7568,6 @@
               <a:t>Post-Insert Hooks</a:t>
             </a:r>
             <a:r>
-              <a:rPr/>
               <a:t> — Audit events, notifications</a:t>
             </a:r>
           </a:p>
@@ -8166,6 +7575,9 @@
       </p:sp>
     </p:spTree>
   </p:cSld>
+  <p:clrMapOvr>
+    <a:masterClrMapping/>
+  </p:clrMapOvr>
 </p:sld>
 </file>
 
